--- a/mrc_automation_agent/templates/DMR-16ch_template.pptx
+++ b/mrc_automation_agent/templates/DMR-16ch_template.pptx
@@ -23920,7 +23920,7 @@
           <a:p>
             <a:r>
               <a:rPr lang="en-US" dirty="0"/>
-              <a:t>WW25’26</a:t>
+              <a:t>WW00'00</a:t>
             </a:r>
           </a:p>
         </p:txBody>
@@ -23973,948 +23973,9 @@
           <a:chExt cx="0" cy="0"/>
         </a:xfrm>
       </p:grpSpPr>
-      <p:sp>
-        <p:nvSpPr>
-          <p:cNvPr id="54" name="Star: 5 Points 53">
-            <a:extLst>
-              <a:ext uri="{FF2B5EF4-FFF2-40B4-BE49-F238E27FC236}">
-                <a16:creationId xmlns:a16="http://schemas.microsoft.com/office/drawing/2014/main" id="{747D810F-9426-5970-BDFC-868C57A076EC}"/>
-              </a:ext>
-            </a:extLst>
-          </p:cNvPr>
-          <p:cNvSpPr/>
-          <p:nvPr/>
-        </p:nvSpPr>
-        <p:spPr>
-          <a:xfrm>
-            <a:off x="1921935" y="515149"/>
-            <a:ext cx="240063" cy="237185"/>
-          </a:xfrm>
-          <a:prstGeom prst="star5">
-            <a:avLst/>
-          </a:prstGeom>
-          <a:solidFill>
-            <a:srgbClr val="00B050"/>
-          </a:solidFill>
-          <a:ln w="12700" cap="flat">
-            <a:solidFill>
-              <a:srgbClr val="0070C0"/>
-            </a:solidFill>
-            <a:miter lim="400000"/>
-          </a:ln>
-          <a:effectLst/>
-          <a:sp3d/>
-        </p:spPr>
-        <p:style>
-          <a:lnRef idx="0">
-            <a:scrgbClr r="0" g="0" b="0"/>
-          </a:lnRef>
-          <a:fillRef idx="0">
-            <a:scrgbClr r="0" g="0" b="0"/>
-          </a:fillRef>
-          <a:effectRef idx="0">
-            <a:scrgbClr r="0" g="0" b="0"/>
-          </a:effectRef>
-          <a:fontRef idx="none"/>
-        </p:style>
-        <p:txBody>
-          <a:bodyPr rot="0" spcFirstLastPara="1" vert="horz" wrap="square" lIns="50800" tIns="50800" rIns="50800" bIns="50800" numCol="1" spcCol="38100" rtlCol="0" anchor="ctr">
-            <a:spAutoFit/>
-          </a:bodyPr>
-          <a:lstStyle>
-            <a:defPPr marL="0" marR="0" indent="0" algn="l" defTabSz="457200" rtl="0" fontAlgn="auto" latinLnBrk="1" hangingPunct="0">
-              <a:lnSpc>
-                <a:spcPct val="100000"/>
-              </a:lnSpc>
-              <a:spcBef>
-                <a:spcPts val="0"/>
-              </a:spcBef>
-              <a:spcAft>
-                <a:spcPts val="0"/>
-              </a:spcAft>
-              <a:buClrTx/>
-              <a:buSzTx/>
-              <a:buFontTx/>
-              <a:buNone/>
-              <a:tabLst/>
-              <a:defRPr kumimoji="0" sz="900" b="0" i="0" u="none" strike="noStrike" cap="none" spc="0" normalizeH="0" baseline="0">
-                <a:ln>
-                  <a:noFill/>
-                </a:ln>
-                <a:solidFill>
-                  <a:srgbClr val="000000"/>
-                </a:solidFill>
-                <a:effectLst/>
-                <a:uFillTx/>
-              </a:defRPr>
-            </a:defPPr>
-            <a:lvl1pPr marL="0" marR="0" indent="0" algn="l" defTabSz="1219169" rtl="0" fontAlgn="auto" latinLnBrk="0" hangingPunct="0">
-              <a:lnSpc>
-                <a:spcPct val="90000"/>
-              </a:lnSpc>
-              <a:spcBef>
-                <a:spcPts val="2250"/>
-              </a:spcBef>
-              <a:spcAft>
-                <a:spcPts val="0"/>
-              </a:spcAft>
-              <a:buClrTx/>
-              <a:buSzTx/>
-              <a:buFontTx/>
-              <a:buNone/>
-              <a:tabLst/>
-              <a:defRPr kumimoji="0" sz="2400" b="0" i="0" u="none" strike="noStrike" cap="none" spc="0" normalizeH="0" baseline="0">
-                <a:ln>
-                  <a:noFill/>
-                </a:ln>
-                <a:solidFill>
-                  <a:srgbClr val="000000"/>
-                </a:solidFill>
-                <a:effectLst/>
-                <a:uFillTx/>
-                <a:latin typeface="+mn-lt"/>
-                <a:ea typeface="+mn-ea"/>
-                <a:cs typeface="+mn-cs"/>
-                <a:sym typeface="Helvetica Neue"/>
-              </a:defRPr>
-            </a:lvl1pPr>
-            <a:lvl2pPr marL="0" marR="0" indent="0" algn="l" defTabSz="1219169" rtl="0" fontAlgn="auto" latinLnBrk="0" hangingPunct="0">
-              <a:lnSpc>
-                <a:spcPct val="90000"/>
-              </a:lnSpc>
-              <a:spcBef>
-                <a:spcPts val="2250"/>
-              </a:spcBef>
-              <a:spcAft>
-                <a:spcPts val="0"/>
-              </a:spcAft>
-              <a:buClrTx/>
-              <a:buSzTx/>
-              <a:buFontTx/>
-              <a:buNone/>
-              <a:tabLst/>
-              <a:defRPr kumimoji="0" sz="2400" b="0" i="0" u="none" strike="noStrike" cap="none" spc="0" normalizeH="0" baseline="0">
-                <a:ln>
-                  <a:noFill/>
-                </a:ln>
-                <a:solidFill>
-                  <a:srgbClr val="000000"/>
-                </a:solidFill>
-                <a:effectLst/>
-                <a:uFillTx/>
-                <a:latin typeface="+mn-lt"/>
-                <a:ea typeface="+mn-ea"/>
-                <a:cs typeface="+mn-cs"/>
-                <a:sym typeface="Helvetica Neue"/>
-              </a:defRPr>
-            </a:lvl2pPr>
-            <a:lvl3pPr marL="0" marR="0" indent="0" algn="l" defTabSz="1219169" rtl="0" fontAlgn="auto" latinLnBrk="0" hangingPunct="0">
-              <a:lnSpc>
-                <a:spcPct val="90000"/>
-              </a:lnSpc>
-              <a:spcBef>
-                <a:spcPts val="2250"/>
-              </a:spcBef>
-              <a:spcAft>
-                <a:spcPts val="0"/>
-              </a:spcAft>
-              <a:buClrTx/>
-              <a:buSzTx/>
-              <a:buFontTx/>
-              <a:buNone/>
-              <a:tabLst/>
-              <a:defRPr kumimoji="0" sz="2400" b="0" i="0" u="none" strike="noStrike" cap="none" spc="0" normalizeH="0" baseline="0">
-                <a:ln>
-                  <a:noFill/>
-                </a:ln>
-                <a:solidFill>
-                  <a:srgbClr val="000000"/>
-                </a:solidFill>
-                <a:effectLst/>
-                <a:uFillTx/>
-                <a:latin typeface="+mn-lt"/>
-                <a:ea typeface="+mn-ea"/>
-                <a:cs typeface="+mn-cs"/>
-                <a:sym typeface="Helvetica Neue"/>
-              </a:defRPr>
-            </a:lvl3pPr>
-            <a:lvl4pPr marL="0" marR="0" indent="0" algn="l" defTabSz="1219169" rtl="0" fontAlgn="auto" latinLnBrk="0" hangingPunct="0">
-              <a:lnSpc>
-                <a:spcPct val="90000"/>
-              </a:lnSpc>
-              <a:spcBef>
-                <a:spcPts val="2250"/>
-              </a:spcBef>
-              <a:spcAft>
-                <a:spcPts val="0"/>
-              </a:spcAft>
-              <a:buClrTx/>
-              <a:buSzTx/>
-              <a:buFontTx/>
-              <a:buNone/>
-              <a:tabLst/>
-              <a:defRPr kumimoji="0" sz="2400" b="0" i="0" u="none" strike="noStrike" cap="none" spc="0" normalizeH="0" baseline="0">
-                <a:ln>
-                  <a:noFill/>
-                </a:ln>
-                <a:solidFill>
-                  <a:srgbClr val="000000"/>
-                </a:solidFill>
-                <a:effectLst/>
-                <a:uFillTx/>
-                <a:latin typeface="+mn-lt"/>
-                <a:ea typeface="+mn-ea"/>
-                <a:cs typeface="+mn-cs"/>
-                <a:sym typeface="Helvetica Neue"/>
-              </a:defRPr>
-            </a:lvl4pPr>
-            <a:lvl5pPr marL="0" marR="0" indent="0" algn="l" defTabSz="1219169" rtl="0" fontAlgn="auto" latinLnBrk="0" hangingPunct="0">
-              <a:lnSpc>
-                <a:spcPct val="90000"/>
-              </a:lnSpc>
-              <a:spcBef>
-                <a:spcPts val="2250"/>
-              </a:spcBef>
-              <a:spcAft>
-                <a:spcPts val="0"/>
-              </a:spcAft>
-              <a:buClrTx/>
-              <a:buSzTx/>
-              <a:buFontTx/>
-              <a:buNone/>
-              <a:tabLst/>
-              <a:defRPr kumimoji="0" sz="2400" b="0" i="0" u="none" strike="noStrike" cap="none" spc="0" normalizeH="0" baseline="0">
-                <a:ln>
-                  <a:noFill/>
-                </a:ln>
-                <a:solidFill>
-                  <a:srgbClr val="000000"/>
-                </a:solidFill>
-                <a:effectLst/>
-                <a:uFillTx/>
-                <a:latin typeface="+mn-lt"/>
-                <a:ea typeface="+mn-ea"/>
-                <a:cs typeface="+mn-cs"/>
-                <a:sym typeface="Helvetica Neue"/>
-              </a:defRPr>
-            </a:lvl5pPr>
-            <a:lvl6pPr marL="0" marR="0" indent="0" algn="l" defTabSz="1219169" rtl="0" fontAlgn="auto" latinLnBrk="0" hangingPunct="0">
-              <a:lnSpc>
-                <a:spcPct val="90000"/>
-              </a:lnSpc>
-              <a:spcBef>
-                <a:spcPts val="2250"/>
-              </a:spcBef>
-              <a:spcAft>
-                <a:spcPts val="0"/>
-              </a:spcAft>
-              <a:buClrTx/>
-              <a:buSzTx/>
-              <a:buFontTx/>
-              <a:buNone/>
-              <a:tabLst/>
-              <a:defRPr kumimoji="0" sz="2400" b="0" i="0" u="none" strike="noStrike" cap="none" spc="0" normalizeH="0" baseline="0">
-                <a:ln>
-                  <a:noFill/>
-                </a:ln>
-                <a:solidFill>
-                  <a:srgbClr val="000000"/>
-                </a:solidFill>
-                <a:effectLst/>
-                <a:uFillTx/>
-                <a:latin typeface="+mn-lt"/>
-                <a:ea typeface="+mn-ea"/>
-                <a:cs typeface="+mn-cs"/>
-                <a:sym typeface="Helvetica Neue"/>
-              </a:defRPr>
-            </a:lvl6pPr>
-            <a:lvl7pPr marL="0" marR="0" indent="0" algn="l" defTabSz="1219169" rtl="0" fontAlgn="auto" latinLnBrk="0" hangingPunct="0">
-              <a:lnSpc>
-                <a:spcPct val="90000"/>
-              </a:lnSpc>
-              <a:spcBef>
-                <a:spcPts val="2250"/>
-              </a:spcBef>
-              <a:spcAft>
-                <a:spcPts val="0"/>
-              </a:spcAft>
-              <a:buClrTx/>
-              <a:buSzTx/>
-              <a:buFontTx/>
-              <a:buNone/>
-              <a:tabLst/>
-              <a:defRPr kumimoji="0" sz="2400" b="0" i="0" u="none" strike="noStrike" cap="none" spc="0" normalizeH="0" baseline="0">
-                <a:ln>
-                  <a:noFill/>
-                </a:ln>
-                <a:solidFill>
-                  <a:srgbClr val="000000"/>
-                </a:solidFill>
-                <a:effectLst/>
-                <a:uFillTx/>
-                <a:latin typeface="+mn-lt"/>
-                <a:ea typeface="+mn-ea"/>
-                <a:cs typeface="+mn-cs"/>
-                <a:sym typeface="Helvetica Neue"/>
-              </a:defRPr>
-            </a:lvl7pPr>
-            <a:lvl8pPr marL="0" marR="0" indent="0" algn="l" defTabSz="1219169" rtl="0" fontAlgn="auto" latinLnBrk="0" hangingPunct="0">
-              <a:lnSpc>
-                <a:spcPct val="90000"/>
-              </a:lnSpc>
-              <a:spcBef>
-                <a:spcPts val="2250"/>
-              </a:spcBef>
-              <a:spcAft>
-                <a:spcPts val="0"/>
-              </a:spcAft>
-              <a:buClrTx/>
-              <a:buSzTx/>
-              <a:buFontTx/>
-              <a:buNone/>
-              <a:tabLst/>
-              <a:defRPr kumimoji="0" sz="2400" b="0" i="0" u="none" strike="noStrike" cap="none" spc="0" normalizeH="0" baseline="0">
-                <a:ln>
-                  <a:noFill/>
-                </a:ln>
-                <a:solidFill>
-                  <a:srgbClr val="000000"/>
-                </a:solidFill>
-                <a:effectLst/>
-                <a:uFillTx/>
-                <a:latin typeface="+mn-lt"/>
-                <a:ea typeface="+mn-ea"/>
-                <a:cs typeface="+mn-cs"/>
-                <a:sym typeface="Helvetica Neue"/>
-              </a:defRPr>
-            </a:lvl8pPr>
-            <a:lvl9pPr marL="0" marR="0" indent="0" algn="l" defTabSz="1219169" rtl="0" fontAlgn="auto" latinLnBrk="0" hangingPunct="0">
-              <a:lnSpc>
-                <a:spcPct val="90000"/>
-              </a:lnSpc>
-              <a:spcBef>
-                <a:spcPts val="2250"/>
-              </a:spcBef>
-              <a:spcAft>
-                <a:spcPts val="0"/>
-              </a:spcAft>
-              <a:buClrTx/>
-              <a:buSzTx/>
-              <a:buFontTx/>
-              <a:buNone/>
-              <a:tabLst/>
-              <a:defRPr kumimoji="0" sz="2400" b="0" i="0" u="none" strike="noStrike" cap="none" spc="0" normalizeH="0" baseline="0">
-                <a:ln>
-                  <a:noFill/>
-                </a:ln>
-                <a:solidFill>
-                  <a:srgbClr val="000000"/>
-                </a:solidFill>
-                <a:effectLst/>
-                <a:uFillTx/>
-                <a:latin typeface="+mn-lt"/>
-                <a:ea typeface="+mn-ea"/>
-                <a:cs typeface="+mn-cs"/>
-                <a:sym typeface="Helvetica Neue"/>
-              </a:defRPr>
-            </a:lvl9pPr>
-          </a:lstStyle>
-          <a:p>
-            <a:pPr marL="0" marR="0" indent="0" algn="ctr" defTabSz="825500" rtl="0" fontAlgn="auto" latinLnBrk="0" hangingPunct="0">
-              <a:lnSpc>
-                <a:spcPct val="100000"/>
-              </a:lnSpc>
-              <a:spcBef>
-                <a:spcPts val="0"/>
-              </a:spcBef>
-              <a:spcAft>
-                <a:spcPts val="0"/>
-              </a:spcAft>
-              <a:buClrTx/>
-              <a:buSzTx/>
-              <a:buFontTx/>
-              <a:buNone/>
-              <a:tabLst/>
-            </a:pPr>
-            <a:endParaRPr kumimoji="0" lang="en-US" sz="3200" b="0" i="0" u="none" strike="noStrike" cap="none" spc="0" normalizeH="0" baseline="0">
-              <a:ln>
-                <a:noFill/>
-              </a:ln>
-              <a:solidFill>
-                <a:srgbClr val="FFFFFF"/>
-              </a:solidFill>
-              <a:effectLst/>
-              <a:uFillTx/>
-              <a:latin typeface="Helvetica Neue Medium"/>
-              <a:ea typeface="Helvetica Neue Medium"/>
-              <a:cs typeface="Helvetica Neue Medium"/>
-              <a:sym typeface="Helvetica Neue Medium"/>
-            </a:endParaRPr>
-          </a:p>
-        </p:txBody>
-      </p:sp>
-      <p:sp>
-        <p:nvSpPr>
-          <p:cNvPr id="57" name="Title 1">
-            <a:extLst>
-              <a:ext uri="{FF2B5EF4-FFF2-40B4-BE49-F238E27FC236}">
-                <a16:creationId xmlns:a16="http://schemas.microsoft.com/office/drawing/2014/main" id="{A1B53866-B716-9BEB-C7C0-F2B817EE2687}"/>
-              </a:ext>
-            </a:extLst>
-          </p:cNvPr>
-          <p:cNvSpPr>
-            <a:spLocks noGrp="1"/>
-          </p:cNvSpPr>
-          <p:nvPr/>
-        </p:nvSpPr>
-        <p:spPr>
-          <a:xfrm>
-            <a:off x="182206" y="-12864"/>
-            <a:ext cx="6530210" cy="386158"/>
-          </a:xfrm>
-          <a:prstGeom prst="rect">
-            <a:avLst/>
-          </a:prstGeom>
-          <a:ln w="12700">
-            <a:miter lim="400000"/>
-          </a:ln>
-          <a:extLst>
-            <a:ext uri="{C572A759-6A51-4108-AA02-DFA0A04FC94B}">
-              <ma14:wrappingTextBoxFlag xmlns:lc="http://schemas.openxmlformats.org/drawingml/2006/lockedCanvas" xmlns:ma14="http://schemas.microsoft.com/office/mac/drawingml/2011/main" xmlns:a14="http://schemas.microsoft.com/office/drawing/2010/main" xmlns:m="http://schemas.openxmlformats.org/officeDocument/2006/math" xmlns="" val="1"/>
-            </a:ext>
-          </a:extLst>
-        </p:spPr>
-        <p:txBody>
-          <a:bodyPr lIns="0" tIns="0" rIns="0" bIns="0">
-            <a:noAutofit/>
-          </a:bodyPr>
-          <a:lstStyle>
-            <a:lvl1pPr marL="0" marR="0" indent="0" algn="l" defTabSz="609600" latinLnBrk="0">
-              <a:lnSpc>
-                <a:spcPct val="90000"/>
-              </a:lnSpc>
-              <a:spcBef>
-                <a:spcPts val="0"/>
-              </a:spcBef>
-              <a:spcAft>
-                <a:spcPts val="0"/>
-              </a:spcAft>
-              <a:buClrTx/>
-              <a:buSzTx/>
-              <a:buFontTx/>
-              <a:buNone/>
-              <a:tabLst/>
-              <a:defRPr sz="4000" b="0" i="0" u="none" strike="noStrike" cap="none" spc="0" baseline="0">
-                <a:solidFill>
-                  <a:srgbClr val="525252"/>
-                </a:solidFill>
-                <a:uFillTx/>
-                <a:latin typeface="IntelOne Display Regular"/>
-                <a:ea typeface="Intel Clear Light" panose="020B0404020203020204" pitchFamily="34" charset="0"/>
-                <a:cs typeface="Intel Clear Light" panose="020B0404020203020204" pitchFamily="34" charset="0"/>
-                <a:sym typeface="Helvetica"/>
-              </a:defRPr>
-            </a:lvl1pPr>
-            <a:lvl2pPr marL="0" marR="0" indent="0" algn="l" defTabSz="609600" latinLnBrk="0">
-              <a:lnSpc>
-                <a:spcPct val="90000"/>
-              </a:lnSpc>
-              <a:spcBef>
-                <a:spcPts val="0"/>
-              </a:spcBef>
-              <a:spcAft>
-                <a:spcPts val="0"/>
-              </a:spcAft>
-              <a:buClrTx/>
-              <a:buSzTx/>
-              <a:buFontTx/>
-              <a:buNone/>
-              <a:tabLst/>
-              <a:defRPr sz="3300" b="1" i="0" u="none" strike="noStrike" cap="none" spc="0" baseline="0">
-                <a:solidFill>
-                  <a:srgbClr val="535353"/>
-                </a:solidFill>
-                <a:uFillTx/>
-                <a:latin typeface="Helvetica"/>
-                <a:ea typeface="Helvetica"/>
-                <a:cs typeface="Helvetica"/>
-                <a:sym typeface="Helvetica"/>
-              </a:defRPr>
-            </a:lvl2pPr>
-            <a:lvl3pPr marL="0" marR="0" indent="0" algn="l" defTabSz="609600" latinLnBrk="0">
-              <a:lnSpc>
-                <a:spcPct val="90000"/>
-              </a:lnSpc>
-              <a:spcBef>
-                <a:spcPts val="0"/>
-              </a:spcBef>
-              <a:spcAft>
-                <a:spcPts val="0"/>
-              </a:spcAft>
-              <a:buClrTx/>
-              <a:buSzTx/>
-              <a:buFontTx/>
-              <a:buNone/>
-              <a:tabLst/>
-              <a:defRPr sz="3300" b="1" i="0" u="none" strike="noStrike" cap="none" spc="0" baseline="0">
-                <a:solidFill>
-                  <a:srgbClr val="535353"/>
-                </a:solidFill>
-                <a:uFillTx/>
-                <a:latin typeface="Helvetica"/>
-                <a:ea typeface="Helvetica"/>
-                <a:cs typeface="Helvetica"/>
-                <a:sym typeface="Helvetica"/>
-              </a:defRPr>
-            </a:lvl3pPr>
-            <a:lvl4pPr marL="0" marR="0" indent="0" algn="l" defTabSz="609600" latinLnBrk="0">
-              <a:lnSpc>
-                <a:spcPct val="90000"/>
-              </a:lnSpc>
-              <a:spcBef>
-                <a:spcPts val="0"/>
-              </a:spcBef>
-              <a:spcAft>
-                <a:spcPts val="0"/>
-              </a:spcAft>
-              <a:buClrTx/>
-              <a:buSzTx/>
-              <a:buFontTx/>
-              <a:buNone/>
-              <a:tabLst/>
-              <a:defRPr sz="3300" b="1" i="0" u="none" strike="noStrike" cap="none" spc="0" baseline="0">
-                <a:solidFill>
-                  <a:srgbClr val="535353"/>
-                </a:solidFill>
-                <a:uFillTx/>
-                <a:latin typeface="Helvetica"/>
-                <a:ea typeface="Helvetica"/>
-                <a:cs typeface="Helvetica"/>
-                <a:sym typeface="Helvetica"/>
-              </a:defRPr>
-            </a:lvl4pPr>
-            <a:lvl5pPr marL="0" marR="0" indent="0" algn="l" defTabSz="609600" latinLnBrk="0">
-              <a:lnSpc>
-                <a:spcPct val="90000"/>
-              </a:lnSpc>
-              <a:spcBef>
-                <a:spcPts val="0"/>
-              </a:spcBef>
-              <a:spcAft>
-                <a:spcPts val="0"/>
-              </a:spcAft>
-              <a:buClrTx/>
-              <a:buSzTx/>
-              <a:buFontTx/>
-              <a:buNone/>
-              <a:tabLst/>
-              <a:defRPr sz="3300" b="1" i="0" u="none" strike="noStrike" cap="none" spc="0" baseline="0">
-                <a:solidFill>
-                  <a:srgbClr val="535353"/>
-                </a:solidFill>
-                <a:uFillTx/>
-                <a:latin typeface="Helvetica"/>
-                <a:ea typeface="Helvetica"/>
-                <a:cs typeface="Helvetica"/>
-                <a:sym typeface="Helvetica"/>
-              </a:defRPr>
-            </a:lvl5pPr>
-            <a:lvl6pPr marL="0" marR="0" indent="0" algn="l" defTabSz="609600" latinLnBrk="0">
-              <a:lnSpc>
-                <a:spcPct val="90000"/>
-              </a:lnSpc>
-              <a:spcBef>
-                <a:spcPts val="0"/>
-              </a:spcBef>
-              <a:spcAft>
-                <a:spcPts val="0"/>
-              </a:spcAft>
-              <a:buClrTx/>
-              <a:buSzTx/>
-              <a:buFontTx/>
-              <a:buNone/>
-              <a:tabLst/>
-              <a:defRPr sz="3300" b="1" i="0" u="none" strike="noStrike" cap="none" spc="0" baseline="0">
-                <a:solidFill>
-                  <a:srgbClr val="535353"/>
-                </a:solidFill>
-                <a:uFillTx/>
-                <a:latin typeface="Helvetica"/>
-                <a:ea typeface="Helvetica"/>
-                <a:cs typeface="Helvetica"/>
-                <a:sym typeface="Helvetica"/>
-              </a:defRPr>
-            </a:lvl6pPr>
-            <a:lvl7pPr marL="0" marR="0" indent="0" algn="l" defTabSz="609600" latinLnBrk="0">
-              <a:lnSpc>
-                <a:spcPct val="90000"/>
-              </a:lnSpc>
-              <a:spcBef>
-                <a:spcPts val="0"/>
-              </a:spcBef>
-              <a:spcAft>
-                <a:spcPts val="0"/>
-              </a:spcAft>
-              <a:buClrTx/>
-              <a:buSzTx/>
-              <a:buFontTx/>
-              <a:buNone/>
-              <a:tabLst/>
-              <a:defRPr sz="3300" b="1" i="0" u="none" strike="noStrike" cap="none" spc="0" baseline="0">
-                <a:solidFill>
-                  <a:srgbClr val="535353"/>
-                </a:solidFill>
-                <a:uFillTx/>
-                <a:latin typeface="Helvetica"/>
-                <a:ea typeface="Helvetica"/>
-                <a:cs typeface="Helvetica"/>
-                <a:sym typeface="Helvetica"/>
-              </a:defRPr>
-            </a:lvl7pPr>
-            <a:lvl8pPr marL="0" marR="0" indent="0" algn="l" defTabSz="609600" latinLnBrk="0">
-              <a:lnSpc>
-                <a:spcPct val="90000"/>
-              </a:lnSpc>
-              <a:spcBef>
-                <a:spcPts val="0"/>
-              </a:spcBef>
-              <a:spcAft>
-                <a:spcPts val="0"/>
-              </a:spcAft>
-              <a:buClrTx/>
-              <a:buSzTx/>
-              <a:buFontTx/>
-              <a:buNone/>
-              <a:tabLst/>
-              <a:defRPr sz="3300" b="1" i="0" u="none" strike="noStrike" cap="none" spc="0" baseline="0">
-                <a:solidFill>
-                  <a:srgbClr val="535353"/>
-                </a:solidFill>
-                <a:uFillTx/>
-                <a:latin typeface="Helvetica"/>
-                <a:ea typeface="Helvetica"/>
-                <a:cs typeface="Helvetica"/>
-                <a:sym typeface="Helvetica"/>
-              </a:defRPr>
-            </a:lvl8pPr>
-            <a:lvl9pPr marL="0" marR="0" indent="0" algn="l" defTabSz="609600" latinLnBrk="0">
-              <a:lnSpc>
-                <a:spcPct val="90000"/>
-              </a:lnSpc>
-              <a:spcBef>
-                <a:spcPts val="0"/>
-              </a:spcBef>
-              <a:spcAft>
-                <a:spcPts val="0"/>
-              </a:spcAft>
-              <a:buClrTx/>
-              <a:buSzTx/>
-              <a:buFontTx/>
-              <a:buNone/>
-              <a:tabLst/>
-              <a:defRPr sz="3300" b="1" i="0" u="none" strike="noStrike" cap="none" spc="0" baseline="0">
-                <a:solidFill>
-                  <a:srgbClr val="535353"/>
-                </a:solidFill>
-                <a:uFillTx/>
-                <a:latin typeface="Helvetica"/>
-                <a:ea typeface="Helvetica"/>
-                <a:cs typeface="Helvetica"/>
-                <a:sym typeface="Helvetica"/>
-              </a:defRPr>
-            </a:lvl9pPr>
-          </a:lstStyle>
-          <a:p>
-            <a:r>
-              <a:rPr lang="en-US" sz="3200" dirty="0"/>
-              <a:t>Platform Dashboard –WW30</a:t>
-            </a:r>
-          </a:p>
-        </p:txBody>
-      </p:sp>
-      <p:sp>
-        <p:nvSpPr>
-          <p:cNvPr id="58" name="Title 1">
-            <a:extLst>
-              <a:ext uri="{FF2B5EF4-FFF2-40B4-BE49-F238E27FC236}">
-                <a16:creationId xmlns:a16="http://schemas.microsoft.com/office/drawing/2014/main" id="{9BB02BB6-F385-5265-A3AB-2251EA1692C7}"/>
-              </a:ext>
-            </a:extLst>
-          </p:cNvPr>
-          <p:cNvSpPr>
-            <a:spLocks noGrp="1"/>
-          </p:cNvSpPr>
-          <p:nvPr/>
-        </p:nvSpPr>
-        <p:spPr>
-          <a:xfrm>
-            <a:off x="6423739" y="-18847"/>
-            <a:ext cx="4231785" cy="386158"/>
-          </a:xfrm>
-          <a:prstGeom prst="rect">
-            <a:avLst/>
-          </a:prstGeom>
-          <a:ln w="12700">
-            <a:miter lim="400000"/>
-          </a:ln>
-          <a:extLst>
-            <a:ext uri="{C572A759-6A51-4108-AA02-DFA0A04FC94B}">
-              <ma14:wrappingTextBoxFlag xmlns:lc="http://schemas.openxmlformats.org/drawingml/2006/lockedCanvas" xmlns:ma14="http://schemas.microsoft.com/office/mac/drawingml/2011/main" xmlns:a14="http://schemas.microsoft.com/office/drawing/2010/main" xmlns:m="http://schemas.openxmlformats.org/officeDocument/2006/math" xmlns="" val="1"/>
-            </a:ext>
-          </a:extLst>
-        </p:spPr>
-        <p:txBody>
-          <a:bodyPr lIns="0" tIns="0" rIns="0" bIns="0">
-            <a:noAutofit/>
-          </a:bodyPr>
-          <a:lstStyle>
-            <a:lvl1pPr marL="0" marR="0" indent="0" algn="l" defTabSz="609600" latinLnBrk="0">
-              <a:lnSpc>
-                <a:spcPct val="90000"/>
-              </a:lnSpc>
-              <a:spcBef>
-                <a:spcPts val="0"/>
-              </a:spcBef>
-              <a:spcAft>
-                <a:spcPts val="0"/>
-              </a:spcAft>
-              <a:buClrTx/>
-              <a:buSzTx/>
-              <a:buFontTx/>
-              <a:buNone/>
-              <a:tabLst/>
-              <a:defRPr sz="4000" b="0" i="0" u="none" strike="noStrike" cap="none" spc="0" baseline="0">
-                <a:solidFill>
-                  <a:srgbClr val="525252"/>
-                </a:solidFill>
-                <a:uFillTx/>
-                <a:latin typeface="IntelOne Display Regular"/>
-                <a:ea typeface="Intel Clear Light" panose="020B0404020203020204" pitchFamily="34" charset="0"/>
-                <a:cs typeface="Intel Clear Light" panose="020B0404020203020204" pitchFamily="34" charset="0"/>
-                <a:sym typeface="Helvetica"/>
-              </a:defRPr>
-            </a:lvl1pPr>
-            <a:lvl2pPr marL="0" marR="0" indent="0" algn="l" defTabSz="609600" latinLnBrk="0">
-              <a:lnSpc>
-                <a:spcPct val="90000"/>
-              </a:lnSpc>
-              <a:spcBef>
-                <a:spcPts val="0"/>
-              </a:spcBef>
-              <a:spcAft>
-                <a:spcPts val="0"/>
-              </a:spcAft>
-              <a:buClrTx/>
-              <a:buSzTx/>
-              <a:buFontTx/>
-              <a:buNone/>
-              <a:tabLst/>
-              <a:defRPr sz="3300" b="1" i="0" u="none" strike="noStrike" cap="none" spc="0" baseline="0">
-                <a:solidFill>
-                  <a:srgbClr val="535353"/>
-                </a:solidFill>
-                <a:uFillTx/>
-                <a:latin typeface="Helvetica"/>
-                <a:ea typeface="Helvetica"/>
-                <a:cs typeface="Helvetica"/>
-                <a:sym typeface="Helvetica"/>
-              </a:defRPr>
-            </a:lvl2pPr>
-            <a:lvl3pPr marL="0" marR="0" indent="0" algn="l" defTabSz="609600" latinLnBrk="0">
-              <a:lnSpc>
-                <a:spcPct val="90000"/>
-              </a:lnSpc>
-              <a:spcBef>
-                <a:spcPts val="0"/>
-              </a:spcBef>
-              <a:spcAft>
-                <a:spcPts val="0"/>
-              </a:spcAft>
-              <a:buClrTx/>
-              <a:buSzTx/>
-              <a:buFontTx/>
-              <a:buNone/>
-              <a:tabLst/>
-              <a:defRPr sz="3300" b="1" i="0" u="none" strike="noStrike" cap="none" spc="0" baseline="0">
-                <a:solidFill>
-                  <a:srgbClr val="535353"/>
-                </a:solidFill>
-                <a:uFillTx/>
-                <a:latin typeface="Helvetica"/>
-                <a:ea typeface="Helvetica"/>
-                <a:cs typeface="Helvetica"/>
-                <a:sym typeface="Helvetica"/>
-              </a:defRPr>
-            </a:lvl3pPr>
-            <a:lvl4pPr marL="0" marR="0" indent="0" algn="l" defTabSz="609600" latinLnBrk="0">
-              <a:lnSpc>
-                <a:spcPct val="90000"/>
-              </a:lnSpc>
-              <a:spcBef>
-                <a:spcPts val="0"/>
-              </a:spcBef>
-              <a:spcAft>
-                <a:spcPts val="0"/>
-              </a:spcAft>
-              <a:buClrTx/>
-              <a:buSzTx/>
-              <a:buFontTx/>
-              <a:buNone/>
-              <a:tabLst/>
-              <a:defRPr sz="3300" b="1" i="0" u="none" strike="noStrike" cap="none" spc="0" baseline="0">
-                <a:solidFill>
-                  <a:srgbClr val="535353"/>
-                </a:solidFill>
-                <a:uFillTx/>
-                <a:latin typeface="Helvetica"/>
-                <a:ea typeface="Helvetica"/>
-                <a:cs typeface="Helvetica"/>
-                <a:sym typeface="Helvetica"/>
-              </a:defRPr>
-            </a:lvl4pPr>
-            <a:lvl5pPr marL="0" marR="0" indent="0" algn="l" defTabSz="609600" latinLnBrk="0">
-              <a:lnSpc>
-                <a:spcPct val="90000"/>
-              </a:lnSpc>
-              <a:spcBef>
-                <a:spcPts val="0"/>
-              </a:spcBef>
-              <a:spcAft>
-                <a:spcPts val="0"/>
-              </a:spcAft>
-              <a:buClrTx/>
-              <a:buSzTx/>
-              <a:buFontTx/>
-              <a:buNone/>
-              <a:tabLst/>
-              <a:defRPr sz="3300" b="1" i="0" u="none" strike="noStrike" cap="none" spc="0" baseline="0">
-                <a:solidFill>
-                  <a:srgbClr val="535353"/>
-                </a:solidFill>
-                <a:uFillTx/>
-                <a:latin typeface="Helvetica"/>
-                <a:ea typeface="Helvetica"/>
-                <a:cs typeface="Helvetica"/>
-                <a:sym typeface="Helvetica"/>
-              </a:defRPr>
-            </a:lvl5pPr>
-            <a:lvl6pPr marL="0" marR="0" indent="0" algn="l" defTabSz="609600" latinLnBrk="0">
-              <a:lnSpc>
-                <a:spcPct val="90000"/>
-              </a:lnSpc>
-              <a:spcBef>
-                <a:spcPts val="0"/>
-              </a:spcBef>
-              <a:spcAft>
-                <a:spcPts val="0"/>
-              </a:spcAft>
-              <a:buClrTx/>
-              <a:buSzTx/>
-              <a:buFontTx/>
-              <a:buNone/>
-              <a:tabLst/>
-              <a:defRPr sz="3300" b="1" i="0" u="none" strike="noStrike" cap="none" spc="0" baseline="0">
-                <a:solidFill>
-                  <a:srgbClr val="535353"/>
-                </a:solidFill>
-                <a:uFillTx/>
-                <a:latin typeface="Helvetica"/>
-                <a:ea typeface="Helvetica"/>
-                <a:cs typeface="Helvetica"/>
-                <a:sym typeface="Helvetica"/>
-              </a:defRPr>
-            </a:lvl6pPr>
-            <a:lvl7pPr marL="0" marR="0" indent="0" algn="l" defTabSz="609600" latinLnBrk="0">
-              <a:lnSpc>
-                <a:spcPct val="90000"/>
-              </a:lnSpc>
-              <a:spcBef>
-                <a:spcPts val="0"/>
-              </a:spcBef>
-              <a:spcAft>
-                <a:spcPts val="0"/>
-              </a:spcAft>
-              <a:buClrTx/>
-              <a:buSzTx/>
-              <a:buFontTx/>
-              <a:buNone/>
-              <a:tabLst/>
-              <a:defRPr sz="3300" b="1" i="0" u="none" strike="noStrike" cap="none" spc="0" baseline="0">
-                <a:solidFill>
-                  <a:srgbClr val="535353"/>
-                </a:solidFill>
-                <a:uFillTx/>
-                <a:latin typeface="Helvetica"/>
-                <a:ea typeface="Helvetica"/>
-                <a:cs typeface="Helvetica"/>
-                <a:sym typeface="Helvetica"/>
-              </a:defRPr>
-            </a:lvl7pPr>
-            <a:lvl8pPr marL="0" marR="0" indent="0" algn="l" defTabSz="609600" latinLnBrk="0">
-              <a:lnSpc>
-                <a:spcPct val="90000"/>
-              </a:lnSpc>
-              <a:spcBef>
-                <a:spcPts val="0"/>
-              </a:spcBef>
-              <a:spcAft>
-                <a:spcPts val="0"/>
-              </a:spcAft>
-              <a:buClrTx/>
-              <a:buSzTx/>
-              <a:buFontTx/>
-              <a:buNone/>
-              <a:tabLst/>
-              <a:defRPr sz="3300" b="1" i="0" u="none" strike="noStrike" cap="none" spc="0" baseline="0">
-                <a:solidFill>
-                  <a:srgbClr val="535353"/>
-                </a:solidFill>
-                <a:uFillTx/>
-                <a:latin typeface="Helvetica"/>
-                <a:ea typeface="Helvetica"/>
-                <a:cs typeface="Helvetica"/>
-                <a:sym typeface="Helvetica"/>
-              </a:defRPr>
-            </a:lvl8pPr>
-            <a:lvl9pPr marL="0" marR="0" indent="0" algn="l" defTabSz="609600" latinLnBrk="0">
-              <a:lnSpc>
-                <a:spcPct val="90000"/>
-              </a:lnSpc>
-              <a:spcBef>
-                <a:spcPts val="0"/>
-              </a:spcBef>
-              <a:spcAft>
-                <a:spcPts val="0"/>
-              </a:spcAft>
-              <a:buClrTx/>
-              <a:buSzTx/>
-              <a:buFontTx/>
-              <a:buNone/>
-              <a:tabLst/>
-              <a:defRPr sz="3300" b="1" i="0" u="none" strike="noStrike" cap="none" spc="0" baseline="0">
-                <a:solidFill>
-                  <a:srgbClr val="535353"/>
-                </a:solidFill>
-                <a:uFillTx/>
-                <a:latin typeface="Helvetica"/>
-                <a:ea typeface="Helvetica"/>
-                <a:cs typeface="Helvetica"/>
-                <a:sym typeface="Helvetica"/>
-              </a:defRPr>
-            </a:lvl9pPr>
-          </a:lstStyle>
-          <a:p>
-            <a:r>
-              <a:rPr lang="en-US" altLang="zh-CN" sz="3200"/>
-              <a:t>DMR-16ch</a:t>
-            </a:r>
-            <a:endParaRPr lang="en-US" sz="3200" dirty="0"/>
-          </a:p>
-        </p:txBody>
-      </p:sp>
       <p:graphicFrame>
         <p:nvGraphicFramePr>
-          <p:cNvPr id="20" name="Table 19">
+          <p:cNvPr id="20" name="color_grading_key">
             <a:extLst>
               <a:ext uri="{FF2B5EF4-FFF2-40B4-BE49-F238E27FC236}">
                 <a16:creationId xmlns:a16="http://schemas.microsoft.com/office/drawing/2014/main" id="{1CBE6BDE-684F-92BE-D371-97B4DD650DE0}"/>
@@ -24933,8 +23994,8 @@
           </p:nvPr>
         </p:nvGraphicFramePr>
         <p:xfrm>
-          <a:off x="9585130" y="-134584"/>
-          <a:ext cx="2606870" cy="513939"/>
+          <a:off x="8458200" y="164592"/>
+          <a:ext cx="3364992" cy="786384"/>
         </p:xfrm>
         <a:graphic>
           <a:graphicData uri="http://schemas.openxmlformats.org/drawingml/2006/table">
@@ -24985,7 +24046,7 @@
                     <a:p>
                       <a:pPr algn="ctr" fontAlgn="b"/>
                       <a:r>
-                        <a:rPr lang="en-US" sz="800" b="0" i="0" u="none" strike="noStrike">
+                        <a:rPr lang="en-US" sz="600" b="0" i="0" u="none" strike="noStrike">
                           <a:solidFill>
                             <a:srgbClr val="FFFFFF"/>
                           </a:solidFill>
@@ -24993,13 +24054,13 @@
                           <a:highlight>
                             <a:srgbClr val="0070C0"/>
                           </a:highlight>
-                          <a:latin typeface="Intel Clear" panose="020B0604020203020204" pitchFamily="34" charset="0"/>
+                          <a:latin typeface="Calibri" panose="020B0604020203020204" pitchFamily="34" charset="0"/>
                         </a:rPr>
                         <a:t>Color Grading Key</a:t>
                       </a:r>
                     </a:p>
                   </a:txBody>
-                  <a:tcPr marL="0" marR="0" marT="0" marB="0" anchor="b">
+                  <a:tcPr marL="18288" marR="18288" marT="4572" marB="4572" anchor="b">
                     <a:lnL w="6350" cap="flat" cmpd="sng" algn="ctr">
                       <a:solidFill>
                         <a:srgbClr val="000000"/>
@@ -25049,7 +24110,7 @@
                       <a:endParaRPr lang="en-US"/>
                     </a:p>
                   </a:txBody>
-                  <a:tcPr/>
+                  <a:tcPr marL="18288" marR="18288" marT="4572" marB="4572"/>
                 </a:tc>
                 <a:tc hMerge="1">
                   <a:txBody>
@@ -25059,7 +24120,7 @@
                       <a:endParaRPr lang="en-US"/>
                     </a:p>
                   </a:txBody>
-                  <a:tcPr/>
+                  <a:tcPr marL="18288" marR="18288" marT="4572" marB="4572"/>
                 </a:tc>
                 <a:tc hMerge="1">
                   <a:txBody>
@@ -25069,7 +24130,7 @@
                       <a:endParaRPr lang="en-US"/>
                     </a:p>
                   </a:txBody>
-                  <a:tcPr/>
+                  <a:tcPr marL="18288" marR="18288" marT="4572" marB="4572"/>
                 </a:tc>
                 <a:tc hMerge="1">
                   <a:txBody>
@@ -25079,7 +24140,7 @@
                       <a:endParaRPr lang="en-US"/>
                     </a:p>
                   </a:txBody>
-                  <a:tcPr/>
+                  <a:tcPr marL="18288" marR="18288" marT="4572" marB="4572"/>
                 </a:tc>
                 <a:extLst>
                   <a:ext uri="{0D108BD9-81ED-4DB2-BD59-A6C34878D82A}">
@@ -25095,7 +24156,7 @@
                     <a:p>
                       <a:pPr algn="ctr" fontAlgn="ctr"/>
                       <a:r>
-                        <a:rPr lang="en-US" sz="400" b="0" i="0" u="none" strike="noStrike">
+                        <a:rPr lang="en-US" sz="600" b="0" i="0" u="none" strike="noStrike">
                           <a:solidFill>
                             <a:srgbClr val="000000"/>
                           </a:solidFill>
@@ -25103,13 +24164,13 @@
                           <a:highlight>
                             <a:srgbClr val="FFFFFF"/>
                           </a:highlight>
-                          <a:latin typeface="Intel Clear" panose="020B0604020203020204" pitchFamily="34" charset="0"/>
+                          <a:latin typeface="Calibri" panose="020B0604020203020204" pitchFamily="34" charset="0"/>
                         </a:rPr>
                         <a:t>All Deliverables Completed</a:t>
                       </a:r>
                     </a:p>
                   </a:txBody>
-                  <a:tcPr marL="0" marR="0" marT="0" marB="0" anchor="ctr">
+                  <a:tcPr marL="18288" marR="18288" marT="4572" marB="4572" anchor="ctr">
                     <a:lnL w="6350" cap="flat" cmpd="sng" algn="ctr">
                       <a:solidFill>
                         <a:srgbClr val="000000"/>
@@ -25158,7 +24219,7 @@
                     <a:p>
                       <a:pPr algn="ctr" fontAlgn="ctr"/>
                       <a:r>
-                        <a:rPr lang="en-US" sz="400" b="0" i="0" u="none" strike="noStrike">
+                        <a:rPr lang="en-US" sz="600" b="0" i="0" u="none" strike="noStrike">
                           <a:solidFill>
                             <a:srgbClr val="000000"/>
                           </a:solidFill>
@@ -25166,13 +24227,13 @@
                           <a:highlight>
                             <a:srgbClr val="92D050"/>
                           </a:highlight>
-                          <a:latin typeface="Intel Clear" panose="020B0604020203020204" pitchFamily="34" charset="0"/>
+                          <a:latin typeface="Calibri" panose="020B0604020203020204" pitchFamily="34" charset="0"/>
                         </a:rPr>
                         <a:t>On Track w/ No Issues</a:t>
                       </a:r>
                     </a:p>
                   </a:txBody>
-                  <a:tcPr marL="0" marR="0" marT="0" marB="0" anchor="ctr">
+                  <a:tcPr marL="18288" marR="18288" marT="4572" marB="4572" anchor="ctr">
                     <a:lnL w="6350" cap="flat" cmpd="sng" algn="ctr">
                       <a:solidFill>
                         <a:srgbClr val="000000"/>
@@ -25221,7 +24282,7 @@
                     <a:p>
                       <a:pPr algn="ctr" fontAlgn="ctr"/>
                       <a:r>
-                        <a:rPr lang="en-US" sz="400" b="0" i="0" u="none" strike="noStrike">
+                        <a:rPr lang="en-US" sz="600" b="0" i="0" u="none" strike="noStrike">
                           <a:solidFill>
                             <a:srgbClr val="000000"/>
                           </a:solidFill>
@@ -25229,13 +24290,13 @@
                           <a:highlight>
                             <a:srgbClr val="FFFF00"/>
                           </a:highlight>
-                          <a:latin typeface="Intel Clear" panose="020B0604020203020204" pitchFamily="34" charset="0"/>
+                          <a:latin typeface="Calibri" panose="020B0604020203020204" pitchFamily="34" charset="0"/>
                         </a:rPr>
                         <a:t>On Track w/ Approved Mitigation Plan</a:t>
                       </a:r>
                     </a:p>
                   </a:txBody>
-                  <a:tcPr marL="0" marR="0" marT="0" marB="0" anchor="ctr">
+                  <a:tcPr marL="18288" marR="18288" marT="4572" marB="4572" anchor="ctr">
                     <a:lnL w="6350" cap="flat" cmpd="sng" algn="ctr">
                       <a:solidFill>
                         <a:srgbClr val="000000"/>
@@ -25284,7 +24345,7 @@
                     <a:p>
                       <a:pPr algn="ctr" fontAlgn="ctr"/>
                       <a:r>
-                        <a:rPr lang="en-US" sz="400" b="0" i="0" u="none" strike="noStrike">
+                        <a:rPr lang="en-US" sz="600" b="0" i="0" u="none" strike="noStrike">
                           <a:solidFill>
                             <a:srgbClr val="000000"/>
                           </a:solidFill>
@@ -25292,13 +24353,13 @@
                           <a:highlight>
                             <a:srgbClr val="FFC000"/>
                           </a:highlight>
-                          <a:latin typeface="Intel Clear" panose="020B0604020203020204" pitchFamily="34" charset="0"/>
+                          <a:latin typeface="Calibri" panose="020B0604020203020204" pitchFamily="34" charset="0"/>
                         </a:rPr>
                         <a:t>Platform at Risk Mitigation Plan WIP</a:t>
                       </a:r>
                     </a:p>
                   </a:txBody>
-                  <a:tcPr marL="0" marR="0" marT="0" marB="0" anchor="ctr">
+                  <a:tcPr marL="18288" marR="18288" marT="4572" marB="4572" anchor="ctr">
                     <a:lnL w="6350" cap="flat" cmpd="sng" algn="ctr">
                       <a:solidFill>
                         <a:srgbClr val="000000"/>
@@ -25347,7 +24408,7 @@
                     <a:p>
                       <a:pPr algn="ctr" fontAlgn="ctr"/>
                       <a:r>
-                        <a:rPr lang="en-US" sz="400" b="0" i="0" u="none" strike="noStrike">
+                        <a:rPr lang="en-US" sz="600" b="0" i="0" u="none" strike="noStrike">
                           <a:solidFill>
                             <a:srgbClr val="FFFFFF"/>
                           </a:solidFill>
@@ -25355,13 +24416,13 @@
                           <a:highlight>
                             <a:srgbClr val="FF0000"/>
                           </a:highlight>
-                          <a:latin typeface="Intel Clear" panose="020B0604020203020204" pitchFamily="34" charset="0"/>
+                          <a:latin typeface="Calibri" panose="020B0604020203020204" pitchFamily="34" charset="0"/>
                         </a:rPr>
                         <a:t>Critical Issue(s) w/ NO Mitigation Plan</a:t>
                       </a:r>
                     </a:p>
                   </a:txBody>
-                  <a:tcPr marL="0" marR="0" marT="0" marB="0" anchor="ctr">
+                  <a:tcPr marL="18288" marR="18288" marT="4572" marB="4572" anchor="ctr">
                     <a:lnL w="6350" cap="flat" cmpd="sng" algn="ctr">
                       <a:solidFill>
                         <a:srgbClr val="000000"/>
@@ -25417,7 +24478,7 @@
                     <a:p>
                       <a:pPr algn="ctr" fontAlgn="ctr"/>
                       <a:r>
-                        <a:rPr lang="en-US" sz="400" b="0" i="0" u="none" strike="noStrike">
+                        <a:rPr lang="en-US" sz="600" b="0" i="0" u="none" strike="noStrike">
                           <a:solidFill>
                             <a:srgbClr val="000000"/>
                           </a:solidFill>
@@ -25425,13 +24486,13 @@
                           <a:highlight>
                             <a:srgbClr val="FFFFFF"/>
                           </a:highlight>
-                          <a:latin typeface="Tahoma" panose="020B0604030504040204" pitchFamily="34" charset="0"/>
+                          <a:latin typeface="Calibri" panose="020B0604030504040204" pitchFamily="34" charset="0"/>
                         </a:rPr>
                         <a:t>Done</a:t>
                       </a:r>
                     </a:p>
                   </a:txBody>
-                  <a:tcPr marL="0" marR="0" marT="0" marB="0" anchor="ctr">
+                  <a:tcPr marL="18288" marR="18288" marT="4572" marB="4572" anchor="ctr">
                     <a:lnL w="6350" cap="flat" cmpd="sng" algn="ctr">
                       <a:solidFill>
                         <a:srgbClr val="000000"/>
@@ -25480,7 +24541,7 @@
                     <a:p>
                       <a:pPr algn="ctr" fontAlgn="ctr"/>
                       <a:r>
-                        <a:rPr lang="en-US" sz="400" b="0" i="0" u="none" strike="noStrike">
+                        <a:rPr lang="en-US" sz="600" b="0" i="0" u="none" strike="noStrike">
                           <a:solidFill>
                             <a:srgbClr val="000000"/>
                           </a:solidFill>
@@ -25488,13 +24549,13 @@
                           <a:highlight>
                             <a:srgbClr val="92D050"/>
                           </a:highlight>
-                          <a:latin typeface="Tahoma" panose="020B0604030504040204" pitchFamily="34" charset="0"/>
+                          <a:latin typeface="Calibri" panose="020B0604030504040204" pitchFamily="34" charset="0"/>
                         </a:rPr>
                         <a:t>On Track</a:t>
                       </a:r>
                     </a:p>
                   </a:txBody>
-                  <a:tcPr marL="0" marR="0" marT="0" marB="0" anchor="ctr">
+                  <a:tcPr marL="18288" marR="18288" marT="4572" marB="4572" anchor="ctr">
                     <a:lnL w="6350" cap="flat" cmpd="sng" algn="ctr">
                       <a:solidFill>
                         <a:srgbClr val="000000"/>
@@ -25543,7 +24604,7 @@
                     <a:p>
                       <a:pPr algn="ctr" fontAlgn="ctr"/>
                       <a:r>
-                        <a:rPr lang="en-US" sz="400" b="0" i="0" u="none" strike="noStrike">
+                        <a:rPr lang="en-US" sz="600" b="0" i="0" u="none" strike="noStrike">
                           <a:solidFill>
                             <a:srgbClr val="000000"/>
                           </a:solidFill>
@@ -25551,13 +24612,13 @@
                           <a:highlight>
                             <a:srgbClr val="FFFF00"/>
                           </a:highlight>
-                          <a:latin typeface="Tahoma" panose="020B0604030504040204" pitchFamily="34" charset="0"/>
+                          <a:latin typeface="Calibri" panose="020B0604030504040204" pitchFamily="34" charset="0"/>
                         </a:rPr>
                         <a:t>On Track</a:t>
                       </a:r>
                     </a:p>
                   </a:txBody>
-                  <a:tcPr marL="0" marR="0" marT="0" marB="0" anchor="ctr">
+                  <a:tcPr marL="18288" marR="18288" marT="4572" marB="4572" anchor="ctr">
                     <a:lnL w="6350" cap="flat" cmpd="sng" algn="ctr">
                       <a:solidFill>
                         <a:srgbClr val="000000"/>
@@ -25606,7 +24667,7 @@
                     <a:p>
                       <a:pPr algn="ctr" fontAlgn="ctr"/>
                       <a:r>
-                        <a:rPr lang="en-US" sz="400" b="0" i="0" u="none" strike="noStrike">
+                        <a:rPr lang="en-US" sz="600" b="0" i="0" u="none" strike="noStrike">
                           <a:solidFill>
                             <a:srgbClr val="000000"/>
                           </a:solidFill>
@@ -25614,13 +24675,13 @@
                           <a:highlight>
                             <a:srgbClr val="FFC000"/>
                           </a:highlight>
-                          <a:latin typeface="Tahoma" panose="020B0604030504040204" pitchFamily="34" charset="0"/>
+                          <a:latin typeface="Calibri" panose="020B0604030504040204" pitchFamily="34" charset="0"/>
                         </a:rPr>
                         <a:t>At Risk </a:t>
                       </a:r>
                     </a:p>
                   </a:txBody>
-                  <a:tcPr marL="0" marR="0" marT="0" marB="0" anchor="ctr">
+                  <a:tcPr marL="18288" marR="18288" marT="4572" marB="4572" anchor="ctr">
                     <a:lnL w="6350" cap="flat" cmpd="sng" algn="ctr">
                       <a:solidFill>
                         <a:srgbClr val="000000"/>
@@ -25669,7 +24730,7 @@
                     <a:p>
                       <a:pPr algn="ctr" fontAlgn="ctr"/>
                       <a:r>
-                        <a:rPr lang="en-US" sz="400" b="0" i="0" u="none" strike="noStrike">
+                        <a:rPr lang="en-US" sz="600" b="0" i="0" u="none" strike="noStrike">
                           <a:solidFill>
                             <a:srgbClr val="FFFFFF"/>
                           </a:solidFill>
@@ -25677,13 +24738,13 @@
                           <a:highlight>
                             <a:srgbClr val="FF0000"/>
                           </a:highlight>
-                          <a:latin typeface="Tahoma" panose="020B0604030504040204" pitchFamily="34" charset="0"/>
+                          <a:latin typeface="Calibri" panose="020B0604030504040204" pitchFamily="34" charset="0"/>
                         </a:rPr>
                         <a:t>Blocked</a:t>
                       </a:r>
                     </a:p>
                   </a:txBody>
-                  <a:tcPr marL="0" marR="0" marT="0" marB="0" anchor="ctr">
+                  <a:tcPr marL="18288" marR="18288" marT="4572" marB="4572" anchor="ctr">
                     <a:lnL w="6350" cap="flat" cmpd="sng" algn="ctr">
                       <a:solidFill>
                         <a:srgbClr val="000000"/>
@@ -25739,7 +24800,7 @@
                     <a:p>
                       <a:pPr algn="ctr" fontAlgn="ctr"/>
                       <a:r>
-                        <a:rPr lang="en-US" sz="400" b="0" i="0" u="none" strike="noStrike">
+                        <a:rPr lang="en-US" sz="600" b="0" i="0" u="none" strike="noStrike">
                           <a:solidFill>
                             <a:srgbClr val="000000"/>
                           </a:solidFill>
@@ -25747,13 +24808,13 @@
                           <a:highlight>
                             <a:srgbClr val="FFFFFF"/>
                           </a:highlight>
-                          <a:latin typeface="Tahoma" panose="020B0604030504040204" pitchFamily="34" charset="0"/>
+                          <a:latin typeface="Calibri" panose="020B0604030504040204" pitchFamily="34" charset="0"/>
                         </a:rPr>
                         <a:t>Done</a:t>
                       </a:r>
                     </a:p>
                   </a:txBody>
-                  <a:tcPr marL="0" marR="0" marT="0" marB="0" anchor="ctr">
+                  <a:tcPr marL="18288" marR="18288" marT="4572" marB="4572" anchor="ctr">
                     <a:lnL w="6350" cap="flat" cmpd="sng" algn="ctr">
                       <a:solidFill>
                         <a:srgbClr val="000000"/>
@@ -25802,7 +24863,7 @@
                     <a:p>
                       <a:pPr algn="ctr" fontAlgn="ctr"/>
                       <a:r>
-                        <a:rPr lang="en-US" sz="400" b="0" i="0" u="none" strike="noStrike">
+                        <a:rPr lang="en-US" sz="600" b="0" i="0" u="none" strike="noStrike">
                           <a:solidFill>
                             <a:srgbClr val="000000"/>
                           </a:solidFill>
@@ -25810,13 +24871,13 @@
                           <a:highlight>
                             <a:srgbClr val="92D050"/>
                           </a:highlight>
-                          <a:latin typeface="Tahoma" panose="020B0604030504040204" pitchFamily="34" charset="0"/>
+                          <a:latin typeface="Calibri" panose="020B0604030504040204" pitchFamily="34" charset="0"/>
                         </a:rPr>
                         <a:t>G</a:t>
                       </a:r>
                     </a:p>
                   </a:txBody>
-                  <a:tcPr marL="0" marR="0" marT="0" marB="0" anchor="ctr">
+                  <a:tcPr marL="18288" marR="18288" marT="4572" marB="4572" anchor="ctr">
                     <a:lnL w="6350" cap="flat" cmpd="sng" algn="ctr">
                       <a:solidFill>
                         <a:srgbClr val="000000"/>
@@ -25865,7 +24926,7 @@
                     <a:p>
                       <a:pPr algn="ctr" fontAlgn="ctr"/>
                       <a:r>
-                        <a:rPr lang="en-US" sz="400" b="0" i="0" u="none" strike="noStrike">
+                        <a:rPr lang="en-US" sz="600" b="0" i="0" u="none" strike="noStrike">
                           <a:solidFill>
                             <a:srgbClr val="000000"/>
                           </a:solidFill>
@@ -25873,13 +24934,13 @@
                           <a:highlight>
                             <a:srgbClr val="FFFF00"/>
                           </a:highlight>
-                          <a:latin typeface="Tahoma" panose="020B0604030504040204" pitchFamily="34" charset="0"/>
+                          <a:latin typeface="Calibri" panose="020B0604030504040204" pitchFamily="34" charset="0"/>
                         </a:rPr>
                         <a:t>Y</a:t>
                       </a:r>
                     </a:p>
                   </a:txBody>
-                  <a:tcPr marL="0" marR="0" marT="0" marB="0" anchor="ctr">
+                  <a:tcPr marL="18288" marR="18288" marT="4572" marB="4572" anchor="ctr">
                     <a:lnL w="6350" cap="flat" cmpd="sng" algn="ctr">
                       <a:solidFill>
                         <a:srgbClr val="000000"/>
@@ -25928,7 +24989,7 @@
                     <a:p>
                       <a:pPr algn="ctr" fontAlgn="ctr"/>
                       <a:r>
-                        <a:rPr lang="en-US" sz="400" b="0" i="0" u="none" strike="noStrike">
+                        <a:rPr lang="en-US" sz="600" b="0" i="0" u="none" strike="noStrike">
                           <a:solidFill>
                             <a:srgbClr val="000000"/>
                           </a:solidFill>
@@ -25936,13 +24997,13 @@
                           <a:highlight>
                             <a:srgbClr val="FFC000"/>
                           </a:highlight>
-                          <a:latin typeface="Tahoma" panose="020B0604030504040204" pitchFamily="34" charset="0"/>
+                          <a:latin typeface="Calibri" panose="020B0604030504040204" pitchFamily="34" charset="0"/>
                         </a:rPr>
                         <a:t>O</a:t>
                       </a:r>
                     </a:p>
                   </a:txBody>
-                  <a:tcPr marL="0" marR="0" marT="0" marB="0" anchor="ctr">
+                  <a:tcPr marL="18288" marR="18288" marT="4572" marB="4572" anchor="ctr">
                     <a:lnL w="6350" cap="flat" cmpd="sng" algn="ctr">
                       <a:solidFill>
                         <a:srgbClr val="000000"/>
@@ -25991,7 +25052,7 @@
                     <a:p>
                       <a:pPr algn="ctr" fontAlgn="ctr"/>
                       <a:r>
-                        <a:rPr lang="en-US" sz="400" b="0" i="0" u="none" strike="noStrike">
+                        <a:rPr lang="en-US" sz="600" b="0" i="0" u="none" strike="noStrike">
                           <a:solidFill>
                             <a:srgbClr val="FFFFFF"/>
                           </a:solidFill>
@@ -25999,13 +25060,13 @@
                           <a:highlight>
                             <a:srgbClr val="FF0000"/>
                           </a:highlight>
-                          <a:latin typeface="Tahoma" panose="020B0604030504040204" pitchFamily="34" charset="0"/>
+                          <a:latin typeface="Calibri" panose="020B0604030504040204" pitchFamily="34" charset="0"/>
                         </a:rPr>
                         <a:t>R</a:t>
                       </a:r>
                     </a:p>
                   </a:txBody>
-                  <a:tcPr marL="0" marR="0" marT="0" marB="0" anchor="ctr">
+                  <a:tcPr marL="18288" marR="18288" marT="4572" marB="4572" anchor="ctr">
                     <a:lnL w="6350" cap="flat" cmpd="sng" algn="ctr">
                       <a:solidFill>
                         <a:srgbClr val="000000"/>
@@ -26061,7 +25122,7 @@
                     <a:p>
                       <a:pPr algn="ctr" fontAlgn="ctr"/>
                       <a:r>
-                        <a:rPr lang="en-US" sz="400" b="0" i="0" u="none" strike="noStrike">
+                        <a:rPr lang="en-US" sz="600" b="0" i="0" u="none" strike="noStrike">
                           <a:solidFill>
                             <a:srgbClr val="000000"/>
                           </a:solidFill>
@@ -26069,13 +25130,13 @@
                           <a:highlight>
                             <a:srgbClr val="FFFFFF"/>
                           </a:highlight>
-                          <a:latin typeface="Tahoma" panose="020B0604030504040204" pitchFamily="34" charset="0"/>
+                          <a:latin typeface="Calibri" panose="020B0604030504040204" pitchFamily="34" charset="0"/>
                         </a:rPr>
                         <a:t>No Help Needed</a:t>
                       </a:r>
                     </a:p>
                   </a:txBody>
-                  <a:tcPr marL="0" marR="0" marT="0" marB="0" anchor="ctr">
+                  <a:tcPr marL="18288" marR="18288" marT="4572" marB="4572" anchor="ctr">
                     <a:lnL w="6350" cap="flat" cmpd="sng" algn="ctr">
                       <a:solidFill>
                         <a:srgbClr val="000000"/>
@@ -26124,7 +25185,7 @@
                     <a:p>
                       <a:pPr algn="ctr" fontAlgn="ctr"/>
                       <a:r>
-                        <a:rPr lang="en-US" sz="400" b="0" i="0" u="none" strike="noStrike">
+                        <a:rPr lang="en-US" sz="600" b="0" i="0" u="none" strike="noStrike">
                           <a:solidFill>
                             <a:srgbClr val="000000"/>
                           </a:solidFill>
@@ -26132,13 +25193,13 @@
                           <a:highlight>
                             <a:srgbClr val="92D050"/>
                           </a:highlight>
-                          <a:latin typeface="Tahoma" panose="020B0604030504040204" pitchFamily="34" charset="0"/>
+                          <a:latin typeface="Calibri" panose="020B0604030504040204" pitchFamily="34" charset="0"/>
                         </a:rPr>
                         <a:t>No Help Needed</a:t>
                       </a:r>
                     </a:p>
                   </a:txBody>
-                  <a:tcPr marL="0" marR="0" marT="0" marB="0" anchor="ctr">
+                  <a:tcPr marL="18288" marR="18288" marT="4572" marB="4572" anchor="ctr">
                     <a:lnL w="6350" cap="flat" cmpd="sng" algn="ctr">
                       <a:solidFill>
                         <a:srgbClr val="000000"/>
@@ -26187,7 +25248,7 @@
                     <a:p>
                       <a:pPr algn="ctr" fontAlgn="ctr"/>
                       <a:r>
-                        <a:rPr lang="en-US" sz="400" b="0" i="0" u="none" strike="noStrike">
+                        <a:rPr lang="en-US" sz="600" b="0" i="0" u="none" strike="noStrike">
                           <a:solidFill>
                             <a:srgbClr val="000000"/>
                           </a:solidFill>
@@ -26195,13 +25256,13 @@
                           <a:highlight>
                             <a:srgbClr val="FFFF00"/>
                           </a:highlight>
-                          <a:latin typeface="Tahoma" panose="020B0604030504040204" pitchFamily="34" charset="0"/>
+                          <a:latin typeface="Calibri" panose="020B0604030504040204" pitchFamily="34" charset="0"/>
                         </a:rPr>
                         <a:t>No Help Needed</a:t>
                       </a:r>
                     </a:p>
                   </a:txBody>
-                  <a:tcPr marL="0" marR="0" marT="0" marB="0" anchor="ctr">
+                  <a:tcPr marL="18288" marR="18288" marT="4572" marB="4572" anchor="ctr">
                     <a:lnL w="6350" cap="flat" cmpd="sng" algn="ctr">
                       <a:solidFill>
                         <a:srgbClr val="000000"/>
@@ -26250,7 +25311,7 @@
                     <a:p>
                       <a:pPr algn="ctr" fontAlgn="ctr"/>
                       <a:r>
-                        <a:rPr lang="en-US" sz="400" b="0" i="0" u="none" strike="noStrike">
+                        <a:rPr lang="en-US" sz="600" b="0" i="0" u="none" strike="noStrike">
                           <a:solidFill>
                             <a:srgbClr val="000000"/>
                           </a:solidFill>
@@ -26258,13 +25319,13 @@
                           <a:highlight>
                             <a:srgbClr val="FFC000"/>
                           </a:highlight>
-                          <a:latin typeface="Tahoma" panose="020B0604030504040204" pitchFamily="34" charset="0"/>
+                          <a:latin typeface="Calibri" panose="020B0604030504040204" pitchFamily="34" charset="0"/>
                         </a:rPr>
                         <a:t>Might Need Help</a:t>
                       </a:r>
                     </a:p>
                   </a:txBody>
-                  <a:tcPr marL="0" marR="0" marT="0" marB="0" anchor="ctr">
+                  <a:tcPr marL="18288" marR="18288" marT="4572" marB="4572" anchor="ctr">
                     <a:lnL w="6350" cap="flat" cmpd="sng" algn="ctr">
                       <a:solidFill>
                         <a:srgbClr val="000000"/>
@@ -26313,7 +25374,7 @@
                     <a:p>
                       <a:pPr algn="ctr" fontAlgn="ctr"/>
                       <a:r>
-                        <a:rPr lang="en-US" sz="400" b="0" i="0" u="none" strike="noStrike">
+                        <a:rPr lang="en-US" sz="600" b="0" i="0" u="none" strike="noStrike">
                           <a:solidFill>
                             <a:srgbClr val="FFFFFF"/>
                           </a:solidFill>
@@ -26321,13 +25382,13 @@
                           <a:highlight>
                             <a:srgbClr val="FF0000"/>
                           </a:highlight>
-                          <a:latin typeface="Tahoma" panose="020B0604030504040204" pitchFamily="34" charset="0"/>
+                          <a:latin typeface="Calibri" panose="020B0604030504040204" pitchFamily="34" charset="0"/>
                         </a:rPr>
                         <a:t>Help Needed!!</a:t>
                       </a:r>
                     </a:p>
                   </a:txBody>
-                  <a:tcPr marL="0" marR="0" marT="0" marB="0" anchor="ctr">
+                  <a:tcPr marL="18288" marR="18288" marT="4572" marB="4572" anchor="ctr">
                     <a:lnL w="6350" cap="flat" cmpd="sng" algn="ctr">
                       <a:solidFill>
                         <a:srgbClr val="000000"/>
@@ -26381,5293 +25442,14 @@
       </p:graphicFrame>
       <p:sp>
         <p:nvSpPr>
-          <p:cNvPr id="76" name="TextBox 75">
-            <a:extLst>
-              <a:ext uri="{FF2B5EF4-FFF2-40B4-BE49-F238E27FC236}">
-                <a16:creationId xmlns:a16="http://schemas.microsoft.com/office/drawing/2014/main" id="{152B809B-4999-D370-569B-538B9A4AD219}"/>
-              </a:ext>
-            </a:extLst>
-          </p:cNvPr>
+          <p:cNvPr id="21" name="dashboard_title"/>
           <p:cNvSpPr txBox="1"/>
           <p:nvPr/>
         </p:nvSpPr>
         <p:spPr>
           <a:xfrm>
-            <a:off x="588135" y="1082690"/>
-            <a:ext cx="11168039" cy="1646605"/>
-          </a:xfrm>
-          <a:prstGeom prst="rect">
-            <a:avLst/>
-          </a:prstGeom>
-          <a:noFill/>
-          <a:ln w="28575">
-            <a:solidFill>
-              <a:srgbClr val="C98F00"/>
-            </a:solidFill>
-          </a:ln>
-        </p:spPr>
-        <p:txBody>
-          <a:bodyPr wrap="square" lIns="91440" tIns="45720" rIns="91440" bIns="45720" rtlCol="0" anchor="t">
-            <a:spAutoFit/>
-          </a:bodyPr>
-          <a:lstStyle/>
-          <a:p>
-            <a:pPr marL="171450" indent="-171450" defTabSz="2438338">
-              <a:lnSpc>
-                <a:spcPct val="100000"/>
-              </a:lnSpc>
-              <a:spcBef>
-                <a:spcPts val="0"/>
-              </a:spcBef>
-              <a:buFontTx/>
-              <a:buChar char="-"/>
-            </a:pPr>
-            <a:r>
-              <a:rPr lang="en-US" sz="1200" b="1" dirty="0">
-                <a:solidFill>
-                  <a:schemeClr val="bg1"/>
-                </a:solidFill>
-              </a:rPr>
-              <a:t>Executive Summary.</a:t>
-            </a:r>
-          </a:p>
-          <a:p>
-            <a:pPr marL="346075" indent="-177800" defTabSz="2438338">
-              <a:lnSpc>
-                <a:spcPct val="100000"/>
-              </a:lnSpc>
-              <a:spcBef>
-                <a:spcPts val="0"/>
-              </a:spcBef>
-              <a:buFontTx/>
-              <a:buChar char="-"/>
-            </a:pPr>
-            <a:r>
-              <a:rPr lang="en-US" sz="1200" b="1" dirty="0"/>
-              <a:t>The WW30 status is not showing broad engineering concerns; risk is concentrated in manufacturing deployment/material recovery, socket-stack qualification, and thermal model/data closure.</a:t>
-            </a:r>
-            <a:r>
-              <a:rPr lang="en-US" sz="1200" dirty="0"/>
-              <a:t> Hardware Engineering and most DCCE domains provide a stable execution base, while Manufacturing Engineering and TME require active management attention.</a:t>
-            </a:r>
-          </a:p>
-          <a:p>
-            <a:pPr marL="346075" indent="-177800" defTabSz="2438338">
-              <a:lnSpc>
-                <a:spcPct val="100000"/>
-              </a:lnSpc>
-              <a:spcBef>
-                <a:spcPts val="600"/>
-              </a:spcBef>
-              <a:buFontTx/>
-              <a:buChar char="-"/>
-            </a:pPr>
-            <a:r>
-              <a:rPr lang="en-US" sz="1200" b="1" dirty="0"/>
-              <a:t>The highest-priority leadership focus should be on preventing near-term schedule slips from material shortages and qualification timing:</a:t>
-            </a:r>
-            <a:r>
-              <a:rPr lang="en-US" sz="1200" dirty="0"/>
-              <a:t> Alpha delivery exposure from the PDB resistor shortage, MDP tight-timeline recovery, Lotes socket reliability/TCT closure, and Thermals WW30 LIRA assumptions are the most visible execution-sensitive items.</a:t>
-            </a:r>
-          </a:p>
-          <a:p>
-            <a:pPr defTabSz="2438338">
-              <a:lnSpc>
-                <a:spcPct val="100000"/>
-              </a:lnSpc>
-              <a:spcBef>
-                <a:spcPts val="0"/>
-              </a:spcBef>
-            </a:pPr>
-            <a:endParaRPr lang="en-US" sz="1200" dirty="0">
-              <a:solidFill>
-                <a:schemeClr val="bg1"/>
-              </a:solidFill>
-            </a:endParaRPr>
-          </a:p>
-        </p:txBody>
-      </p:sp>
-      <p:grpSp>
-        <p:nvGrpSpPr>
-          <p:cNvPr id="96" name="Group 95">
-            <a:extLst>
-              <a:ext uri="{FF2B5EF4-FFF2-40B4-BE49-F238E27FC236}">
-                <a16:creationId xmlns:a16="http://schemas.microsoft.com/office/drawing/2014/main" id="{D5ED3DCB-F937-DC98-ABFA-CAC6BFA95881}"/>
-              </a:ext>
-            </a:extLst>
-          </p:cNvPr>
-          <p:cNvGrpSpPr/>
-          <p:nvPr/>
-        </p:nvGrpSpPr>
-        <p:grpSpPr>
-          <a:xfrm>
-            <a:off x="528541" y="553964"/>
-            <a:ext cx="10126983" cy="423690"/>
-            <a:chOff x="1052186" y="868329"/>
-            <a:chExt cx="10126983" cy="463172"/>
-          </a:xfrm>
-        </p:grpSpPr>
-        <p:sp>
-          <p:nvSpPr>
-            <p:cNvPr id="97" name="TextBox 89">
-              <a:extLst>
-                <a:ext uri="{FF2B5EF4-FFF2-40B4-BE49-F238E27FC236}">
-                  <a16:creationId xmlns:a16="http://schemas.microsoft.com/office/drawing/2014/main" id="{A0170367-125A-B420-4ACC-C1B021C9B720}"/>
-                </a:ext>
-              </a:extLst>
-            </p:cNvPr>
-            <p:cNvSpPr txBox="1"/>
-            <p:nvPr/>
-          </p:nvSpPr>
-          <p:spPr>
-            <a:xfrm>
-              <a:off x="5550125" y="964452"/>
-              <a:ext cx="1014468" cy="336458"/>
-            </a:xfrm>
-            <a:prstGeom prst="rect">
-              <a:avLst/>
-            </a:prstGeom>
-            <a:noFill/>
-          </p:spPr>
-          <p:txBody>
-            <a:bodyPr wrap="square" rtlCol="0">
-              <a:spAutoFit/>
-            </a:bodyPr>
-            <a:lstStyle>
-              <a:defPPr marL="0" marR="0" indent="0" algn="l" defTabSz="457200" rtl="0" fontAlgn="auto" latinLnBrk="1" hangingPunct="0">
-                <a:lnSpc>
-                  <a:spcPct val="100000"/>
-                </a:lnSpc>
-                <a:spcBef>
-                  <a:spcPts val="0"/>
-                </a:spcBef>
-                <a:spcAft>
-                  <a:spcPts val="0"/>
-                </a:spcAft>
-                <a:buClrTx/>
-                <a:buSzTx/>
-                <a:buFontTx/>
-                <a:buNone/>
-                <a:tabLst/>
-                <a:defRPr kumimoji="0" sz="900" b="0" i="0" u="none" strike="noStrike" cap="none" spc="0" normalizeH="0" baseline="0">
-                  <a:ln>
-                    <a:noFill/>
-                  </a:ln>
-                  <a:solidFill>
-                    <a:srgbClr val="000000"/>
-                  </a:solidFill>
-                  <a:effectLst/>
-                  <a:uFillTx/>
-                </a:defRPr>
-              </a:defPPr>
-              <a:lvl1pPr marL="0" marR="0" indent="0" algn="l" defTabSz="1219169" rtl="0" fontAlgn="auto" latinLnBrk="0" hangingPunct="0">
-                <a:lnSpc>
-                  <a:spcPct val="90000"/>
-                </a:lnSpc>
-                <a:spcBef>
-                  <a:spcPts val="2250"/>
-                </a:spcBef>
-                <a:spcAft>
-                  <a:spcPts val="0"/>
-                </a:spcAft>
-                <a:buClrTx/>
-                <a:buSzTx/>
-                <a:buFontTx/>
-                <a:buNone/>
-                <a:tabLst/>
-                <a:defRPr kumimoji="0" sz="2400" b="0" i="0" u="none" strike="noStrike" cap="none" spc="0" normalizeH="0" baseline="0">
-                  <a:ln>
-                    <a:noFill/>
-                  </a:ln>
-                  <a:solidFill>
-                    <a:srgbClr val="000000"/>
-                  </a:solidFill>
-                  <a:effectLst/>
-                  <a:uFillTx/>
-                  <a:latin typeface="+mn-lt"/>
-                  <a:ea typeface="+mn-ea"/>
-                  <a:cs typeface="+mn-cs"/>
-                  <a:sym typeface="Helvetica Neue"/>
-                </a:defRPr>
-              </a:lvl1pPr>
-              <a:lvl2pPr marL="0" marR="0" indent="0" algn="l" defTabSz="1219169" rtl="0" fontAlgn="auto" latinLnBrk="0" hangingPunct="0">
-                <a:lnSpc>
-                  <a:spcPct val="90000"/>
-                </a:lnSpc>
-                <a:spcBef>
-                  <a:spcPts val="2250"/>
-                </a:spcBef>
-                <a:spcAft>
-                  <a:spcPts val="0"/>
-                </a:spcAft>
-                <a:buClrTx/>
-                <a:buSzTx/>
-                <a:buFontTx/>
-                <a:buNone/>
-                <a:tabLst/>
-                <a:defRPr kumimoji="0" sz="2400" b="0" i="0" u="none" strike="noStrike" cap="none" spc="0" normalizeH="0" baseline="0">
-                  <a:ln>
-                    <a:noFill/>
-                  </a:ln>
-                  <a:solidFill>
-                    <a:srgbClr val="000000"/>
-                  </a:solidFill>
-                  <a:effectLst/>
-                  <a:uFillTx/>
-                  <a:latin typeface="+mn-lt"/>
-                  <a:ea typeface="+mn-ea"/>
-                  <a:cs typeface="+mn-cs"/>
-                  <a:sym typeface="Helvetica Neue"/>
-                </a:defRPr>
-              </a:lvl2pPr>
-              <a:lvl3pPr marL="0" marR="0" indent="0" algn="l" defTabSz="1219169" rtl="0" fontAlgn="auto" latinLnBrk="0" hangingPunct="0">
-                <a:lnSpc>
-                  <a:spcPct val="90000"/>
-                </a:lnSpc>
-                <a:spcBef>
-                  <a:spcPts val="2250"/>
-                </a:spcBef>
-                <a:spcAft>
-                  <a:spcPts val="0"/>
-                </a:spcAft>
-                <a:buClrTx/>
-                <a:buSzTx/>
-                <a:buFontTx/>
-                <a:buNone/>
-                <a:tabLst/>
-                <a:defRPr kumimoji="0" sz="2400" b="0" i="0" u="none" strike="noStrike" cap="none" spc="0" normalizeH="0" baseline="0">
-                  <a:ln>
-                    <a:noFill/>
-                  </a:ln>
-                  <a:solidFill>
-                    <a:srgbClr val="000000"/>
-                  </a:solidFill>
-                  <a:effectLst/>
-                  <a:uFillTx/>
-                  <a:latin typeface="+mn-lt"/>
-                  <a:ea typeface="+mn-ea"/>
-                  <a:cs typeface="+mn-cs"/>
-                  <a:sym typeface="Helvetica Neue"/>
-                </a:defRPr>
-              </a:lvl3pPr>
-              <a:lvl4pPr marL="0" marR="0" indent="0" algn="l" defTabSz="1219169" rtl="0" fontAlgn="auto" latinLnBrk="0" hangingPunct="0">
-                <a:lnSpc>
-                  <a:spcPct val="90000"/>
-                </a:lnSpc>
-                <a:spcBef>
-                  <a:spcPts val="2250"/>
-                </a:spcBef>
-                <a:spcAft>
-                  <a:spcPts val="0"/>
-                </a:spcAft>
-                <a:buClrTx/>
-                <a:buSzTx/>
-                <a:buFontTx/>
-                <a:buNone/>
-                <a:tabLst/>
-                <a:defRPr kumimoji="0" sz="2400" b="0" i="0" u="none" strike="noStrike" cap="none" spc="0" normalizeH="0" baseline="0">
-                  <a:ln>
-                    <a:noFill/>
-                  </a:ln>
-                  <a:solidFill>
-                    <a:srgbClr val="000000"/>
-                  </a:solidFill>
-                  <a:effectLst/>
-                  <a:uFillTx/>
-                  <a:latin typeface="+mn-lt"/>
-                  <a:ea typeface="+mn-ea"/>
-                  <a:cs typeface="+mn-cs"/>
-                  <a:sym typeface="Helvetica Neue"/>
-                </a:defRPr>
-              </a:lvl4pPr>
-              <a:lvl5pPr marL="0" marR="0" indent="0" algn="l" defTabSz="1219169" rtl="0" fontAlgn="auto" latinLnBrk="0" hangingPunct="0">
-                <a:lnSpc>
-                  <a:spcPct val="90000"/>
-                </a:lnSpc>
-                <a:spcBef>
-                  <a:spcPts val="2250"/>
-                </a:spcBef>
-                <a:spcAft>
-                  <a:spcPts val="0"/>
-                </a:spcAft>
-                <a:buClrTx/>
-                <a:buSzTx/>
-                <a:buFontTx/>
-                <a:buNone/>
-                <a:tabLst/>
-                <a:defRPr kumimoji="0" sz="2400" b="0" i="0" u="none" strike="noStrike" cap="none" spc="0" normalizeH="0" baseline="0">
-                  <a:ln>
-                    <a:noFill/>
-                  </a:ln>
-                  <a:solidFill>
-                    <a:srgbClr val="000000"/>
-                  </a:solidFill>
-                  <a:effectLst/>
-                  <a:uFillTx/>
-                  <a:latin typeface="+mn-lt"/>
-                  <a:ea typeface="+mn-ea"/>
-                  <a:cs typeface="+mn-cs"/>
-                  <a:sym typeface="Helvetica Neue"/>
-                </a:defRPr>
-              </a:lvl5pPr>
-              <a:lvl6pPr marL="0" marR="0" indent="0" algn="l" defTabSz="1219169" rtl="0" fontAlgn="auto" latinLnBrk="0" hangingPunct="0">
-                <a:lnSpc>
-                  <a:spcPct val="90000"/>
-                </a:lnSpc>
-                <a:spcBef>
-                  <a:spcPts val="2250"/>
-                </a:spcBef>
-                <a:spcAft>
-                  <a:spcPts val="0"/>
-                </a:spcAft>
-                <a:buClrTx/>
-                <a:buSzTx/>
-                <a:buFontTx/>
-                <a:buNone/>
-                <a:tabLst/>
-                <a:defRPr kumimoji="0" sz="2400" b="0" i="0" u="none" strike="noStrike" cap="none" spc="0" normalizeH="0" baseline="0">
-                  <a:ln>
-                    <a:noFill/>
-                  </a:ln>
-                  <a:solidFill>
-                    <a:srgbClr val="000000"/>
-                  </a:solidFill>
-                  <a:effectLst/>
-                  <a:uFillTx/>
-                  <a:latin typeface="+mn-lt"/>
-                  <a:ea typeface="+mn-ea"/>
-                  <a:cs typeface="+mn-cs"/>
-                  <a:sym typeface="Helvetica Neue"/>
-                </a:defRPr>
-              </a:lvl6pPr>
-              <a:lvl7pPr marL="0" marR="0" indent="0" algn="l" defTabSz="1219169" rtl="0" fontAlgn="auto" latinLnBrk="0" hangingPunct="0">
-                <a:lnSpc>
-                  <a:spcPct val="90000"/>
-                </a:lnSpc>
-                <a:spcBef>
-                  <a:spcPts val="2250"/>
-                </a:spcBef>
-                <a:spcAft>
-                  <a:spcPts val="0"/>
-                </a:spcAft>
-                <a:buClrTx/>
-                <a:buSzTx/>
-                <a:buFontTx/>
-                <a:buNone/>
-                <a:tabLst/>
-                <a:defRPr kumimoji="0" sz="2400" b="0" i="0" u="none" strike="noStrike" cap="none" spc="0" normalizeH="0" baseline="0">
-                  <a:ln>
-                    <a:noFill/>
-                  </a:ln>
-                  <a:solidFill>
-                    <a:srgbClr val="000000"/>
-                  </a:solidFill>
-                  <a:effectLst/>
-                  <a:uFillTx/>
-                  <a:latin typeface="+mn-lt"/>
-                  <a:ea typeface="+mn-ea"/>
-                  <a:cs typeface="+mn-cs"/>
-                  <a:sym typeface="Helvetica Neue"/>
-                </a:defRPr>
-              </a:lvl7pPr>
-              <a:lvl8pPr marL="0" marR="0" indent="0" algn="l" defTabSz="1219169" rtl="0" fontAlgn="auto" latinLnBrk="0" hangingPunct="0">
-                <a:lnSpc>
-                  <a:spcPct val="90000"/>
-                </a:lnSpc>
-                <a:spcBef>
-                  <a:spcPts val="2250"/>
-                </a:spcBef>
-                <a:spcAft>
-                  <a:spcPts val="0"/>
-                </a:spcAft>
-                <a:buClrTx/>
-                <a:buSzTx/>
-                <a:buFontTx/>
-                <a:buNone/>
-                <a:tabLst/>
-                <a:defRPr kumimoji="0" sz="2400" b="0" i="0" u="none" strike="noStrike" cap="none" spc="0" normalizeH="0" baseline="0">
-                  <a:ln>
-                    <a:noFill/>
-                  </a:ln>
-                  <a:solidFill>
-                    <a:srgbClr val="000000"/>
-                  </a:solidFill>
-                  <a:effectLst/>
-                  <a:uFillTx/>
-                  <a:latin typeface="+mn-lt"/>
-                  <a:ea typeface="+mn-ea"/>
-                  <a:cs typeface="+mn-cs"/>
-                  <a:sym typeface="Helvetica Neue"/>
-                </a:defRPr>
-              </a:lvl8pPr>
-              <a:lvl9pPr marL="0" marR="0" indent="0" algn="l" defTabSz="1219169" rtl="0" fontAlgn="auto" latinLnBrk="0" hangingPunct="0">
-                <a:lnSpc>
-                  <a:spcPct val="90000"/>
-                </a:lnSpc>
-                <a:spcBef>
-                  <a:spcPts val="2250"/>
-                </a:spcBef>
-                <a:spcAft>
-                  <a:spcPts val="0"/>
-                </a:spcAft>
-                <a:buClrTx/>
-                <a:buSzTx/>
-                <a:buFontTx/>
-                <a:buNone/>
-                <a:tabLst/>
-                <a:defRPr kumimoji="0" sz="2400" b="0" i="0" u="none" strike="noStrike" cap="none" spc="0" normalizeH="0" baseline="0">
-                  <a:ln>
-                    <a:noFill/>
-                  </a:ln>
-                  <a:solidFill>
-                    <a:srgbClr val="000000"/>
-                  </a:solidFill>
-                  <a:effectLst/>
-                  <a:uFillTx/>
-                  <a:latin typeface="+mn-lt"/>
-                  <a:ea typeface="+mn-ea"/>
-                  <a:cs typeface="+mn-cs"/>
-                  <a:sym typeface="Helvetica Neue"/>
-                </a:defRPr>
-              </a:lvl9pPr>
-            </a:lstStyle>
-            <a:p>
-              <a:pPr marL="0" marR="0" lvl="0" indent="0" algn="ctr" defTabSz="914400" rtl="0" eaLnBrk="1" fontAlgn="auto" latinLnBrk="0" hangingPunct="1">
-                <a:lnSpc>
-                  <a:spcPct val="100000"/>
-                </a:lnSpc>
-                <a:spcBef>
-                  <a:spcPts val="0"/>
-                </a:spcBef>
-                <a:spcAft>
-                  <a:spcPts val="0"/>
-                </a:spcAft>
-                <a:buClrTx/>
-                <a:buSzTx/>
-                <a:buFontTx/>
-                <a:buNone/>
-                <a:tabLst/>
-                <a:defRPr/>
-              </a:pPr>
-              <a:r>
-                <a:rPr kumimoji="0" lang="en-US" sz="700" b="1" i="0" u="none" strike="noStrike" kern="1200" cap="none" spc="0" normalizeH="0" baseline="0" noProof="0">
-                  <a:ln>
-                    <a:noFill/>
-                  </a:ln>
-                  <a:solidFill>
-                    <a:schemeClr val="bg1"/>
-                  </a:solidFill>
-                  <a:effectLst/>
-                  <a:uLnTx/>
-                  <a:uFillTx/>
-                  <a:latin typeface="Intel Clear"/>
-                </a:rPr>
-                <a:t> Pre-PO</a:t>
-              </a:r>
-            </a:p>
-            <a:p>
-              <a:pPr marL="0" marR="0" lvl="0" indent="0" algn="ctr" defTabSz="914400" rtl="0" eaLnBrk="1" fontAlgn="auto" latinLnBrk="0" hangingPunct="1">
-                <a:lnSpc>
-                  <a:spcPct val="100000"/>
-                </a:lnSpc>
-                <a:spcBef>
-                  <a:spcPts val="0"/>
-                </a:spcBef>
-                <a:spcAft>
-                  <a:spcPts val="0"/>
-                </a:spcAft>
-                <a:buClrTx/>
-                <a:buSzTx/>
-                <a:buFontTx/>
-                <a:buNone/>
-                <a:tabLst/>
-                <a:defRPr/>
-              </a:pPr>
-              <a:r>
-                <a:rPr kumimoji="0" lang="en-US" sz="700" b="1" i="0" u="none" strike="noStrike" kern="1200" cap="none" spc="0" normalizeH="0" baseline="0" noProof="0">
-                  <a:ln>
-                    <a:noFill/>
-                  </a:ln>
-                  <a:solidFill>
-                    <a:schemeClr val="bg1"/>
-                  </a:solidFill>
-                  <a:effectLst/>
-                  <a:uLnTx/>
-                  <a:uFillTx/>
-                  <a:latin typeface="Intel Clear"/>
-                </a:rPr>
-                <a:t>Entry</a:t>
-              </a:r>
-            </a:p>
-          </p:txBody>
-        </p:sp>
-        <p:cxnSp>
-          <p:nvCxnSpPr>
-            <p:cNvPr id="98" name="Straight Connector 97">
-              <a:extLst>
-                <a:ext uri="{FF2B5EF4-FFF2-40B4-BE49-F238E27FC236}">
-                  <a16:creationId xmlns:a16="http://schemas.microsoft.com/office/drawing/2014/main" id="{E47B6507-E1C1-81BE-D738-33E65D97801E}"/>
-                </a:ext>
-              </a:extLst>
-            </p:cNvPr>
-            <p:cNvCxnSpPr>
-              <a:cxnSpLocks/>
-              <a:stCxn id="135" idx="1"/>
-            </p:cNvCxnSpPr>
-            <p:nvPr/>
-          </p:nvCxnSpPr>
-          <p:spPr>
-            <a:xfrm>
-              <a:off x="1130207" y="962310"/>
-              <a:ext cx="9656450" cy="5327"/>
-            </a:xfrm>
-            <a:prstGeom prst="line">
-              <a:avLst/>
-            </a:prstGeom>
-            <a:noFill/>
-            <a:ln w="25400" cap="sq" cmpd="sng" algn="ctr">
-              <a:gradFill flip="none" rotWithShape="1">
-                <a:gsLst>
-                  <a:gs pos="99000">
-                    <a:srgbClr val="000000"/>
-                  </a:gs>
-                  <a:gs pos="0">
-                    <a:srgbClr val="000000">
-                      <a:alpha val="0"/>
-                    </a:srgbClr>
-                  </a:gs>
-                  <a:gs pos="18975">
-                    <a:srgbClr val="000000"/>
-                  </a:gs>
-                  <a:gs pos="75000">
-                    <a:srgbClr val="000000"/>
-                  </a:gs>
-                </a:gsLst>
-                <a:lin ang="0" scaled="1"/>
-                <a:tileRect/>
-              </a:gradFill>
-              <a:prstDash val="solid"/>
-              <a:miter lim="800000"/>
-              <a:headEnd type="none" w="med" len="med"/>
-              <a:tailEnd type="none" w="med" len="med"/>
-            </a:ln>
-            <a:effectLst/>
-          </p:spPr>
-        </p:cxnSp>
-        <p:sp>
-          <p:nvSpPr>
-            <p:cNvPr id="99" name="TextBox 98">
-              <a:extLst>
-                <a:ext uri="{FF2B5EF4-FFF2-40B4-BE49-F238E27FC236}">
-                  <a16:creationId xmlns:a16="http://schemas.microsoft.com/office/drawing/2014/main" id="{ECF1A932-8E04-89CA-D656-9431EE9AF40A}"/>
-                </a:ext>
-              </a:extLst>
-            </p:cNvPr>
-            <p:cNvSpPr txBox="1"/>
-            <p:nvPr/>
-          </p:nvSpPr>
-          <p:spPr>
-            <a:xfrm>
-              <a:off x="10410274" y="1047700"/>
-              <a:ext cx="768895" cy="220921"/>
-            </a:xfrm>
-            <a:prstGeom prst="rect">
-              <a:avLst/>
-            </a:prstGeom>
-            <a:noFill/>
-          </p:spPr>
-          <p:txBody>
-            <a:bodyPr wrap="square" rtlCol="0" anchor="ctr">
-              <a:noAutofit/>
-            </a:bodyPr>
-            <a:lstStyle>
-              <a:defPPr marL="0" marR="0" indent="0" algn="l" defTabSz="457200" rtl="0" fontAlgn="auto" latinLnBrk="1" hangingPunct="0">
-                <a:lnSpc>
-                  <a:spcPct val="100000"/>
-                </a:lnSpc>
-                <a:spcBef>
-                  <a:spcPts val="0"/>
-                </a:spcBef>
-                <a:spcAft>
-                  <a:spcPts val="0"/>
-                </a:spcAft>
-                <a:buClrTx/>
-                <a:buSzTx/>
-                <a:buFontTx/>
-                <a:buNone/>
-                <a:tabLst/>
-                <a:defRPr kumimoji="0" sz="900" b="0" i="0" u="none" strike="noStrike" cap="none" spc="0" normalizeH="0" baseline="0">
-                  <a:ln>
-                    <a:noFill/>
-                  </a:ln>
-                  <a:solidFill>
-                    <a:srgbClr val="000000"/>
-                  </a:solidFill>
-                  <a:effectLst/>
-                  <a:uFillTx/>
-                </a:defRPr>
-              </a:defPPr>
-              <a:lvl1pPr marL="0" marR="0" indent="0" algn="l" defTabSz="1219169" rtl="0" fontAlgn="auto" latinLnBrk="0" hangingPunct="0">
-                <a:lnSpc>
-                  <a:spcPct val="90000"/>
-                </a:lnSpc>
-                <a:spcBef>
-                  <a:spcPts val="2250"/>
-                </a:spcBef>
-                <a:spcAft>
-                  <a:spcPts val="0"/>
-                </a:spcAft>
-                <a:buClrTx/>
-                <a:buSzTx/>
-                <a:buFontTx/>
-                <a:buNone/>
-                <a:tabLst/>
-                <a:defRPr kumimoji="0" sz="2400" b="0" i="0" u="none" strike="noStrike" cap="none" spc="0" normalizeH="0" baseline="0">
-                  <a:ln>
-                    <a:noFill/>
-                  </a:ln>
-                  <a:solidFill>
-                    <a:srgbClr val="000000"/>
-                  </a:solidFill>
-                  <a:effectLst/>
-                  <a:uFillTx/>
-                  <a:latin typeface="+mn-lt"/>
-                  <a:ea typeface="+mn-ea"/>
-                  <a:cs typeface="+mn-cs"/>
-                  <a:sym typeface="Helvetica Neue"/>
-                </a:defRPr>
-              </a:lvl1pPr>
-              <a:lvl2pPr marL="0" marR="0" indent="0" algn="l" defTabSz="1219169" rtl="0" fontAlgn="auto" latinLnBrk="0" hangingPunct="0">
-                <a:lnSpc>
-                  <a:spcPct val="90000"/>
-                </a:lnSpc>
-                <a:spcBef>
-                  <a:spcPts val="2250"/>
-                </a:spcBef>
-                <a:spcAft>
-                  <a:spcPts val="0"/>
-                </a:spcAft>
-                <a:buClrTx/>
-                <a:buSzTx/>
-                <a:buFontTx/>
-                <a:buNone/>
-                <a:tabLst/>
-                <a:defRPr kumimoji="0" sz="2400" b="0" i="0" u="none" strike="noStrike" cap="none" spc="0" normalizeH="0" baseline="0">
-                  <a:ln>
-                    <a:noFill/>
-                  </a:ln>
-                  <a:solidFill>
-                    <a:srgbClr val="000000"/>
-                  </a:solidFill>
-                  <a:effectLst/>
-                  <a:uFillTx/>
-                  <a:latin typeface="+mn-lt"/>
-                  <a:ea typeface="+mn-ea"/>
-                  <a:cs typeface="+mn-cs"/>
-                  <a:sym typeface="Helvetica Neue"/>
-                </a:defRPr>
-              </a:lvl2pPr>
-              <a:lvl3pPr marL="0" marR="0" indent="0" algn="l" defTabSz="1219169" rtl="0" fontAlgn="auto" latinLnBrk="0" hangingPunct="0">
-                <a:lnSpc>
-                  <a:spcPct val="90000"/>
-                </a:lnSpc>
-                <a:spcBef>
-                  <a:spcPts val="2250"/>
-                </a:spcBef>
-                <a:spcAft>
-                  <a:spcPts val="0"/>
-                </a:spcAft>
-                <a:buClrTx/>
-                <a:buSzTx/>
-                <a:buFontTx/>
-                <a:buNone/>
-                <a:tabLst/>
-                <a:defRPr kumimoji="0" sz="2400" b="0" i="0" u="none" strike="noStrike" cap="none" spc="0" normalizeH="0" baseline="0">
-                  <a:ln>
-                    <a:noFill/>
-                  </a:ln>
-                  <a:solidFill>
-                    <a:srgbClr val="000000"/>
-                  </a:solidFill>
-                  <a:effectLst/>
-                  <a:uFillTx/>
-                  <a:latin typeface="+mn-lt"/>
-                  <a:ea typeface="+mn-ea"/>
-                  <a:cs typeface="+mn-cs"/>
-                  <a:sym typeface="Helvetica Neue"/>
-                </a:defRPr>
-              </a:lvl3pPr>
-              <a:lvl4pPr marL="0" marR="0" indent="0" algn="l" defTabSz="1219169" rtl="0" fontAlgn="auto" latinLnBrk="0" hangingPunct="0">
-                <a:lnSpc>
-                  <a:spcPct val="90000"/>
-                </a:lnSpc>
-                <a:spcBef>
-                  <a:spcPts val="2250"/>
-                </a:spcBef>
-                <a:spcAft>
-                  <a:spcPts val="0"/>
-                </a:spcAft>
-                <a:buClrTx/>
-                <a:buSzTx/>
-                <a:buFontTx/>
-                <a:buNone/>
-                <a:tabLst/>
-                <a:defRPr kumimoji="0" sz="2400" b="0" i="0" u="none" strike="noStrike" cap="none" spc="0" normalizeH="0" baseline="0">
-                  <a:ln>
-                    <a:noFill/>
-                  </a:ln>
-                  <a:solidFill>
-                    <a:srgbClr val="000000"/>
-                  </a:solidFill>
-                  <a:effectLst/>
-                  <a:uFillTx/>
-                  <a:latin typeface="+mn-lt"/>
-                  <a:ea typeface="+mn-ea"/>
-                  <a:cs typeface="+mn-cs"/>
-                  <a:sym typeface="Helvetica Neue"/>
-                </a:defRPr>
-              </a:lvl4pPr>
-              <a:lvl5pPr marL="0" marR="0" indent="0" algn="l" defTabSz="1219169" rtl="0" fontAlgn="auto" latinLnBrk="0" hangingPunct="0">
-                <a:lnSpc>
-                  <a:spcPct val="90000"/>
-                </a:lnSpc>
-                <a:spcBef>
-                  <a:spcPts val="2250"/>
-                </a:spcBef>
-                <a:spcAft>
-                  <a:spcPts val="0"/>
-                </a:spcAft>
-                <a:buClrTx/>
-                <a:buSzTx/>
-                <a:buFontTx/>
-                <a:buNone/>
-                <a:tabLst/>
-                <a:defRPr kumimoji="0" sz="2400" b="0" i="0" u="none" strike="noStrike" cap="none" spc="0" normalizeH="0" baseline="0">
-                  <a:ln>
-                    <a:noFill/>
-                  </a:ln>
-                  <a:solidFill>
-                    <a:srgbClr val="000000"/>
-                  </a:solidFill>
-                  <a:effectLst/>
-                  <a:uFillTx/>
-                  <a:latin typeface="+mn-lt"/>
-                  <a:ea typeface="+mn-ea"/>
-                  <a:cs typeface="+mn-cs"/>
-                  <a:sym typeface="Helvetica Neue"/>
-                </a:defRPr>
-              </a:lvl5pPr>
-              <a:lvl6pPr marL="0" marR="0" indent="0" algn="l" defTabSz="1219169" rtl="0" fontAlgn="auto" latinLnBrk="0" hangingPunct="0">
-                <a:lnSpc>
-                  <a:spcPct val="90000"/>
-                </a:lnSpc>
-                <a:spcBef>
-                  <a:spcPts val="2250"/>
-                </a:spcBef>
-                <a:spcAft>
-                  <a:spcPts val="0"/>
-                </a:spcAft>
-                <a:buClrTx/>
-                <a:buSzTx/>
-                <a:buFontTx/>
-                <a:buNone/>
-                <a:tabLst/>
-                <a:defRPr kumimoji="0" sz="2400" b="0" i="0" u="none" strike="noStrike" cap="none" spc="0" normalizeH="0" baseline="0">
-                  <a:ln>
-                    <a:noFill/>
-                  </a:ln>
-                  <a:solidFill>
-                    <a:srgbClr val="000000"/>
-                  </a:solidFill>
-                  <a:effectLst/>
-                  <a:uFillTx/>
-                  <a:latin typeface="+mn-lt"/>
-                  <a:ea typeface="+mn-ea"/>
-                  <a:cs typeface="+mn-cs"/>
-                  <a:sym typeface="Helvetica Neue"/>
-                </a:defRPr>
-              </a:lvl6pPr>
-              <a:lvl7pPr marL="0" marR="0" indent="0" algn="l" defTabSz="1219169" rtl="0" fontAlgn="auto" latinLnBrk="0" hangingPunct="0">
-                <a:lnSpc>
-                  <a:spcPct val="90000"/>
-                </a:lnSpc>
-                <a:spcBef>
-                  <a:spcPts val="2250"/>
-                </a:spcBef>
-                <a:spcAft>
-                  <a:spcPts val="0"/>
-                </a:spcAft>
-                <a:buClrTx/>
-                <a:buSzTx/>
-                <a:buFontTx/>
-                <a:buNone/>
-                <a:tabLst/>
-                <a:defRPr kumimoji="0" sz="2400" b="0" i="0" u="none" strike="noStrike" cap="none" spc="0" normalizeH="0" baseline="0">
-                  <a:ln>
-                    <a:noFill/>
-                  </a:ln>
-                  <a:solidFill>
-                    <a:srgbClr val="000000"/>
-                  </a:solidFill>
-                  <a:effectLst/>
-                  <a:uFillTx/>
-                  <a:latin typeface="+mn-lt"/>
-                  <a:ea typeface="+mn-ea"/>
-                  <a:cs typeface="+mn-cs"/>
-                  <a:sym typeface="Helvetica Neue"/>
-                </a:defRPr>
-              </a:lvl7pPr>
-              <a:lvl8pPr marL="0" marR="0" indent="0" algn="l" defTabSz="1219169" rtl="0" fontAlgn="auto" latinLnBrk="0" hangingPunct="0">
-                <a:lnSpc>
-                  <a:spcPct val="90000"/>
-                </a:lnSpc>
-                <a:spcBef>
-                  <a:spcPts val="2250"/>
-                </a:spcBef>
-                <a:spcAft>
-                  <a:spcPts val="0"/>
-                </a:spcAft>
-                <a:buClrTx/>
-                <a:buSzTx/>
-                <a:buFontTx/>
-                <a:buNone/>
-                <a:tabLst/>
-                <a:defRPr kumimoji="0" sz="2400" b="0" i="0" u="none" strike="noStrike" cap="none" spc="0" normalizeH="0" baseline="0">
-                  <a:ln>
-                    <a:noFill/>
-                  </a:ln>
-                  <a:solidFill>
-                    <a:srgbClr val="000000"/>
-                  </a:solidFill>
-                  <a:effectLst/>
-                  <a:uFillTx/>
-                  <a:latin typeface="+mn-lt"/>
-                  <a:ea typeface="+mn-ea"/>
-                  <a:cs typeface="+mn-cs"/>
-                  <a:sym typeface="Helvetica Neue"/>
-                </a:defRPr>
-              </a:lvl8pPr>
-              <a:lvl9pPr marL="0" marR="0" indent="0" algn="l" defTabSz="1219169" rtl="0" fontAlgn="auto" latinLnBrk="0" hangingPunct="0">
-                <a:lnSpc>
-                  <a:spcPct val="90000"/>
-                </a:lnSpc>
-                <a:spcBef>
-                  <a:spcPts val="2250"/>
-                </a:spcBef>
-                <a:spcAft>
-                  <a:spcPts val="0"/>
-                </a:spcAft>
-                <a:buClrTx/>
-                <a:buSzTx/>
-                <a:buFontTx/>
-                <a:buNone/>
-                <a:tabLst/>
-                <a:defRPr kumimoji="0" sz="2400" b="0" i="0" u="none" strike="noStrike" cap="none" spc="0" normalizeH="0" baseline="0">
-                  <a:ln>
-                    <a:noFill/>
-                  </a:ln>
-                  <a:solidFill>
-                    <a:srgbClr val="000000"/>
-                  </a:solidFill>
-                  <a:effectLst/>
-                  <a:uFillTx/>
-                  <a:latin typeface="+mn-lt"/>
-                  <a:ea typeface="+mn-ea"/>
-                  <a:cs typeface="+mn-cs"/>
-                  <a:sym typeface="Helvetica Neue"/>
-                </a:defRPr>
-              </a:lvl9pPr>
-            </a:lstStyle>
-            <a:p>
-              <a:pPr algn="ctr" defTabSz="914400" hangingPunct="1">
-                <a:lnSpc>
-                  <a:spcPct val="100000"/>
-                </a:lnSpc>
-                <a:spcBef>
-                  <a:spcPts val="0"/>
-                </a:spcBef>
-                <a:defRPr/>
-              </a:pPr>
-              <a:r>
-                <a:rPr lang="en-US" sz="700" b="1" kern="1200">
-                  <a:solidFill>
-                    <a:schemeClr val="bg1"/>
-                  </a:solidFill>
-                  <a:latin typeface="Intel Clear"/>
-                </a:rPr>
-                <a:t>PRQ - PV</a:t>
-              </a:r>
-            </a:p>
-          </p:txBody>
-        </p:sp>
-        <p:pic>
-          <p:nvPicPr>
-            <p:cNvPr id="137" name="Picture 136">
-              <a:extLst>
-                <a:ext uri="{FF2B5EF4-FFF2-40B4-BE49-F238E27FC236}">
-                  <a16:creationId xmlns:a16="http://schemas.microsoft.com/office/drawing/2014/main" id="{112E515E-6986-E2DA-4184-C3C120B63DED}"/>
-                </a:ext>
-              </a:extLst>
-            </p:cNvPr>
-            <p:cNvPicPr>
-              <a:picLocks noChangeAspect="1"/>
-            </p:cNvPicPr>
-            <p:nvPr/>
-          </p:nvPicPr>
-          <p:blipFill>
-            <a:blip r:embed="rId3" cstate="print">
-              <a:extLst>
-                <a:ext uri="{28A0092B-C50C-407E-A947-70E740481C1C}">
-                  <a14:useLocalDpi xmlns:a14="http://schemas.microsoft.com/office/drawing/2010/main" val="0"/>
-                </a:ext>
-              </a:extLst>
-            </a:blip>
-            <a:srcRect/>
-            <a:stretch/>
-          </p:blipFill>
-          <p:spPr>
-            <a:xfrm>
-              <a:off x="2013732" y="892705"/>
-              <a:ext cx="118785" cy="118786"/>
-            </a:xfrm>
-            <a:prstGeom prst="rect">
-              <a:avLst/>
-            </a:prstGeom>
-            <a:effectLst>
-              <a:glow rad="63500">
-                <a:srgbClr val="5B9BD5">
-                  <a:satMod val="175000"/>
-                  <a:alpha val="18000"/>
-                </a:srgbClr>
-              </a:glow>
-            </a:effectLst>
-          </p:spPr>
-        </p:pic>
-        <p:pic>
-          <p:nvPicPr>
-            <p:cNvPr id="135" name="Picture 134">
-              <a:extLst>
-                <a:ext uri="{FF2B5EF4-FFF2-40B4-BE49-F238E27FC236}">
-                  <a16:creationId xmlns:a16="http://schemas.microsoft.com/office/drawing/2014/main" id="{04683AB2-3CB0-59F5-379E-8361B9A82858}"/>
-                </a:ext>
-              </a:extLst>
-            </p:cNvPr>
-            <p:cNvPicPr>
-              <a:picLocks noChangeAspect="1"/>
-            </p:cNvPicPr>
-            <p:nvPr/>
-          </p:nvPicPr>
-          <p:blipFill>
-            <a:blip r:embed="rId3" cstate="print">
-              <a:extLst>
-                <a:ext uri="{28A0092B-C50C-407E-A947-70E740481C1C}">
-                  <a14:useLocalDpi xmlns:a14="http://schemas.microsoft.com/office/drawing/2010/main" val="0"/>
-                </a:ext>
-              </a:extLst>
-            </a:blip>
-            <a:srcRect/>
-            <a:stretch/>
-          </p:blipFill>
-          <p:spPr>
-            <a:xfrm>
-              <a:off x="1130207" y="902917"/>
-              <a:ext cx="118785" cy="118784"/>
-            </a:xfrm>
-            <a:prstGeom prst="rect">
-              <a:avLst/>
-            </a:prstGeom>
-            <a:effectLst>
-              <a:glow rad="63500">
-                <a:srgbClr val="5B9BD5">
-                  <a:satMod val="175000"/>
-                  <a:alpha val="18000"/>
-                </a:srgbClr>
-              </a:glow>
-            </a:effectLst>
-          </p:spPr>
-        </p:pic>
-        <p:pic>
-          <p:nvPicPr>
-            <p:cNvPr id="133" name="Picture 132">
-              <a:extLst>
-                <a:ext uri="{FF2B5EF4-FFF2-40B4-BE49-F238E27FC236}">
-                  <a16:creationId xmlns:a16="http://schemas.microsoft.com/office/drawing/2014/main" id="{A0579006-8D5D-1151-63AD-4894F7BCBA8B}"/>
-                </a:ext>
-              </a:extLst>
-            </p:cNvPr>
-            <p:cNvPicPr>
-              <a:picLocks noChangeAspect="1"/>
-            </p:cNvPicPr>
-            <p:nvPr/>
-          </p:nvPicPr>
-          <p:blipFill>
-            <a:blip r:embed="rId3" cstate="print">
-              <a:extLst>
-                <a:ext uri="{28A0092B-C50C-407E-A947-70E740481C1C}">
-                  <a14:useLocalDpi xmlns:a14="http://schemas.microsoft.com/office/drawing/2010/main" val="0"/>
-                </a:ext>
-              </a:extLst>
-            </a:blip>
-            <a:srcRect/>
-            <a:stretch/>
-          </p:blipFill>
-          <p:spPr>
-            <a:xfrm>
-              <a:off x="2900084" y="890768"/>
-              <a:ext cx="118785" cy="118784"/>
-            </a:xfrm>
-            <a:prstGeom prst="rect">
-              <a:avLst/>
-            </a:prstGeom>
-            <a:effectLst>
-              <a:glow rad="63500">
-                <a:srgbClr val="5B9BD5">
-                  <a:satMod val="175000"/>
-                  <a:alpha val="18000"/>
-                </a:srgbClr>
-              </a:glow>
-            </a:effectLst>
-          </p:spPr>
-        </p:pic>
-        <p:sp>
-          <p:nvSpPr>
-            <p:cNvPr id="103" name="TextBox 30">
-              <a:extLst>
-                <a:ext uri="{FF2B5EF4-FFF2-40B4-BE49-F238E27FC236}">
-                  <a16:creationId xmlns:a16="http://schemas.microsoft.com/office/drawing/2014/main" id="{06A0B5CC-3509-B61A-F0EE-7E0D7C349ECC}"/>
-                </a:ext>
-              </a:extLst>
-            </p:cNvPr>
-            <p:cNvSpPr txBox="1"/>
-            <p:nvPr/>
-          </p:nvSpPr>
-          <p:spPr>
-            <a:xfrm>
-              <a:off x="4484665" y="999918"/>
-              <a:ext cx="612285" cy="194297"/>
-            </a:xfrm>
-            <a:prstGeom prst="rect">
-              <a:avLst/>
-            </a:prstGeom>
-            <a:noFill/>
-          </p:spPr>
-          <p:txBody>
-            <a:bodyPr wrap="square" lIns="0" rtlCol="0" anchor="ctr">
-              <a:noAutofit/>
-            </a:bodyPr>
-            <a:lstStyle>
-              <a:defPPr marL="0" marR="0" indent="0" algn="l" defTabSz="457200" rtl="0" fontAlgn="auto" latinLnBrk="1" hangingPunct="0">
-                <a:lnSpc>
-                  <a:spcPct val="100000"/>
-                </a:lnSpc>
-                <a:spcBef>
-                  <a:spcPts val="0"/>
-                </a:spcBef>
-                <a:spcAft>
-                  <a:spcPts val="0"/>
-                </a:spcAft>
-                <a:buClrTx/>
-                <a:buSzTx/>
-                <a:buFontTx/>
-                <a:buNone/>
-                <a:tabLst/>
-                <a:defRPr kumimoji="0" sz="900" b="0" i="0" u="none" strike="noStrike" cap="none" spc="0" normalizeH="0" baseline="0">
-                  <a:ln>
-                    <a:noFill/>
-                  </a:ln>
-                  <a:solidFill>
-                    <a:srgbClr val="000000"/>
-                  </a:solidFill>
-                  <a:effectLst/>
-                  <a:uFillTx/>
-                </a:defRPr>
-              </a:defPPr>
-              <a:lvl1pPr marL="0" marR="0" indent="0" algn="l" defTabSz="1219169" rtl="0" fontAlgn="auto" latinLnBrk="0" hangingPunct="0">
-                <a:lnSpc>
-                  <a:spcPct val="90000"/>
-                </a:lnSpc>
-                <a:spcBef>
-                  <a:spcPts val="2250"/>
-                </a:spcBef>
-                <a:spcAft>
-                  <a:spcPts val="0"/>
-                </a:spcAft>
-                <a:buClrTx/>
-                <a:buSzTx/>
-                <a:buFontTx/>
-                <a:buNone/>
-                <a:tabLst/>
-                <a:defRPr kumimoji="0" sz="2400" b="0" i="0" u="none" strike="noStrike" cap="none" spc="0" normalizeH="0" baseline="0">
-                  <a:ln>
-                    <a:noFill/>
-                  </a:ln>
-                  <a:solidFill>
-                    <a:srgbClr val="000000"/>
-                  </a:solidFill>
-                  <a:effectLst/>
-                  <a:uFillTx/>
-                  <a:latin typeface="+mn-lt"/>
-                  <a:ea typeface="+mn-ea"/>
-                  <a:cs typeface="+mn-cs"/>
-                  <a:sym typeface="Helvetica Neue"/>
-                </a:defRPr>
-              </a:lvl1pPr>
-              <a:lvl2pPr marL="0" marR="0" indent="0" algn="l" defTabSz="1219169" rtl="0" fontAlgn="auto" latinLnBrk="0" hangingPunct="0">
-                <a:lnSpc>
-                  <a:spcPct val="90000"/>
-                </a:lnSpc>
-                <a:spcBef>
-                  <a:spcPts val="2250"/>
-                </a:spcBef>
-                <a:spcAft>
-                  <a:spcPts val="0"/>
-                </a:spcAft>
-                <a:buClrTx/>
-                <a:buSzTx/>
-                <a:buFontTx/>
-                <a:buNone/>
-                <a:tabLst/>
-                <a:defRPr kumimoji="0" sz="2400" b="0" i="0" u="none" strike="noStrike" cap="none" spc="0" normalizeH="0" baseline="0">
-                  <a:ln>
-                    <a:noFill/>
-                  </a:ln>
-                  <a:solidFill>
-                    <a:srgbClr val="000000"/>
-                  </a:solidFill>
-                  <a:effectLst/>
-                  <a:uFillTx/>
-                  <a:latin typeface="+mn-lt"/>
-                  <a:ea typeface="+mn-ea"/>
-                  <a:cs typeface="+mn-cs"/>
-                  <a:sym typeface="Helvetica Neue"/>
-                </a:defRPr>
-              </a:lvl2pPr>
-              <a:lvl3pPr marL="0" marR="0" indent="0" algn="l" defTabSz="1219169" rtl="0" fontAlgn="auto" latinLnBrk="0" hangingPunct="0">
-                <a:lnSpc>
-                  <a:spcPct val="90000"/>
-                </a:lnSpc>
-                <a:spcBef>
-                  <a:spcPts val="2250"/>
-                </a:spcBef>
-                <a:spcAft>
-                  <a:spcPts val="0"/>
-                </a:spcAft>
-                <a:buClrTx/>
-                <a:buSzTx/>
-                <a:buFontTx/>
-                <a:buNone/>
-                <a:tabLst/>
-                <a:defRPr kumimoji="0" sz="2400" b="0" i="0" u="none" strike="noStrike" cap="none" spc="0" normalizeH="0" baseline="0">
-                  <a:ln>
-                    <a:noFill/>
-                  </a:ln>
-                  <a:solidFill>
-                    <a:srgbClr val="000000"/>
-                  </a:solidFill>
-                  <a:effectLst/>
-                  <a:uFillTx/>
-                  <a:latin typeface="+mn-lt"/>
-                  <a:ea typeface="+mn-ea"/>
-                  <a:cs typeface="+mn-cs"/>
-                  <a:sym typeface="Helvetica Neue"/>
-                </a:defRPr>
-              </a:lvl3pPr>
-              <a:lvl4pPr marL="0" marR="0" indent="0" algn="l" defTabSz="1219169" rtl="0" fontAlgn="auto" latinLnBrk="0" hangingPunct="0">
-                <a:lnSpc>
-                  <a:spcPct val="90000"/>
-                </a:lnSpc>
-                <a:spcBef>
-                  <a:spcPts val="2250"/>
-                </a:spcBef>
-                <a:spcAft>
-                  <a:spcPts val="0"/>
-                </a:spcAft>
-                <a:buClrTx/>
-                <a:buSzTx/>
-                <a:buFontTx/>
-                <a:buNone/>
-                <a:tabLst/>
-                <a:defRPr kumimoji="0" sz="2400" b="0" i="0" u="none" strike="noStrike" cap="none" spc="0" normalizeH="0" baseline="0">
-                  <a:ln>
-                    <a:noFill/>
-                  </a:ln>
-                  <a:solidFill>
-                    <a:srgbClr val="000000"/>
-                  </a:solidFill>
-                  <a:effectLst/>
-                  <a:uFillTx/>
-                  <a:latin typeface="+mn-lt"/>
-                  <a:ea typeface="+mn-ea"/>
-                  <a:cs typeface="+mn-cs"/>
-                  <a:sym typeface="Helvetica Neue"/>
-                </a:defRPr>
-              </a:lvl4pPr>
-              <a:lvl5pPr marL="0" marR="0" indent="0" algn="l" defTabSz="1219169" rtl="0" fontAlgn="auto" latinLnBrk="0" hangingPunct="0">
-                <a:lnSpc>
-                  <a:spcPct val="90000"/>
-                </a:lnSpc>
-                <a:spcBef>
-                  <a:spcPts val="2250"/>
-                </a:spcBef>
-                <a:spcAft>
-                  <a:spcPts val="0"/>
-                </a:spcAft>
-                <a:buClrTx/>
-                <a:buSzTx/>
-                <a:buFontTx/>
-                <a:buNone/>
-                <a:tabLst/>
-                <a:defRPr kumimoji="0" sz="2400" b="0" i="0" u="none" strike="noStrike" cap="none" spc="0" normalizeH="0" baseline="0">
-                  <a:ln>
-                    <a:noFill/>
-                  </a:ln>
-                  <a:solidFill>
-                    <a:srgbClr val="000000"/>
-                  </a:solidFill>
-                  <a:effectLst/>
-                  <a:uFillTx/>
-                  <a:latin typeface="+mn-lt"/>
-                  <a:ea typeface="+mn-ea"/>
-                  <a:cs typeface="+mn-cs"/>
-                  <a:sym typeface="Helvetica Neue"/>
-                </a:defRPr>
-              </a:lvl5pPr>
-              <a:lvl6pPr marL="0" marR="0" indent="0" algn="l" defTabSz="1219169" rtl="0" fontAlgn="auto" latinLnBrk="0" hangingPunct="0">
-                <a:lnSpc>
-                  <a:spcPct val="90000"/>
-                </a:lnSpc>
-                <a:spcBef>
-                  <a:spcPts val="2250"/>
-                </a:spcBef>
-                <a:spcAft>
-                  <a:spcPts val="0"/>
-                </a:spcAft>
-                <a:buClrTx/>
-                <a:buSzTx/>
-                <a:buFontTx/>
-                <a:buNone/>
-                <a:tabLst/>
-                <a:defRPr kumimoji="0" sz="2400" b="0" i="0" u="none" strike="noStrike" cap="none" spc="0" normalizeH="0" baseline="0">
-                  <a:ln>
-                    <a:noFill/>
-                  </a:ln>
-                  <a:solidFill>
-                    <a:srgbClr val="000000"/>
-                  </a:solidFill>
-                  <a:effectLst/>
-                  <a:uFillTx/>
-                  <a:latin typeface="+mn-lt"/>
-                  <a:ea typeface="+mn-ea"/>
-                  <a:cs typeface="+mn-cs"/>
-                  <a:sym typeface="Helvetica Neue"/>
-                </a:defRPr>
-              </a:lvl6pPr>
-              <a:lvl7pPr marL="0" marR="0" indent="0" algn="l" defTabSz="1219169" rtl="0" fontAlgn="auto" latinLnBrk="0" hangingPunct="0">
-                <a:lnSpc>
-                  <a:spcPct val="90000"/>
-                </a:lnSpc>
-                <a:spcBef>
-                  <a:spcPts val="2250"/>
-                </a:spcBef>
-                <a:spcAft>
-                  <a:spcPts val="0"/>
-                </a:spcAft>
-                <a:buClrTx/>
-                <a:buSzTx/>
-                <a:buFontTx/>
-                <a:buNone/>
-                <a:tabLst/>
-                <a:defRPr kumimoji="0" sz="2400" b="0" i="0" u="none" strike="noStrike" cap="none" spc="0" normalizeH="0" baseline="0">
-                  <a:ln>
-                    <a:noFill/>
-                  </a:ln>
-                  <a:solidFill>
-                    <a:srgbClr val="000000"/>
-                  </a:solidFill>
-                  <a:effectLst/>
-                  <a:uFillTx/>
-                  <a:latin typeface="+mn-lt"/>
-                  <a:ea typeface="+mn-ea"/>
-                  <a:cs typeface="+mn-cs"/>
-                  <a:sym typeface="Helvetica Neue"/>
-                </a:defRPr>
-              </a:lvl7pPr>
-              <a:lvl8pPr marL="0" marR="0" indent="0" algn="l" defTabSz="1219169" rtl="0" fontAlgn="auto" latinLnBrk="0" hangingPunct="0">
-                <a:lnSpc>
-                  <a:spcPct val="90000"/>
-                </a:lnSpc>
-                <a:spcBef>
-                  <a:spcPts val="2250"/>
-                </a:spcBef>
-                <a:spcAft>
-                  <a:spcPts val="0"/>
-                </a:spcAft>
-                <a:buClrTx/>
-                <a:buSzTx/>
-                <a:buFontTx/>
-                <a:buNone/>
-                <a:tabLst/>
-                <a:defRPr kumimoji="0" sz="2400" b="0" i="0" u="none" strike="noStrike" cap="none" spc="0" normalizeH="0" baseline="0">
-                  <a:ln>
-                    <a:noFill/>
-                  </a:ln>
-                  <a:solidFill>
-                    <a:srgbClr val="000000"/>
-                  </a:solidFill>
-                  <a:effectLst/>
-                  <a:uFillTx/>
-                  <a:latin typeface="+mn-lt"/>
-                  <a:ea typeface="+mn-ea"/>
-                  <a:cs typeface="+mn-cs"/>
-                  <a:sym typeface="Helvetica Neue"/>
-                </a:defRPr>
-              </a:lvl8pPr>
-              <a:lvl9pPr marL="0" marR="0" indent="0" algn="l" defTabSz="1219169" rtl="0" fontAlgn="auto" latinLnBrk="0" hangingPunct="0">
-                <a:lnSpc>
-                  <a:spcPct val="90000"/>
-                </a:lnSpc>
-                <a:spcBef>
-                  <a:spcPts val="2250"/>
-                </a:spcBef>
-                <a:spcAft>
-                  <a:spcPts val="0"/>
-                </a:spcAft>
-                <a:buClrTx/>
-                <a:buSzTx/>
-                <a:buFontTx/>
-                <a:buNone/>
-                <a:tabLst/>
-                <a:defRPr kumimoji="0" sz="2400" b="0" i="0" u="none" strike="noStrike" cap="none" spc="0" normalizeH="0" baseline="0">
-                  <a:ln>
-                    <a:noFill/>
-                  </a:ln>
-                  <a:solidFill>
-                    <a:srgbClr val="000000"/>
-                  </a:solidFill>
-                  <a:effectLst/>
-                  <a:uFillTx/>
-                  <a:latin typeface="+mn-lt"/>
-                  <a:ea typeface="+mn-ea"/>
-                  <a:cs typeface="+mn-cs"/>
-                  <a:sym typeface="Helvetica Neue"/>
-                </a:defRPr>
-              </a:lvl9pPr>
-            </a:lstStyle>
-            <a:p>
-              <a:pPr marL="0" marR="0" lvl="0" indent="0" algn="ctr" defTabSz="914377" rtl="0" eaLnBrk="1" fontAlgn="auto" latinLnBrk="0" hangingPunct="1">
-                <a:lnSpc>
-                  <a:spcPct val="100000"/>
-                </a:lnSpc>
-                <a:spcBef>
-                  <a:spcPts val="0"/>
-                </a:spcBef>
-                <a:spcAft>
-                  <a:spcPts val="0"/>
-                </a:spcAft>
-                <a:buClrTx/>
-                <a:buSzTx/>
-                <a:buFontTx/>
-                <a:buNone/>
-                <a:tabLst/>
-                <a:defRPr/>
-              </a:pPr>
-              <a:r>
-                <a:rPr lang="en-US" sz="700" b="1" kern="1200">
-                  <a:solidFill>
-                    <a:schemeClr val="bg1"/>
-                  </a:solidFill>
-                  <a:latin typeface="Intel Clear"/>
-                  <a:ea typeface="+mn-ea"/>
-                  <a:cs typeface="+mn-cs"/>
-                </a:rPr>
-                <a:t>ERB TO</a:t>
-              </a:r>
-            </a:p>
-          </p:txBody>
-        </p:sp>
-        <p:sp>
-          <p:nvSpPr>
-            <p:cNvPr id="104" name="TextBox 31">
-              <a:extLst>
-                <a:ext uri="{FF2B5EF4-FFF2-40B4-BE49-F238E27FC236}">
-                  <a16:creationId xmlns:a16="http://schemas.microsoft.com/office/drawing/2014/main" id="{89987A58-3CD0-A628-47C9-E72A53C12CD1}"/>
-                </a:ext>
-              </a:extLst>
-            </p:cNvPr>
-            <p:cNvSpPr txBox="1"/>
-            <p:nvPr/>
-          </p:nvSpPr>
-          <p:spPr>
-            <a:xfrm>
-              <a:off x="5092341" y="1007572"/>
-              <a:ext cx="613862" cy="194897"/>
-            </a:xfrm>
-            <a:prstGeom prst="rect">
-              <a:avLst/>
-            </a:prstGeom>
-            <a:noFill/>
-          </p:spPr>
-          <p:txBody>
-            <a:bodyPr wrap="square" lIns="0" rtlCol="0" anchor="ctr">
-              <a:noAutofit/>
-            </a:bodyPr>
-            <a:lstStyle>
-              <a:defPPr marL="0" marR="0" indent="0" algn="l" defTabSz="457200" rtl="0" fontAlgn="auto" latinLnBrk="1" hangingPunct="0">
-                <a:lnSpc>
-                  <a:spcPct val="100000"/>
-                </a:lnSpc>
-                <a:spcBef>
-                  <a:spcPts val="0"/>
-                </a:spcBef>
-                <a:spcAft>
-                  <a:spcPts val="0"/>
-                </a:spcAft>
-                <a:buClrTx/>
-                <a:buSzTx/>
-                <a:buFontTx/>
-                <a:buNone/>
-                <a:tabLst/>
-                <a:defRPr kumimoji="0" sz="900" b="0" i="0" u="none" strike="noStrike" cap="none" spc="0" normalizeH="0" baseline="0">
-                  <a:ln>
-                    <a:noFill/>
-                  </a:ln>
-                  <a:solidFill>
-                    <a:srgbClr val="000000"/>
-                  </a:solidFill>
-                  <a:effectLst/>
-                  <a:uFillTx/>
-                </a:defRPr>
-              </a:defPPr>
-              <a:lvl1pPr marL="0" marR="0" indent="0" algn="l" defTabSz="1219169" rtl="0" fontAlgn="auto" latinLnBrk="0" hangingPunct="0">
-                <a:lnSpc>
-                  <a:spcPct val="90000"/>
-                </a:lnSpc>
-                <a:spcBef>
-                  <a:spcPts val="2250"/>
-                </a:spcBef>
-                <a:spcAft>
-                  <a:spcPts val="0"/>
-                </a:spcAft>
-                <a:buClrTx/>
-                <a:buSzTx/>
-                <a:buFontTx/>
-                <a:buNone/>
-                <a:tabLst/>
-                <a:defRPr kumimoji="0" sz="2400" b="0" i="0" u="none" strike="noStrike" cap="none" spc="0" normalizeH="0" baseline="0">
-                  <a:ln>
-                    <a:noFill/>
-                  </a:ln>
-                  <a:solidFill>
-                    <a:srgbClr val="000000"/>
-                  </a:solidFill>
-                  <a:effectLst/>
-                  <a:uFillTx/>
-                  <a:latin typeface="+mn-lt"/>
-                  <a:ea typeface="+mn-ea"/>
-                  <a:cs typeface="+mn-cs"/>
-                  <a:sym typeface="Helvetica Neue"/>
-                </a:defRPr>
-              </a:lvl1pPr>
-              <a:lvl2pPr marL="0" marR="0" indent="0" algn="l" defTabSz="1219169" rtl="0" fontAlgn="auto" latinLnBrk="0" hangingPunct="0">
-                <a:lnSpc>
-                  <a:spcPct val="90000"/>
-                </a:lnSpc>
-                <a:spcBef>
-                  <a:spcPts val="2250"/>
-                </a:spcBef>
-                <a:spcAft>
-                  <a:spcPts val="0"/>
-                </a:spcAft>
-                <a:buClrTx/>
-                <a:buSzTx/>
-                <a:buFontTx/>
-                <a:buNone/>
-                <a:tabLst/>
-                <a:defRPr kumimoji="0" sz="2400" b="0" i="0" u="none" strike="noStrike" cap="none" spc="0" normalizeH="0" baseline="0">
-                  <a:ln>
-                    <a:noFill/>
-                  </a:ln>
-                  <a:solidFill>
-                    <a:srgbClr val="000000"/>
-                  </a:solidFill>
-                  <a:effectLst/>
-                  <a:uFillTx/>
-                  <a:latin typeface="+mn-lt"/>
-                  <a:ea typeface="+mn-ea"/>
-                  <a:cs typeface="+mn-cs"/>
-                  <a:sym typeface="Helvetica Neue"/>
-                </a:defRPr>
-              </a:lvl2pPr>
-              <a:lvl3pPr marL="0" marR="0" indent="0" algn="l" defTabSz="1219169" rtl="0" fontAlgn="auto" latinLnBrk="0" hangingPunct="0">
-                <a:lnSpc>
-                  <a:spcPct val="90000"/>
-                </a:lnSpc>
-                <a:spcBef>
-                  <a:spcPts val="2250"/>
-                </a:spcBef>
-                <a:spcAft>
-                  <a:spcPts val="0"/>
-                </a:spcAft>
-                <a:buClrTx/>
-                <a:buSzTx/>
-                <a:buFontTx/>
-                <a:buNone/>
-                <a:tabLst/>
-                <a:defRPr kumimoji="0" sz="2400" b="0" i="0" u="none" strike="noStrike" cap="none" spc="0" normalizeH="0" baseline="0">
-                  <a:ln>
-                    <a:noFill/>
-                  </a:ln>
-                  <a:solidFill>
-                    <a:srgbClr val="000000"/>
-                  </a:solidFill>
-                  <a:effectLst/>
-                  <a:uFillTx/>
-                  <a:latin typeface="+mn-lt"/>
-                  <a:ea typeface="+mn-ea"/>
-                  <a:cs typeface="+mn-cs"/>
-                  <a:sym typeface="Helvetica Neue"/>
-                </a:defRPr>
-              </a:lvl3pPr>
-              <a:lvl4pPr marL="0" marR="0" indent="0" algn="l" defTabSz="1219169" rtl="0" fontAlgn="auto" latinLnBrk="0" hangingPunct="0">
-                <a:lnSpc>
-                  <a:spcPct val="90000"/>
-                </a:lnSpc>
-                <a:spcBef>
-                  <a:spcPts val="2250"/>
-                </a:spcBef>
-                <a:spcAft>
-                  <a:spcPts val="0"/>
-                </a:spcAft>
-                <a:buClrTx/>
-                <a:buSzTx/>
-                <a:buFontTx/>
-                <a:buNone/>
-                <a:tabLst/>
-                <a:defRPr kumimoji="0" sz="2400" b="0" i="0" u="none" strike="noStrike" cap="none" spc="0" normalizeH="0" baseline="0">
-                  <a:ln>
-                    <a:noFill/>
-                  </a:ln>
-                  <a:solidFill>
-                    <a:srgbClr val="000000"/>
-                  </a:solidFill>
-                  <a:effectLst/>
-                  <a:uFillTx/>
-                  <a:latin typeface="+mn-lt"/>
-                  <a:ea typeface="+mn-ea"/>
-                  <a:cs typeface="+mn-cs"/>
-                  <a:sym typeface="Helvetica Neue"/>
-                </a:defRPr>
-              </a:lvl4pPr>
-              <a:lvl5pPr marL="0" marR="0" indent="0" algn="l" defTabSz="1219169" rtl="0" fontAlgn="auto" latinLnBrk="0" hangingPunct="0">
-                <a:lnSpc>
-                  <a:spcPct val="90000"/>
-                </a:lnSpc>
-                <a:spcBef>
-                  <a:spcPts val="2250"/>
-                </a:spcBef>
-                <a:spcAft>
-                  <a:spcPts val="0"/>
-                </a:spcAft>
-                <a:buClrTx/>
-                <a:buSzTx/>
-                <a:buFontTx/>
-                <a:buNone/>
-                <a:tabLst/>
-                <a:defRPr kumimoji="0" sz="2400" b="0" i="0" u="none" strike="noStrike" cap="none" spc="0" normalizeH="0" baseline="0">
-                  <a:ln>
-                    <a:noFill/>
-                  </a:ln>
-                  <a:solidFill>
-                    <a:srgbClr val="000000"/>
-                  </a:solidFill>
-                  <a:effectLst/>
-                  <a:uFillTx/>
-                  <a:latin typeface="+mn-lt"/>
-                  <a:ea typeface="+mn-ea"/>
-                  <a:cs typeface="+mn-cs"/>
-                  <a:sym typeface="Helvetica Neue"/>
-                </a:defRPr>
-              </a:lvl5pPr>
-              <a:lvl6pPr marL="0" marR="0" indent="0" algn="l" defTabSz="1219169" rtl="0" fontAlgn="auto" latinLnBrk="0" hangingPunct="0">
-                <a:lnSpc>
-                  <a:spcPct val="90000"/>
-                </a:lnSpc>
-                <a:spcBef>
-                  <a:spcPts val="2250"/>
-                </a:spcBef>
-                <a:spcAft>
-                  <a:spcPts val="0"/>
-                </a:spcAft>
-                <a:buClrTx/>
-                <a:buSzTx/>
-                <a:buFontTx/>
-                <a:buNone/>
-                <a:tabLst/>
-                <a:defRPr kumimoji="0" sz="2400" b="0" i="0" u="none" strike="noStrike" cap="none" spc="0" normalizeH="0" baseline="0">
-                  <a:ln>
-                    <a:noFill/>
-                  </a:ln>
-                  <a:solidFill>
-                    <a:srgbClr val="000000"/>
-                  </a:solidFill>
-                  <a:effectLst/>
-                  <a:uFillTx/>
-                  <a:latin typeface="+mn-lt"/>
-                  <a:ea typeface="+mn-ea"/>
-                  <a:cs typeface="+mn-cs"/>
-                  <a:sym typeface="Helvetica Neue"/>
-                </a:defRPr>
-              </a:lvl6pPr>
-              <a:lvl7pPr marL="0" marR="0" indent="0" algn="l" defTabSz="1219169" rtl="0" fontAlgn="auto" latinLnBrk="0" hangingPunct="0">
-                <a:lnSpc>
-                  <a:spcPct val="90000"/>
-                </a:lnSpc>
-                <a:spcBef>
-                  <a:spcPts val="2250"/>
-                </a:spcBef>
-                <a:spcAft>
-                  <a:spcPts val="0"/>
-                </a:spcAft>
-                <a:buClrTx/>
-                <a:buSzTx/>
-                <a:buFontTx/>
-                <a:buNone/>
-                <a:tabLst/>
-                <a:defRPr kumimoji="0" sz="2400" b="0" i="0" u="none" strike="noStrike" cap="none" spc="0" normalizeH="0" baseline="0">
-                  <a:ln>
-                    <a:noFill/>
-                  </a:ln>
-                  <a:solidFill>
-                    <a:srgbClr val="000000"/>
-                  </a:solidFill>
-                  <a:effectLst/>
-                  <a:uFillTx/>
-                  <a:latin typeface="+mn-lt"/>
-                  <a:ea typeface="+mn-ea"/>
-                  <a:cs typeface="+mn-cs"/>
-                  <a:sym typeface="Helvetica Neue"/>
-                </a:defRPr>
-              </a:lvl7pPr>
-              <a:lvl8pPr marL="0" marR="0" indent="0" algn="l" defTabSz="1219169" rtl="0" fontAlgn="auto" latinLnBrk="0" hangingPunct="0">
-                <a:lnSpc>
-                  <a:spcPct val="90000"/>
-                </a:lnSpc>
-                <a:spcBef>
-                  <a:spcPts val="2250"/>
-                </a:spcBef>
-                <a:spcAft>
-                  <a:spcPts val="0"/>
-                </a:spcAft>
-                <a:buClrTx/>
-                <a:buSzTx/>
-                <a:buFontTx/>
-                <a:buNone/>
-                <a:tabLst/>
-                <a:defRPr kumimoji="0" sz="2400" b="0" i="0" u="none" strike="noStrike" cap="none" spc="0" normalizeH="0" baseline="0">
-                  <a:ln>
-                    <a:noFill/>
-                  </a:ln>
-                  <a:solidFill>
-                    <a:srgbClr val="000000"/>
-                  </a:solidFill>
-                  <a:effectLst/>
-                  <a:uFillTx/>
-                  <a:latin typeface="+mn-lt"/>
-                  <a:ea typeface="+mn-ea"/>
-                  <a:cs typeface="+mn-cs"/>
-                  <a:sym typeface="Helvetica Neue"/>
-                </a:defRPr>
-              </a:lvl8pPr>
-              <a:lvl9pPr marL="0" marR="0" indent="0" algn="l" defTabSz="1219169" rtl="0" fontAlgn="auto" latinLnBrk="0" hangingPunct="0">
-                <a:lnSpc>
-                  <a:spcPct val="90000"/>
-                </a:lnSpc>
-                <a:spcBef>
-                  <a:spcPts val="2250"/>
-                </a:spcBef>
-                <a:spcAft>
-                  <a:spcPts val="0"/>
-                </a:spcAft>
-                <a:buClrTx/>
-                <a:buSzTx/>
-                <a:buFontTx/>
-                <a:buNone/>
-                <a:tabLst/>
-                <a:defRPr kumimoji="0" sz="2400" b="0" i="0" u="none" strike="noStrike" cap="none" spc="0" normalizeH="0" baseline="0">
-                  <a:ln>
-                    <a:noFill/>
-                  </a:ln>
-                  <a:solidFill>
-                    <a:srgbClr val="000000"/>
-                  </a:solidFill>
-                  <a:effectLst/>
-                  <a:uFillTx/>
-                  <a:latin typeface="+mn-lt"/>
-                  <a:ea typeface="+mn-ea"/>
-                  <a:cs typeface="+mn-cs"/>
-                  <a:sym typeface="Helvetica Neue"/>
-                </a:defRPr>
-              </a:lvl9pPr>
-            </a:lstStyle>
-            <a:p>
-              <a:pPr marL="0" marR="0" lvl="0" indent="0" algn="ctr" defTabSz="914377" rtl="0" eaLnBrk="1" fontAlgn="auto" latinLnBrk="0" hangingPunct="1">
-                <a:lnSpc>
-                  <a:spcPct val="100000"/>
-                </a:lnSpc>
-                <a:spcBef>
-                  <a:spcPts val="0"/>
-                </a:spcBef>
-                <a:spcAft>
-                  <a:spcPts val="0"/>
-                </a:spcAft>
-                <a:buClrTx/>
-                <a:buSzTx/>
-                <a:buFontTx/>
-                <a:buNone/>
-                <a:tabLst/>
-                <a:defRPr/>
-              </a:pPr>
-              <a:r>
-                <a:rPr lang="en-US" sz="700" b="1" kern="1200">
-                  <a:solidFill>
-                    <a:schemeClr val="bg1"/>
-                  </a:solidFill>
-                  <a:latin typeface="Intel Clear"/>
-                  <a:ea typeface="+mn-ea"/>
-                  <a:cs typeface="+mn-cs"/>
-                </a:rPr>
-                <a:t>POB</a:t>
-              </a:r>
-              <a:r>
-                <a:rPr kumimoji="0" lang="en-US" sz="700" b="0" i="0" u="none" strike="noStrike" kern="0" cap="none" spc="0" normalizeH="0" baseline="0" noProof="0">
-                  <a:ln>
-                    <a:noFill/>
-                  </a:ln>
-                  <a:solidFill>
-                    <a:schemeClr val="bg1"/>
-                  </a:solidFill>
-                  <a:effectLst/>
-                  <a:uLnTx/>
-                  <a:uFillTx/>
-                  <a:latin typeface="IntelOne Display Regular" panose="020B0503020203020204" pitchFamily="34" charset="0"/>
-                  <a:ea typeface="Intel Clear" panose="020B0604020203020204" pitchFamily="34" charset="0"/>
-                  <a:cs typeface="Intel Clear" panose="020B0604020203020204" pitchFamily="34" charset="0"/>
-                  <a:sym typeface="Helvetica Neue"/>
-                </a:rPr>
-                <a:t> </a:t>
-              </a:r>
-              <a:r>
-                <a:rPr lang="en-US" sz="700" b="1" kern="1200">
-                  <a:solidFill>
-                    <a:schemeClr val="bg1"/>
-                  </a:solidFill>
-                  <a:latin typeface="Intel Clear"/>
-                  <a:ea typeface="+mn-ea"/>
-                  <a:cs typeface="+mn-cs"/>
-                </a:rPr>
-                <a:t>TO</a:t>
-              </a:r>
-            </a:p>
-          </p:txBody>
-        </p:sp>
-        <p:sp>
-          <p:nvSpPr>
-            <p:cNvPr id="105" name="TextBox 54">
-              <a:extLst>
-                <a:ext uri="{FF2B5EF4-FFF2-40B4-BE49-F238E27FC236}">
-                  <a16:creationId xmlns:a16="http://schemas.microsoft.com/office/drawing/2014/main" id="{052FAD59-9896-0D3F-8B21-CABB4CF90F8E}"/>
-                </a:ext>
-              </a:extLst>
-            </p:cNvPr>
-            <p:cNvSpPr txBox="1"/>
-            <p:nvPr/>
-          </p:nvSpPr>
-          <p:spPr>
-            <a:xfrm>
-              <a:off x="2782555" y="996766"/>
-              <a:ext cx="316112" cy="218698"/>
-            </a:xfrm>
-            <a:prstGeom prst="rect">
-              <a:avLst/>
-            </a:prstGeom>
-            <a:noFill/>
-          </p:spPr>
-          <p:txBody>
-            <a:bodyPr wrap="none" rtlCol="0">
-              <a:spAutoFit/>
-            </a:bodyPr>
-            <a:lstStyle>
-              <a:defPPr marL="0" marR="0" indent="0" algn="l" defTabSz="457200" rtl="0" fontAlgn="auto" latinLnBrk="1" hangingPunct="0">
-                <a:lnSpc>
-                  <a:spcPct val="100000"/>
-                </a:lnSpc>
-                <a:spcBef>
-                  <a:spcPts val="0"/>
-                </a:spcBef>
-                <a:spcAft>
-                  <a:spcPts val="0"/>
-                </a:spcAft>
-                <a:buClrTx/>
-                <a:buSzTx/>
-                <a:buFontTx/>
-                <a:buNone/>
-                <a:tabLst/>
-                <a:defRPr kumimoji="0" sz="900" b="0" i="0" u="none" strike="noStrike" cap="none" spc="0" normalizeH="0" baseline="0">
-                  <a:ln>
-                    <a:noFill/>
-                  </a:ln>
-                  <a:solidFill>
-                    <a:srgbClr val="000000"/>
-                  </a:solidFill>
-                  <a:effectLst/>
-                  <a:uFillTx/>
-                </a:defRPr>
-              </a:defPPr>
-              <a:lvl1pPr marL="0" marR="0" indent="0" algn="l" defTabSz="1219169" rtl="0" fontAlgn="auto" latinLnBrk="0" hangingPunct="0">
-                <a:lnSpc>
-                  <a:spcPct val="90000"/>
-                </a:lnSpc>
-                <a:spcBef>
-                  <a:spcPts val="2250"/>
-                </a:spcBef>
-                <a:spcAft>
-                  <a:spcPts val="0"/>
-                </a:spcAft>
-                <a:buClrTx/>
-                <a:buSzTx/>
-                <a:buFontTx/>
-                <a:buNone/>
-                <a:tabLst/>
-                <a:defRPr kumimoji="0" sz="2400" b="0" i="0" u="none" strike="noStrike" cap="none" spc="0" normalizeH="0" baseline="0">
-                  <a:ln>
-                    <a:noFill/>
-                  </a:ln>
-                  <a:solidFill>
-                    <a:srgbClr val="000000"/>
-                  </a:solidFill>
-                  <a:effectLst/>
-                  <a:uFillTx/>
-                  <a:latin typeface="+mn-lt"/>
-                  <a:ea typeface="+mn-ea"/>
-                  <a:cs typeface="+mn-cs"/>
-                  <a:sym typeface="Helvetica Neue"/>
-                </a:defRPr>
-              </a:lvl1pPr>
-              <a:lvl2pPr marL="0" marR="0" indent="0" algn="l" defTabSz="1219169" rtl="0" fontAlgn="auto" latinLnBrk="0" hangingPunct="0">
-                <a:lnSpc>
-                  <a:spcPct val="90000"/>
-                </a:lnSpc>
-                <a:spcBef>
-                  <a:spcPts val="2250"/>
-                </a:spcBef>
-                <a:spcAft>
-                  <a:spcPts val="0"/>
-                </a:spcAft>
-                <a:buClrTx/>
-                <a:buSzTx/>
-                <a:buFontTx/>
-                <a:buNone/>
-                <a:tabLst/>
-                <a:defRPr kumimoji="0" sz="2400" b="0" i="0" u="none" strike="noStrike" cap="none" spc="0" normalizeH="0" baseline="0">
-                  <a:ln>
-                    <a:noFill/>
-                  </a:ln>
-                  <a:solidFill>
-                    <a:srgbClr val="000000"/>
-                  </a:solidFill>
-                  <a:effectLst/>
-                  <a:uFillTx/>
-                  <a:latin typeface="+mn-lt"/>
-                  <a:ea typeface="+mn-ea"/>
-                  <a:cs typeface="+mn-cs"/>
-                  <a:sym typeface="Helvetica Neue"/>
-                </a:defRPr>
-              </a:lvl2pPr>
-              <a:lvl3pPr marL="0" marR="0" indent="0" algn="l" defTabSz="1219169" rtl="0" fontAlgn="auto" latinLnBrk="0" hangingPunct="0">
-                <a:lnSpc>
-                  <a:spcPct val="90000"/>
-                </a:lnSpc>
-                <a:spcBef>
-                  <a:spcPts val="2250"/>
-                </a:spcBef>
-                <a:spcAft>
-                  <a:spcPts val="0"/>
-                </a:spcAft>
-                <a:buClrTx/>
-                <a:buSzTx/>
-                <a:buFontTx/>
-                <a:buNone/>
-                <a:tabLst/>
-                <a:defRPr kumimoji="0" sz="2400" b="0" i="0" u="none" strike="noStrike" cap="none" spc="0" normalizeH="0" baseline="0">
-                  <a:ln>
-                    <a:noFill/>
-                  </a:ln>
-                  <a:solidFill>
-                    <a:srgbClr val="000000"/>
-                  </a:solidFill>
-                  <a:effectLst/>
-                  <a:uFillTx/>
-                  <a:latin typeface="+mn-lt"/>
-                  <a:ea typeface="+mn-ea"/>
-                  <a:cs typeface="+mn-cs"/>
-                  <a:sym typeface="Helvetica Neue"/>
-                </a:defRPr>
-              </a:lvl3pPr>
-              <a:lvl4pPr marL="0" marR="0" indent="0" algn="l" defTabSz="1219169" rtl="0" fontAlgn="auto" latinLnBrk="0" hangingPunct="0">
-                <a:lnSpc>
-                  <a:spcPct val="90000"/>
-                </a:lnSpc>
-                <a:spcBef>
-                  <a:spcPts val="2250"/>
-                </a:spcBef>
-                <a:spcAft>
-                  <a:spcPts val="0"/>
-                </a:spcAft>
-                <a:buClrTx/>
-                <a:buSzTx/>
-                <a:buFontTx/>
-                <a:buNone/>
-                <a:tabLst/>
-                <a:defRPr kumimoji="0" sz="2400" b="0" i="0" u="none" strike="noStrike" cap="none" spc="0" normalizeH="0" baseline="0">
-                  <a:ln>
-                    <a:noFill/>
-                  </a:ln>
-                  <a:solidFill>
-                    <a:srgbClr val="000000"/>
-                  </a:solidFill>
-                  <a:effectLst/>
-                  <a:uFillTx/>
-                  <a:latin typeface="+mn-lt"/>
-                  <a:ea typeface="+mn-ea"/>
-                  <a:cs typeface="+mn-cs"/>
-                  <a:sym typeface="Helvetica Neue"/>
-                </a:defRPr>
-              </a:lvl4pPr>
-              <a:lvl5pPr marL="0" marR="0" indent="0" algn="l" defTabSz="1219169" rtl="0" fontAlgn="auto" latinLnBrk="0" hangingPunct="0">
-                <a:lnSpc>
-                  <a:spcPct val="90000"/>
-                </a:lnSpc>
-                <a:spcBef>
-                  <a:spcPts val="2250"/>
-                </a:spcBef>
-                <a:spcAft>
-                  <a:spcPts val="0"/>
-                </a:spcAft>
-                <a:buClrTx/>
-                <a:buSzTx/>
-                <a:buFontTx/>
-                <a:buNone/>
-                <a:tabLst/>
-                <a:defRPr kumimoji="0" sz="2400" b="0" i="0" u="none" strike="noStrike" cap="none" spc="0" normalizeH="0" baseline="0">
-                  <a:ln>
-                    <a:noFill/>
-                  </a:ln>
-                  <a:solidFill>
-                    <a:srgbClr val="000000"/>
-                  </a:solidFill>
-                  <a:effectLst/>
-                  <a:uFillTx/>
-                  <a:latin typeface="+mn-lt"/>
-                  <a:ea typeface="+mn-ea"/>
-                  <a:cs typeface="+mn-cs"/>
-                  <a:sym typeface="Helvetica Neue"/>
-                </a:defRPr>
-              </a:lvl5pPr>
-              <a:lvl6pPr marL="0" marR="0" indent="0" algn="l" defTabSz="1219169" rtl="0" fontAlgn="auto" latinLnBrk="0" hangingPunct="0">
-                <a:lnSpc>
-                  <a:spcPct val="90000"/>
-                </a:lnSpc>
-                <a:spcBef>
-                  <a:spcPts val="2250"/>
-                </a:spcBef>
-                <a:spcAft>
-                  <a:spcPts val="0"/>
-                </a:spcAft>
-                <a:buClrTx/>
-                <a:buSzTx/>
-                <a:buFontTx/>
-                <a:buNone/>
-                <a:tabLst/>
-                <a:defRPr kumimoji="0" sz="2400" b="0" i="0" u="none" strike="noStrike" cap="none" spc="0" normalizeH="0" baseline="0">
-                  <a:ln>
-                    <a:noFill/>
-                  </a:ln>
-                  <a:solidFill>
-                    <a:srgbClr val="000000"/>
-                  </a:solidFill>
-                  <a:effectLst/>
-                  <a:uFillTx/>
-                  <a:latin typeface="+mn-lt"/>
-                  <a:ea typeface="+mn-ea"/>
-                  <a:cs typeface="+mn-cs"/>
-                  <a:sym typeface="Helvetica Neue"/>
-                </a:defRPr>
-              </a:lvl6pPr>
-              <a:lvl7pPr marL="0" marR="0" indent="0" algn="l" defTabSz="1219169" rtl="0" fontAlgn="auto" latinLnBrk="0" hangingPunct="0">
-                <a:lnSpc>
-                  <a:spcPct val="90000"/>
-                </a:lnSpc>
-                <a:spcBef>
-                  <a:spcPts val="2250"/>
-                </a:spcBef>
-                <a:spcAft>
-                  <a:spcPts val="0"/>
-                </a:spcAft>
-                <a:buClrTx/>
-                <a:buSzTx/>
-                <a:buFontTx/>
-                <a:buNone/>
-                <a:tabLst/>
-                <a:defRPr kumimoji="0" sz="2400" b="0" i="0" u="none" strike="noStrike" cap="none" spc="0" normalizeH="0" baseline="0">
-                  <a:ln>
-                    <a:noFill/>
-                  </a:ln>
-                  <a:solidFill>
-                    <a:srgbClr val="000000"/>
-                  </a:solidFill>
-                  <a:effectLst/>
-                  <a:uFillTx/>
-                  <a:latin typeface="+mn-lt"/>
-                  <a:ea typeface="+mn-ea"/>
-                  <a:cs typeface="+mn-cs"/>
-                  <a:sym typeface="Helvetica Neue"/>
-                </a:defRPr>
-              </a:lvl7pPr>
-              <a:lvl8pPr marL="0" marR="0" indent="0" algn="l" defTabSz="1219169" rtl="0" fontAlgn="auto" latinLnBrk="0" hangingPunct="0">
-                <a:lnSpc>
-                  <a:spcPct val="90000"/>
-                </a:lnSpc>
-                <a:spcBef>
-                  <a:spcPts val="2250"/>
-                </a:spcBef>
-                <a:spcAft>
-                  <a:spcPts val="0"/>
-                </a:spcAft>
-                <a:buClrTx/>
-                <a:buSzTx/>
-                <a:buFontTx/>
-                <a:buNone/>
-                <a:tabLst/>
-                <a:defRPr kumimoji="0" sz="2400" b="0" i="0" u="none" strike="noStrike" cap="none" spc="0" normalizeH="0" baseline="0">
-                  <a:ln>
-                    <a:noFill/>
-                  </a:ln>
-                  <a:solidFill>
-                    <a:srgbClr val="000000"/>
-                  </a:solidFill>
-                  <a:effectLst/>
-                  <a:uFillTx/>
-                  <a:latin typeface="+mn-lt"/>
-                  <a:ea typeface="+mn-ea"/>
-                  <a:cs typeface="+mn-cs"/>
-                  <a:sym typeface="Helvetica Neue"/>
-                </a:defRPr>
-              </a:lvl8pPr>
-              <a:lvl9pPr marL="0" marR="0" indent="0" algn="l" defTabSz="1219169" rtl="0" fontAlgn="auto" latinLnBrk="0" hangingPunct="0">
-                <a:lnSpc>
-                  <a:spcPct val="90000"/>
-                </a:lnSpc>
-                <a:spcBef>
-                  <a:spcPts val="2250"/>
-                </a:spcBef>
-                <a:spcAft>
-                  <a:spcPts val="0"/>
-                </a:spcAft>
-                <a:buClrTx/>
-                <a:buSzTx/>
-                <a:buFontTx/>
-                <a:buNone/>
-                <a:tabLst/>
-                <a:defRPr kumimoji="0" sz="2400" b="0" i="0" u="none" strike="noStrike" cap="none" spc="0" normalizeH="0" baseline="0">
-                  <a:ln>
-                    <a:noFill/>
-                  </a:ln>
-                  <a:solidFill>
-                    <a:srgbClr val="000000"/>
-                  </a:solidFill>
-                  <a:effectLst/>
-                  <a:uFillTx/>
-                  <a:latin typeface="+mn-lt"/>
-                  <a:ea typeface="+mn-ea"/>
-                  <a:cs typeface="+mn-cs"/>
-                  <a:sym typeface="Helvetica Neue"/>
-                </a:defRPr>
-              </a:lvl9pPr>
-            </a:lstStyle>
-            <a:p>
-              <a:pPr marL="0" marR="0" lvl="0" indent="0" algn="ctr" defTabSz="914400" rtl="0" eaLnBrk="1" fontAlgn="auto" latinLnBrk="0" hangingPunct="1">
-                <a:lnSpc>
-                  <a:spcPct val="100000"/>
-                </a:lnSpc>
-                <a:spcBef>
-                  <a:spcPts val="0"/>
-                </a:spcBef>
-                <a:spcAft>
-                  <a:spcPts val="0"/>
-                </a:spcAft>
-                <a:buClrTx/>
-                <a:buSzTx/>
-                <a:buFontTx/>
-                <a:buNone/>
-                <a:tabLst/>
-                <a:defRPr/>
-              </a:pPr>
-              <a:r>
-                <a:rPr kumimoji="0" lang="en-US" sz="700" b="1" i="0" u="none" strike="noStrike" kern="1200" cap="none" spc="0" normalizeH="0" baseline="0" noProof="0">
-                  <a:ln>
-                    <a:noFill/>
-                  </a:ln>
-                  <a:solidFill>
-                    <a:schemeClr val="bg1"/>
-                  </a:solidFill>
-                  <a:effectLst/>
-                  <a:uLnTx/>
-                  <a:uFillTx/>
-                  <a:latin typeface="Intel Clear"/>
-                </a:rPr>
-                <a:t> EC</a:t>
-              </a:r>
-            </a:p>
-          </p:txBody>
-        </p:sp>
-        <p:sp>
-          <p:nvSpPr>
-            <p:cNvPr id="106" name="TextBox 55">
-              <a:extLst>
-                <a:ext uri="{FF2B5EF4-FFF2-40B4-BE49-F238E27FC236}">
-                  <a16:creationId xmlns:a16="http://schemas.microsoft.com/office/drawing/2014/main" id="{BC7BB7FA-E0EF-7E80-DA01-99AE07A32690}"/>
-                </a:ext>
-              </a:extLst>
-            </p:cNvPr>
-            <p:cNvSpPr txBox="1"/>
-            <p:nvPr/>
-          </p:nvSpPr>
-          <p:spPr>
-            <a:xfrm>
-              <a:off x="6421437" y="956276"/>
-              <a:ext cx="833092" cy="336458"/>
-            </a:xfrm>
-            <a:prstGeom prst="rect">
-              <a:avLst/>
-            </a:prstGeom>
-            <a:noFill/>
-          </p:spPr>
-          <p:txBody>
-            <a:bodyPr wrap="square" rtlCol="0">
-              <a:spAutoFit/>
-            </a:bodyPr>
-            <a:lstStyle>
-              <a:defPPr marL="0" marR="0" indent="0" algn="l" defTabSz="457200" rtl="0" fontAlgn="auto" latinLnBrk="1" hangingPunct="0">
-                <a:lnSpc>
-                  <a:spcPct val="100000"/>
-                </a:lnSpc>
-                <a:spcBef>
-                  <a:spcPts val="0"/>
-                </a:spcBef>
-                <a:spcAft>
-                  <a:spcPts val="0"/>
-                </a:spcAft>
-                <a:buClrTx/>
-                <a:buSzTx/>
-                <a:buFontTx/>
-                <a:buNone/>
-                <a:tabLst/>
-                <a:defRPr kumimoji="0" sz="900" b="0" i="0" u="none" strike="noStrike" cap="none" spc="0" normalizeH="0" baseline="0">
-                  <a:ln>
-                    <a:noFill/>
-                  </a:ln>
-                  <a:solidFill>
-                    <a:srgbClr val="000000"/>
-                  </a:solidFill>
-                  <a:effectLst/>
-                  <a:uFillTx/>
-                </a:defRPr>
-              </a:defPPr>
-              <a:lvl1pPr marL="0" marR="0" indent="0" algn="l" defTabSz="1219169" rtl="0" fontAlgn="auto" latinLnBrk="0" hangingPunct="0">
-                <a:lnSpc>
-                  <a:spcPct val="90000"/>
-                </a:lnSpc>
-                <a:spcBef>
-                  <a:spcPts val="2250"/>
-                </a:spcBef>
-                <a:spcAft>
-                  <a:spcPts val="0"/>
-                </a:spcAft>
-                <a:buClrTx/>
-                <a:buSzTx/>
-                <a:buFontTx/>
-                <a:buNone/>
-                <a:tabLst/>
-                <a:defRPr kumimoji="0" sz="2400" b="0" i="0" u="none" strike="noStrike" cap="none" spc="0" normalizeH="0" baseline="0">
-                  <a:ln>
-                    <a:noFill/>
-                  </a:ln>
-                  <a:solidFill>
-                    <a:srgbClr val="000000"/>
-                  </a:solidFill>
-                  <a:effectLst/>
-                  <a:uFillTx/>
-                  <a:latin typeface="+mn-lt"/>
-                  <a:ea typeface="+mn-ea"/>
-                  <a:cs typeface="+mn-cs"/>
-                  <a:sym typeface="Helvetica Neue"/>
-                </a:defRPr>
-              </a:lvl1pPr>
-              <a:lvl2pPr marL="0" marR="0" indent="0" algn="l" defTabSz="1219169" rtl="0" fontAlgn="auto" latinLnBrk="0" hangingPunct="0">
-                <a:lnSpc>
-                  <a:spcPct val="90000"/>
-                </a:lnSpc>
-                <a:spcBef>
-                  <a:spcPts val="2250"/>
-                </a:spcBef>
-                <a:spcAft>
-                  <a:spcPts val="0"/>
-                </a:spcAft>
-                <a:buClrTx/>
-                <a:buSzTx/>
-                <a:buFontTx/>
-                <a:buNone/>
-                <a:tabLst/>
-                <a:defRPr kumimoji="0" sz="2400" b="0" i="0" u="none" strike="noStrike" cap="none" spc="0" normalizeH="0" baseline="0">
-                  <a:ln>
-                    <a:noFill/>
-                  </a:ln>
-                  <a:solidFill>
-                    <a:srgbClr val="000000"/>
-                  </a:solidFill>
-                  <a:effectLst/>
-                  <a:uFillTx/>
-                  <a:latin typeface="+mn-lt"/>
-                  <a:ea typeface="+mn-ea"/>
-                  <a:cs typeface="+mn-cs"/>
-                  <a:sym typeface="Helvetica Neue"/>
-                </a:defRPr>
-              </a:lvl2pPr>
-              <a:lvl3pPr marL="0" marR="0" indent="0" algn="l" defTabSz="1219169" rtl="0" fontAlgn="auto" latinLnBrk="0" hangingPunct="0">
-                <a:lnSpc>
-                  <a:spcPct val="90000"/>
-                </a:lnSpc>
-                <a:spcBef>
-                  <a:spcPts val="2250"/>
-                </a:spcBef>
-                <a:spcAft>
-                  <a:spcPts val="0"/>
-                </a:spcAft>
-                <a:buClrTx/>
-                <a:buSzTx/>
-                <a:buFontTx/>
-                <a:buNone/>
-                <a:tabLst/>
-                <a:defRPr kumimoji="0" sz="2400" b="0" i="0" u="none" strike="noStrike" cap="none" spc="0" normalizeH="0" baseline="0">
-                  <a:ln>
-                    <a:noFill/>
-                  </a:ln>
-                  <a:solidFill>
-                    <a:srgbClr val="000000"/>
-                  </a:solidFill>
-                  <a:effectLst/>
-                  <a:uFillTx/>
-                  <a:latin typeface="+mn-lt"/>
-                  <a:ea typeface="+mn-ea"/>
-                  <a:cs typeface="+mn-cs"/>
-                  <a:sym typeface="Helvetica Neue"/>
-                </a:defRPr>
-              </a:lvl3pPr>
-              <a:lvl4pPr marL="0" marR="0" indent="0" algn="l" defTabSz="1219169" rtl="0" fontAlgn="auto" latinLnBrk="0" hangingPunct="0">
-                <a:lnSpc>
-                  <a:spcPct val="90000"/>
-                </a:lnSpc>
-                <a:spcBef>
-                  <a:spcPts val="2250"/>
-                </a:spcBef>
-                <a:spcAft>
-                  <a:spcPts val="0"/>
-                </a:spcAft>
-                <a:buClrTx/>
-                <a:buSzTx/>
-                <a:buFontTx/>
-                <a:buNone/>
-                <a:tabLst/>
-                <a:defRPr kumimoji="0" sz="2400" b="0" i="0" u="none" strike="noStrike" cap="none" spc="0" normalizeH="0" baseline="0">
-                  <a:ln>
-                    <a:noFill/>
-                  </a:ln>
-                  <a:solidFill>
-                    <a:srgbClr val="000000"/>
-                  </a:solidFill>
-                  <a:effectLst/>
-                  <a:uFillTx/>
-                  <a:latin typeface="+mn-lt"/>
-                  <a:ea typeface="+mn-ea"/>
-                  <a:cs typeface="+mn-cs"/>
-                  <a:sym typeface="Helvetica Neue"/>
-                </a:defRPr>
-              </a:lvl4pPr>
-              <a:lvl5pPr marL="0" marR="0" indent="0" algn="l" defTabSz="1219169" rtl="0" fontAlgn="auto" latinLnBrk="0" hangingPunct="0">
-                <a:lnSpc>
-                  <a:spcPct val="90000"/>
-                </a:lnSpc>
-                <a:spcBef>
-                  <a:spcPts val="2250"/>
-                </a:spcBef>
-                <a:spcAft>
-                  <a:spcPts val="0"/>
-                </a:spcAft>
-                <a:buClrTx/>
-                <a:buSzTx/>
-                <a:buFontTx/>
-                <a:buNone/>
-                <a:tabLst/>
-                <a:defRPr kumimoji="0" sz="2400" b="0" i="0" u="none" strike="noStrike" cap="none" spc="0" normalizeH="0" baseline="0">
-                  <a:ln>
-                    <a:noFill/>
-                  </a:ln>
-                  <a:solidFill>
-                    <a:srgbClr val="000000"/>
-                  </a:solidFill>
-                  <a:effectLst/>
-                  <a:uFillTx/>
-                  <a:latin typeface="+mn-lt"/>
-                  <a:ea typeface="+mn-ea"/>
-                  <a:cs typeface="+mn-cs"/>
-                  <a:sym typeface="Helvetica Neue"/>
-                </a:defRPr>
-              </a:lvl5pPr>
-              <a:lvl6pPr marL="0" marR="0" indent="0" algn="l" defTabSz="1219169" rtl="0" fontAlgn="auto" latinLnBrk="0" hangingPunct="0">
-                <a:lnSpc>
-                  <a:spcPct val="90000"/>
-                </a:lnSpc>
-                <a:spcBef>
-                  <a:spcPts val="2250"/>
-                </a:spcBef>
-                <a:spcAft>
-                  <a:spcPts val="0"/>
-                </a:spcAft>
-                <a:buClrTx/>
-                <a:buSzTx/>
-                <a:buFontTx/>
-                <a:buNone/>
-                <a:tabLst/>
-                <a:defRPr kumimoji="0" sz="2400" b="0" i="0" u="none" strike="noStrike" cap="none" spc="0" normalizeH="0" baseline="0">
-                  <a:ln>
-                    <a:noFill/>
-                  </a:ln>
-                  <a:solidFill>
-                    <a:srgbClr val="000000"/>
-                  </a:solidFill>
-                  <a:effectLst/>
-                  <a:uFillTx/>
-                  <a:latin typeface="+mn-lt"/>
-                  <a:ea typeface="+mn-ea"/>
-                  <a:cs typeface="+mn-cs"/>
-                  <a:sym typeface="Helvetica Neue"/>
-                </a:defRPr>
-              </a:lvl6pPr>
-              <a:lvl7pPr marL="0" marR="0" indent="0" algn="l" defTabSz="1219169" rtl="0" fontAlgn="auto" latinLnBrk="0" hangingPunct="0">
-                <a:lnSpc>
-                  <a:spcPct val="90000"/>
-                </a:lnSpc>
-                <a:spcBef>
-                  <a:spcPts val="2250"/>
-                </a:spcBef>
-                <a:spcAft>
-                  <a:spcPts val="0"/>
-                </a:spcAft>
-                <a:buClrTx/>
-                <a:buSzTx/>
-                <a:buFontTx/>
-                <a:buNone/>
-                <a:tabLst/>
-                <a:defRPr kumimoji="0" sz="2400" b="0" i="0" u="none" strike="noStrike" cap="none" spc="0" normalizeH="0" baseline="0">
-                  <a:ln>
-                    <a:noFill/>
-                  </a:ln>
-                  <a:solidFill>
-                    <a:srgbClr val="000000"/>
-                  </a:solidFill>
-                  <a:effectLst/>
-                  <a:uFillTx/>
-                  <a:latin typeface="+mn-lt"/>
-                  <a:ea typeface="+mn-ea"/>
-                  <a:cs typeface="+mn-cs"/>
-                  <a:sym typeface="Helvetica Neue"/>
-                </a:defRPr>
-              </a:lvl7pPr>
-              <a:lvl8pPr marL="0" marR="0" indent="0" algn="l" defTabSz="1219169" rtl="0" fontAlgn="auto" latinLnBrk="0" hangingPunct="0">
-                <a:lnSpc>
-                  <a:spcPct val="90000"/>
-                </a:lnSpc>
-                <a:spcBef>
-                  <a:spcPts val="2250"/>
-                </a:spcBef>
-                <a:spcAft>
-                  <a:spcPts val="0"/>
-                </a:spcAft>
-                <a:buClrTx/>
-                <a:buSzTx/>
-                <a:buFontTx/>
-                <a:buNone/>
-                <a:tabLst/>
-                <a:defRPr kumimoji="0" sz="2400" b="0" i="0" u="none" strike="noStrike" cap="none" spc="0" normalizeH="0" baseline="0">
-                  <a:ln>
-                    <a:noFill/>
-                  </a:ln>
-                  <a:solidFill>
-                    <a:srgbClr val="000000"/>
-                  </a:solidFill>
-                  <a:effectLst/>
-                  <a:uFillTx/>
-                  <a:latin typeface="+mn-lt"/>
-                  <a:ea typeface="+mn-ea"/>
-                  <a:cs typeface="+mn-cs"/>
-                  <a:sym typeface="Helvetica Neue"/>
-                </a:defRPr>
-              </a:lvl8pPr>
-              <a:lvl9pPr marL="0" marR="0" indent="0" algn="l" defTabSz="1219169" rtl="0" fontAlgn="auto" latinLnBrk="0" hangingPunct="0">
-                <a:lnSpc>
-                  <a:spcPct val="90000"/>
-                </a:lnSpc>
-                <a:spcBef>
-                  <a:spcPts val="2250"/>
-                </a:spcBef>
-                <a:spcAft>
-                  <a:spcPts val="0"/>
-                </a:spcAft>
-                <a:buClrTx/>
-                <a:buSzTx/>
-                <a:buFontTx/>
-                <a:buNone/>
-                <a:tabLst/>
-                <a:defRPr kumimoji="0" sz="2400" b="0" i="0" u="none" strike="noStrike" cap="none" spc="0" normalizeH="0" baseline="0">
-                  <a:ln>
-                    <a:noFill/>
-                  </a:ln>
-                  <a:solidFill>
-                    <a:srgbClr val="000000"/>
-                  </a:solidFill>
-                  <a:effectLst/>
-                  <a:uFillTx/>
-                  <a:latin typeface="+mn-lt"/>
-                  <a:ea typeface="+mn-ea"/>
-                  <a:cs typeface="+mn-cs"/>
-                  <a:sym typeface="Helvetica Neue"/>
-                </a:defRPr>
-              </a:lvl9pPr>
-            </a:lstStyle>
-            <a:p>
-              <a:pPr marL="0" marR="0" lvl="0" indent="0" algn="ctr" defTabSz="914400" rtl="0" eaLnBrk="1" fontAlgn="auto" latinLnBrk="0" hangingPunct="1">
-                <a:lnSpc>
-                  <a:spcPct val="100000"/>
-                </a:lnSpc>
-                <a:spcBef>
-                  <a:spcPts val="0"/>
-                </a:spcBef>
-                <a:spcAft>
-                  <a:spcPts val="0"/>
-                </a:spcAft>
-                <a:buClrTx/>
-                <a:buSzTx/>
-                <a:buFontTx/>
-                <a:buNone/>
-                <a:tabLst/>
-                <a:defRPr/>
-              </a:pPr>
-              <a:r>
-                <a:rPr kumimoji="0" lang="en-US" sz="700" b="1" i="0" u="none" strike="noStrike" kern="1200" cap="none" spc="0" normalizeH="0" baseline="0" noProof="0">
-                  <a:ln>
-                    <a:noFill/>
-                  </a:ln>
-                  <a:solidFill>
-                    <a:schemeClr val="bg1"/>
-                  </a:solidFill>
-                  <a:effectLst/>
-                  <a:uLnTx/>
-                  <a:uFillTx/>
-                  <a:latin typeface="Intel Clear"/>
-                </a:rPr>
-                <a:t>Power-On </a:t>
-              </a:r>
-            </a:p>
-            <a:p>
-              <a:pPr marL="0" marR="0" lvl="0" indent="0" algn="ctr" defTabSz="914400" rtl="0" eaLnBrk="1" fontAlgn="auto" latinLnBrk="0" hangingPunct="1">
-                <a:lnSpc>
-                  <a:spcPct val="100000"/>
-                </a:lnSpc>
-                <a:spcBef>
-                  <a:spcPts val="0"/>
-                </a:spcBef>
-                <a:spcAft>
-                  <a:spcPts val="0"/>
-                </a:spcAft>
-                <a:buClrTx/>
-                <a:buSzTx/>
-                <a:buFontTx/>
-                <a:buNone/>
-                <a:tabLst/>
-                <a:defRPr/>
-              </a:pPr>
-              <a:r>
-                <a:rPr kumimoji="0" lang="en-US" sz="700" b="1" i="0" u="none" strike="noStrike" kern="1200" cap="none" spc="0" normalizeH="0" baseline="0" noProof="0">
-                  <a:ln>
-                    <a:noFill/>
-                  </a:ln>
-                  <a:solidFill>
-                    <a:schemeClr val="bg1"/>
-                  </a:solidFill>
-                  <a:effectLst/>
-                  <a:uLnTx/>
-                  <a:uFillTx/>
-                  <a:latin typeface="Intel Clear"/>
-                </a:rPr>
-                <a:t>Entry</a:t>
-              </a:r>
-            </a:p>
-          </p:txBody>
-        </p:sp>
-        <p:sp>
-          <p:nvSpPr>
-            <p:cNvPr id="107" name="TextBox 56">
-              <a:extLst>
-                <a:ext uri="{FF2B5EF4-FFF2-40B4-BE49-F238E27FC236}">
-                  <a16:creationId xmlns:a16="http://schemas.microsoft.com/office/drawing/2014/main" id="{C9A3B56A-D2A0-C7EB-96DF-9CA71FEDA39D}"/>
-                </a:ext>
-              </a:extLst>
-            </p:cNvPr>
-            <p:cNvSpPr txBox="1"/>
-            <p:nvPr/>
-          </p:nvSpPr>
-          <p:spPr>
-            <a:xfrm>
-              <a:off x="1052186" y="992879"/>
-              <a:ext cx="300082" cy="218698"/>
-            </a:xfrm>
-            <a:prstGeom prst="rect">
-              <a:avLst/>
-            </a:prstGeom>
-            <a:noFill/>
-          </p:spPr>
-          <p:txBody>
-            <a:bodyPr wrap="none" rtlCol="0">
-              <a:spAutoFit/>
-            </a:bodyPr>
-            <a:lstStyle>
-              <a:defPPr marL="0" marR="0" indent="0" algn="l" defTabSz="457200" rtl="0" fontAlgn="auto" latinLnBrk="1" hangingPunct="0">
-                <a:lnSpc>
-                  <a:spcPct val="100000"/>
-                </a:lnSpc>
-                <a:spcBef>
-                  <a:spcPts val="0"/>
-                </a:spcBef>
-                <a:spcAft>
-                  <a:spcPts val="0"/>
-                </a:spcAft>
-                <a:buClrTx/>
-                <a:buSzTx/>
-                <a:buFontTx/>
-                <a:buNone/>
-                <a:tabLst/>
-                <a:defRPr kumimoji="0" sz="900" b="0" i="0" u="none" strike="noStrike" cap="none" spc="0" normalizeH="0" baseline="0">
-                  <a:ln>
-                    <a:noFill/>
-                  </a:ln>
-                  <a:solidFill>
-                    <a:srgbClr val="000000"/>
-                  </a:solidFill>
-                  <a:effectLst/>
-                  <a:uFillTx/>
-                </a:defRPr>
-              </a:defPPr>
-              <a:lvl1pPr marL="0" marR="0" indent="0" algn="l" defTabSz="1219169" rtl="0" fontAlgn="auto" latinLnBrk="0" hangingPunct="0">
-                <a:lnSpc>
-                  <a:spcPct val="90000"/>
-                </a:lnSpc>
-                <a:spcBef>
-                  <a:spcPts val="2250"/>
-                </a:spcBef>
-                <a:spcAft>
-                  <a:spcPts val="0"/>
-                </a:spcAft>
-                <a:buClrTx/>
-                <a:buSzTx/>
-                <a:buFontTx/>
-                <a:buNone/>
-                <a:tabLst/>
-                <a:defRPr kumimoji="0" sz="2400" b="0" i="0" u="none" strike="noStrike" cap="none" spc="0" normalizeH="0" baseline="0">
-                  <a:ln>
-                    <a:noFill/>
-                  </a:ln>
-                  <a:solidFill>
-                    <a:srgbClr val="000000"/>
-                  </a:solidFill>
-                  <a:effectLst/>
-                  <a:uFillTx/>
-                  <a:latin typeface="+mn-lt"/>
-                  <a:ea typeface="+mn-ea"/>
-                  <a:cs typeface="+mn-cs"/>
-                  <a:sym typeface="Helvetica Neue"/>
-                </a:defRPr>
-              </a:lvl1pPr>
-              <a:lvl2pPr marL="0" marR="0" indent="0" algn="l" defTabSz="1219169" rtl="0" fontAlgn="auto" latinLnBrk="0" hangingPunct="0">
-                <a:lnSpc>
-                  <a:spcPct val="90000"/>
-                </a:lnSpc>
-                <a:spcBef>
-                  <a:spcPts val="2250"/>
-                </a:spcBef>
-                <a:spcAft>
-                  <a:spcPts val="0"/>
-                </a:spcAft>
-                <a:buClrTx/>
-                <a:buSzTx/>
-                <a:buFontTx/>
-                <a:buNone/>
-                <a:tabLst/>
-                <a:defRPr kumimoji="0" sz="2400" b="0" i="0" u="none" strike="noStrike" cap="none" spc="0" normalizeH="0" baseline="0">
-                  <a:ln>
-                    <a:noFill/>
-                  </a:ln>
-                  <a:solidFill>
-                    <a:srgbClr val="000000"/>
-                  </a:solidFill>
-                  <a:effectLst/>
-                  <a:uFillTx/>
-                  <a:latin typeface="+mn-lt"/>
-                  <a:ea typeface="+mn-ea"/>
-                  <a:cs typeface="+mn-cs"/>
-                  <a:sym typeface="Helvetica Neue"/>
-                </a:defRPr>
-              </a:lvl2pPr>
-              <a:lvl3pPr marL="0" marR="0" indent="0" algn="l" defTabSz="1219169" rtl="0" fontAlgn="auto" latinLnBrk="0" hangingPunct="0">
-                <a:lnSpc>
-                  <a:spcPct val="90000"/>
-                </a:lnSpc>
-                <a:spcBef>
-                  <a:spcPts val="2250"/>
-                </a:spcBef>
-                <a:spcAft>
-                  <a:spcPts val="0"/>
-                </a:spcAft>
-                <a:buClrTx/>
-                <a:buSzTx/>
-                <a:buFontTx/>
-                <a:buNone/>
-                <a:tabLst/>
-                <a:defRPr kumimoji="0" sz="2400" b="0" i="0" u="none" strike="noStrike" cap="none" spc="0" normalizeH="0" baseline="0">
-                  <a:ln>
-                    <a:noFill/>
-                  </a:ln>
-                  <a:solidFill>
-                    <a:srgbClr val="000000"/>
-                  </a:solidFill>
-                  <a:effectLst/>
-                  <a:uFillTx/>
-                  <a:latin typeface="+mn-lt"/>
-                  <a:ea typeface="+mn-ea"/>
-                  <a:cs typeface="+mn-cs"/>
-                  <a:sym typeface="Helvetica Neue"/>
-                </a:defRPr>
-              </a:lvl3pPr>
-              <a:lvl4pPr marL="0" marR="0" indent="0" algn="l" defTabSz="1219169" rtl="0" fontAlgn="auto" latinLnBrk="0" hangingPunct="0">
-                <a:lnSpc>
-                  <a:spcPct val="90000"/>
-                </a:lnSpc>
-                <a:spcBef>
-                  <a:spcPts val="2250"/>
-                </a:spcBef>
-                <a:spcAft>
-                  <a:spcPts val="0"/>
-                </a:spcAft>
-                <a:buClrTx/>
-                <a:buSzTx/>
-                <a:buFontTx/>
-                <a:buNone/>
-                <a:tabLst/>
-                <a:defRPr kumimoji="0" sz="2400" b="0" i="0" u="none" strike="noStrike" cap="none" spc="0" normalizeH="0" baseline="0">
-                  <a:ln>
-                    <a:noFill/>
-                  </a:ln>
-                  <a:solidFill>
-                    <a:srgbClr val="000000"/>
-                  </a:solidFill>
-                  <a:effectLst/>
-                  <a:uFillTx/>
-                  <a:latin typeface="+mn-lt"/>
-                  <a:ea typeface="+mn-ea"/>
-                  <a:cs typeface="+mn-cs"/>
-                  <a:sym typeface="Helvetica Neue"/>
-                </a:defRPr>
-              </a:lvl4pPr>
-              <a:lvl5pPr marL="0" marR="0" indent="0" algn="l" defTabSz="1219169" rtl="0" fontAlgn="auto" latinLnBrk="0" hangingPunct="0">
-                <a:lnSpc>
-                  <a:spcPct val="90000"/>
-                </a:lnSpc>
-                <a:spcBef>
-                  <a:spcPts val="2250"/>
-                </a:spcBef>
-                <a:spcAft>
-                  <a:spcPts val="0"/>
-                </a:spcAft>
-                <a:buClrTx/>
-                <a:buSzTx/>
-                <a:buFontTx/>
-                <a:buNone/>
-                <a:tabLst/>
-                <a:defRPr kumimoji="0" sz="2400" b="0" i="0" u="none" strike="noStrike" cap="none" spc="0" normalizeH="0" baseline="0">
-                  <a:ln>
-                    <a:noFill/>
-                  </a:ln>
-                  <a:solidFill>
-                    <a:srgbClr val="000000"/>
-                  </a:solidFill>
-                  <a:effectLst/>
-                  <a:uFillTx/>
-                  <a:latin typeface="+mn-lt"/>
-                  <a:ea typeface="+mn-ea"/>
-                  <a:cs typeface="+mn-cs"/>
-                  <a:sym typeface="Helvetica Neue"/>
-                </a:defRPr>
-              </a:lvl5pPr>
-              <a:lvl6pPr marL="0" marR="0" indent="0" algn="l" defTabSz="1219169" rtl="0" fontAlgn="auto" latinLnBrk="0" hangingPunct="0">
-                <a:lnSpc>
-                  <a:spcPct val="90000"/>
-                </a:lnSpc>
-                <a:spcBef>
-                  <a:spcPts val="2250"/>
-                </a:spcBef>
-                <a:spcAft>
-                  <a:spcPts val="0"/>
-                </a:spcAft>
-                <a:buClrTx/>
-                <a:buSzTx/>
-                <a:buFontTx/>
-                <a:buNone/>
-                <a:tabLst/>
-                <a:defRPr kumimoji="0" sz="2400" b="0" i="0" u="none" strike="noStrike" cap="none" spc="0" normalizeH="0" baseline="0">
-                  <a:ln>
-                    <a:noFill/>
-                  </a:ln>
-                  <a:solidFill>
-                    <a:srgbClr val="000000"/>
-                  </a:solidFill>
-                  <a:effectLst/>
-                  <a:uFillTx/>
-                  <a:latin typeface="+mn-lt"/>
-                  <a:ea typeface="+mn-ea"/>
-                  <a:cs typeface="+mn-cs"/>
-                  <a:sym typeface="Helvetica Neue"/>
-                </a:defRPr>
-              </a:lvl6pPr>
-              <a:lvl7pPr marL="0" marR="0" indent="0" algn="l" defTabSz="1219169" rtl="0" fontAlgn="auto" latinLnBrk="0" hangingPunct="0">
-                <a:lnSpc>
-                  <a:spcPct val="90000"/>
-                </a:lnSpc>
-                <a:spcBef>
-                  <a:spcPts val="2250"/>
-                </a:spcBef>
-                <a:spcAft>
-                  <a:spcPts val="0"/>
-                </a:spcAft>
-                <a:buClrTx/>
-                <a:buSzTx/>
-                <a:buFontTx/>
-                <a:buNone/>
-                <a:tabLst/>
-                <a:defRPr kumimoji="0" sz="2400" b="0" i="0" u="none" strike="noStrike" cap="none" spc="0" normalizeH="0" baseline="0">
-                  <a:ln>
-                    <a:noFill/>
-                  </a:ln>
-                  <a:solidFill>
-                    <a:srgbClr val="000000"/>
-                  </a:solidFill>
-                  <a:effectLst/>
-                  <a:uFillTx/>
-                  <a:latin typeface="+mn-lt"/>
-                  <a:ea typeface="+mn-ea"/>
-                  <a:cs typeface="+mn-cs"/>
-                  <a:sym typeface="Helvetica Neue"/>
-                </a:defRPr>
-              </a:lvl7pPr>
-              <a:lvl8pPr marL="0" marR="0" indent="0" algn="l" defTabSz="1219169" rtl="0" fontAlgn="auto" latinLnBrk="0" hangingPunct="0">
-                <a:lnSpc>
-                  <a:spcPct val="90000"/>
-                </a:lnSpc>
-                <a:spcBef>
-                  <a:spcPts val="2250"/>
-                </a:spcBef>
-                <a:spcAft>
-                  <a:spcPts val="0"/>
-                </a:spcAft>
-                <a:buClrTx/>
-                <a:buSzTx/>
-                <a:buFontTx/>
-                <a:buNone/>
-                <a:tabLst/>
-                <a:defRPr kumimoji="0" sz="2400" b="0" i="0" u="none" strike="noStrike" cap="none" spc="0" normalizeH="0" baseline="0">
-                  <a:ln>
-                    <a:noFill/>
-                  </a:ln>
-                  <a:solidFill>
-                    <a:srgbClr val="000000"/>
-                  </a:solidFill>
-                  <a:effectLst/>
-                  <a:uFillTx/>
-                  <a:latin typeface="+mn-lt"/>
-                  <a:ea typeface="+mn-ea"/>
-                  <a:cs typeface="+mn-cs"/>
-                  <a:sym typeface="Helvetica Neue"/>
-                </a:defRPr>
-              </a:lvl8pPr>
-              <a:lvl9pPr marL="0" marR="0" indent="0" algn="l" defTabSz="1219169" rtl="0" fontAlgn="auto" latinLnBrk="0" hangingPunct="0">
-                <a:lnSpc>
-                  <a:spcPct val="90000"/>
-                </a:lnSpc>
-                <a:spcBef>
-                  <a:spcPts val="2250"/>
-                </a:spcBef>
-                <a:spcAft>
-                  <a:spcPts val="0"/>
-                </a:spcAft>
-                <a:buClrTx/>
-                <a:buSzTx/>
-                <a:buFontTx/>
-                <a:buNone/>
-                <a:tabLst/>
-                <a:defRPr kumimoji="0" sz="2400" b="0" i="0" u="none" strike="noStrike" cap="none" spc="0" normalizeH="0" baseline="0">
-                  <a:ln>
-                    <a:noFill/>
-                  </a:ln>
-                  <a:solidFill>
-                    <a:srgbClr val="000000"/>
-                  </a:solidFill>
-                  <a:effectLst/>
-                  <a:uFillTx/>
-                  <a:latin typeface="+mn-lt"/>
-                  <a:ea typeface="+mn-ea"/>
-                  <a:cs typeface="+mn-cs"/>
-                  <a:sym typeface="Helvetica Neue"/>
-                </a:defRPr>
-              </a:lvl9pPr>
-            </a:lstStyle>
-            <a:p>
-              <a:pPr marL="0" marR="0" lvl="0" indent="0" algn="ctr" defTabSz="914400" rtl="0" eaLnBrk="1" fontAlgn="auto" latinLnBrk="0" hangingPunct="1">
-                <a:lnSpc>
-                  <a:spcPct val="100000"/>
-                </a:lnSpc>
-                <a:spcBef>
-                  <a:spcPts val="0"/>
-                </a:spcBef>
-                <a:spcAft>
-                  <a:spcPts val="0"/>
-                </a:spcAft>
-                <a:buClrTx/>
-                <a:buSzTx/>
-                <a:buFontTx/>
-                <a:buNone/>
-                <a:tabLst/>
-                <a:defRPr/>
-              </a:pPr>
-              <a:r>
-                <a:rPr kumimoji="0" lang="en-US" sz="700" b="1" i="0" u="none" strike="noStrike" kern="1200" cap="none" spc="0" normalizeH="0" baseline="0" noProof="0">
-                  <a:ln>
-                    <a:noFill/>
-                  </a:ln>
-                  <a:solidFill>
-                    <a:schemeClr val="bg1"/>
-                  </a:solidFill>
-                  <a:effectLst/>
-                  <a:uLnTx/>
-                  <a:uFillTx/>
-                  <a:latin typeface="Intel Clear"/>
-                </a:rPr>
-                <a:t>PK</a:t>
-              </a:r>
-            </a:p>
-          </p:txBody>
-        </p:sp>
-        <p:sp>
-          <p:nvSpPr>
-            <p:cNvPr id="108" name="TextBox 57">
-              <a:extLst>
-                <a:ext uri="{FF2B5EF4-FFF2-40B4-BE49-F238E27FC236}">
-                  <a16:creationId xmlns:a16="http://schemas.microsoft.com/office/drawing/2014/main" id="{AFF34935-FFA6-38E4-1D36-1E060827DD8A}"/>
-                </a:ext>
-              </a:extLst>
-            </p:cNvPr>
-            <p:cNvSpPr txBox="1"/>
-            <p:nvPr/>
-          </p:nvSpPr>
-          <p:spPr>
-            <a:xfrm>
-              <a:off x="7396655" y="995043"/>
-              <a:ext cx="923986" cy="336458"/>
-            </a:xfrm>
-            <a:prstGeom prst="rect">
-              <a:avLst/>
-            </a:prstGeom>
-            <a:noFill/>
-          </p:spPr>
-          <p:txBody>
-            <a:bodyPr wrap="square" rtlCol="0">
-              <a:spAutoFit/>
-            </a:bodyPr>
-            <a:lstStyle>
-              <a:defPPr marL="0" marR="0" indent="0" algn="l" defTabSz="457200" rtl="0" fontAlgn="auto" latinLnBrk="1" hangingPunct="0">
-                <a:lnSpc>
-                  <a:spcPct val="100000"/>
-                </a:lnSpc>
-                <a:spcBef>
-                  <a:spcPts val="0"/>
-                </a:spcBef>
-                <a:spcAft>
-                  <a:spcPts val="0"/>
-                </a:spcAft>
-                <a:buClrTx/>
-                <a:buSzTx/>
-                <a:buFontTx/>
-                <a:buNone/>
-                <a:tabLst/>
-                <a:defRPr kumimoji="0" sz="900" b="0" i="0" u="none" strike="noStrike" cap="none" spc="0" normalizeH="0" baseline="0">
-                  <a:ln>
-                    <a:noFill/>
-                  </a:ln>
-                  <a:solidFill>
-                    <a:srgbClr val="000000"/>
-                  </a:solidFill>
-                  <a:effectLst/>
-                  <a:uFillTx/>
-                </a:defRPr>
-              </a:defPPr>
-              <a:lvl1pPr marL="0" marR="0" indent="0" algn="l" defTabSz="1219169" rtl="0" fontAlgn="auto" latinLnBrk="0" hangingPunct="0">
-                <a:lnSpc>
-                  <a:spcPct val="90000"/>
-                </a:lnSpc>
-                <a:spcBef>
-                  <a:spcPts val="2250"/>
-                </a:spcBef>
-                <a:spcAft>
-                  <a:spcPts val="0"/>
-                </a:spcAft>
-                <a:buClrTx/>
-                <a:buSzTx/>
-                <a:buFontTx/>
-                <a:buNone/>
-                <a:tabLst/>
-                <a:defRPr kumimoji="0" sz="2400" b="0" i="0" u="none" strike="noStrike" cap="none" spc="0" normalizeH="0" baseline="0">
-                  <a:ln>
-                    <a:noFill/>
-                  </a:ln>
-                  <a:solidFill>
-                    <a:srgbClr val="000000"/>
-                  </a:solidFill>
-                  <a:effectLst/>
-                  <a:uFillTx/>
-                  <a:latin typeface="+mn-lt"/>
-                  <a:ea typeface="+mn-ea"/>
-                  <a:cs typeface="+mn-cs"/>
-                  <a:sym typeface="Helvetica Neue"/>
-                </a:defRPr>
-              </a:lvl1pPr>
-              <a:lvl2pPr marL="0" marR="0" indent="0" algn="l" defTabSz="1219169" rtl="0" fontAlgn="auto" latinLnBrk="0" hangingPunct="0">
-                <a:lnSpc>
-                  <a:spcPct val="90000"/>
-                </a:lnSpc>
-                <a:spcBef>
-                  <a:spcPts val="2250"/>
-                </a:spcBef>
-                <a:spcAft>
-                  <a:spcPts val="0"/>
-                </a:spcAft>
-                <a:buClrTx/>
-                <a:buSzTx/>
-                <a:buFontTx/>
-                <a:buNone/>
-                <a:tabLst/>
-                <a:defRPr kumimoji="0" sz="2400" b="0" i="0" u="none" strike="noStrike" cap="none" spc="0" normalizeH="0" baseline="0">
-                  <a:ln>
-                    <a:noFill/>
-                  </a:ln>
-                  <a:solidFill>
-                    <a:srgbClr val="000000"/>
-                  </a:solidFill>
-                  <a:effectLst/>
-                  <a:uFillTx/>
-                  <a:latin typeface="+mn-lt"/>
-                  <a:ea typeface="+mn-ea"/>
-                  <a:cs typeface="+mn-cs"/>
-                  <a:sym typeface="Helvetica Neue"/>
-                </a:defRPr>
-              </a:lvl2pPr>
-              <a:lvl3pPr marL="0" marR="0" indent="0" algn="l" defTabSz="1219169" rtl="0" fontAlgn="auto" latinLnBrk="0" hangingPunct="0">
-                <a:lnSpc>
-                  <a:spcPct val="90000"/>
-                </a:lnSpc>
-                <a:spcBef>
-                  <a:spcPts val="2250"/>
-                </a:spcBef>
-                <a:spcAft>
-                  <a:spcPts val="0"/>
-                </a:spcAft>
-                <a:buClrTx/>
-                <a:buSzTx/>
-                <a:buFontTx/>
-                <a:buNone/>
-                <a:tabLst/>
-                <a:defRPr kumimoji="0" sz="2400" b="0" i="0" u="none" strike="noStrike" cap="none" spc="0" normalizeH="0" baseline="0">
-                  <a:ln>
-                    <a:noFill/>
-                  </a:ln>
-                  <a:solidFill>
-                    <a:srgbClr val="000000"/>
-                  </a:solidFill>
-                  <a:effectLst/>
-                  <a:uFillTx/>
-                  <a:latin typeface="+mn-lt"/>
-                  <a:ea typeface="+mn-ea"/>
-                  <a:cs typeface="+mn-cs"/>
-                  <a:sym typeface="Helvetica Neue"/>
-                </a:defRPr>
-              </a:lvl3pPr>
-              <a:lvl4pPr marL="0" marR="0" indent="0" algn="l" defTabSz="1219169" rtl="0" fontAlgn="auto" latinLnBrk="0" hangingPunct="0">
-                <a:lnSpc>
-                  <a:spcPct val="90000"/>
-                </a:lnSpc>
-                <a:spcBef>
-                  <a:spcPts val="2250"/>
-                </a:spcBef>
-                <a:spcAft>
-                  <a:spcPts val="0"/>
-                </a:spcAft>
-                <a:buClrTx/>
-                <a:buSzTx/>
-                <a:buFontTx/>
-                <a:buNone/>
-                <a:tabLst/>
-                <a:defRPr kumimoji="0" sz="2400" b="0" i="0" u="none" strike="noStrike" cap="none" spc="0" normalizeH="0" baseline="0">
-                  <a:ln>
-                    <a:noFill/>
-                  </a:ln>
-                  <a:solidFill>
-                    <a:srgbClr val="000000"/>
-                  </a:solidFill>
-                  <a:effectLst/>
-                  <a:uFillTx/>
-                  <a:latin typeface="+mn-lt"/>
-                  <a:ea typeface="+mn-ea"/>
-                  <a:cs typeface="+mn-cs"/>
-                  <a:sym typeface="Helvetica Neue"/>
-                </a:defRPr>
-              </a:lvl4pPr>
-              <a:lvl5pPr marL="0" marR="0" indent="0" algn="l" defTabSz="1219169" rtl="0" fontAlgn="auto" latinLnBrk="0" hangingPunct="0">
-                <a:lnSpc>
-                  <a:spcPct val="90000"/>
-                </a:lnSpc>
-                <a:spcBef>
-                  <a:spcPts val="2250"/>
-                </a:spcBef>
-                <a:spcAft>
-                  <a:spcPts val="0"/>
-                </a:spcAft>
-                <a:buClrTx/>
-                <a:buSzTx/>
-                <a:buFontTx/>
-                <a:buNone/>
-                <a:tabLst/>
-                <a:defRPr kumimoji="0" sz="2400" b="0" i="0" u="none" strike="noStrike" cap="none" spc="0" normalizeH="0" baseline="0">
-                  <a:ln>
-                    <a:noFill/>
-                  </a:ln>
-                  <a:solidFill>
-                    <a:srgbClr val="000000"/>
-                  </a:solidFill>
-                  <a:effectLst/>
-                  <a:uFillTx/>
-                  <a:latin typeface="+mn-lt"/>
-                  <a:ea typeface="+mn-ea"/>
-                  <a:cs typeface="+mn-cs"/>
-                  <a:sym typeface="Helvetica Neue"/>
-                </a:defRPr>
-              </a:lvl5pPr>
-              <a:lvl6pPr marL="0" marR="0" indent="0" algn="l" defTabSz="1219169" rtl="0" fontAlgn="auto" latinLnBrk="0" hangingPunct="0">
-                <a:lnSpc>
-                  <a:spcPct val="90000"/>
-                </a:lnSpc>
-                <a:spcBef>
-                  <a:spcPts val="2250"/>
-                </a:spcBef>
-                <a:spcAft>
-                  <a:spcPts val="0"/>
-                </a:spcAft>
-                <a:buClrTx/>
-                <a:buSzTx/>
-                <a:buFontTx/>
-                <a:buNone/>
-                <a:tabLst/>
-                <a:defRPr kumimoji="0" sz="2400" b="0" i="0" u="none" strike="noStrike" cap="none" spc="0" normalizeH="0" baseline="0">
-                  <a:ln>
-                    <a:noFill/>
-                  </a:ln>
-                  <a:solidFill>
-                    <a:srgbClr val="000000"/>
-                  </a:solidFill>
-                  <a:effectLst/>
-                  <a:uFillTx/>
-                  <a:latin typeface="+mn-lt"/>
-                  <a:ea typeface="+mn-ea"/>
-                  <a:cs typeface="+mn-cs"/>
-                  <a:sym typeface="Helvetica Neue"/>
-                </a:defRPr>
-              </a:lvl6pPr>
-              <a:lvl7pPr marL="0" marR="0" indent="0" algn="l" defTabSz="1219169" rtl="0" fontAlgn="auto" latinLnBrk="0" hangingPunct="0">
-                <a:lnSpc>
-                  <a:spcPct val="90000"/>
-                </a:lnSpc>
-                <a:spcBef>
-                  <a:spcPts val="2250"/>
-                </a:spcBef>
-                <a:spcAft>
-                  <a:spcPts val="0"/>
-                </a:spcAft>
-                <a:buClrTx/>
-                <a:buSzTx/>
-                <a:buFontTx/>
-                <a:buNone/>
-                <a:tabLst/>
-                <a:defRPr kumimoji="0" sz="2400" b="0" i="0" u="none" strike="noStrike" cap="none" spc="0" normalizeH="0" baseline="0">
-                  <a:ln>
-                    <a:noFill/>
-                  </a:ln>
-                  <a:solidFill>
-                    <a:srgbClr val="000000"/>
-                  </a:solidFill>
-                  <a:effectLst/>
-                  <a:uFillTx/>
-                  <a:latin typeface="+mn-lt"/>
-                  <a:ea typeface="+mn-ea"/>
-                  <a:cs typeface="+mn-cs"/>
-                  <a:sym typeface="Helvetica Neue"/>
-                </a:defRPr>
-              </a:lvl7pPr>
-              <a:lvl8pPr marL="0" marR="0" indent="0" algn="l" defTabSz="1219169" rtl="0" fontAlgn="auto" latinLnBrk="0" hangingPunct="0">
-                <a:lnSpc>
-                  <a:spcPct val="90000"/>
-                </a:lnSpc>
-                <a:spcBef>
-                  <a:spcPts val="2250"/>
-                </a:spcBef>
-                <a:spcAft>
-                  <a:spcPts val="0"/>
-                </a:spcAft>
-                <a:buClrTx/>
-                <a:buSzTx/>
-                <a:buFontTx/>
-                <a:buNone/>
-                <a:tabLst/>
-                <a:defRPr kumimoji="0" sz="2400" b="0" i="0" u="none" strike="noStrike" cap="none" spc="0" normalizeH="0" baseline="0">
-                  <a:ln>
-                    <a:noFill/>
-                  </a:ln>
-                  <a:solidFill>
-                    <a:srgbClr val="000000"/>
-                  </a:solidFill>
-                  <a:effectLst/>
-                  <a:uFillTx/>
-                  <a:latin typeface="+mn-lt"/>
-                  <a:ea typeface="+mn-ea"/>
-                  <a:cs typeface="+mn-cs"/>
-                  <a:sym typeface="Helvetica Neue"/>
-                </a:defRPr>
-              </a:lvl8pPr>
-              <a:lvl9pPr marL="0" marR="0" indent="0" algn="l" defTabSz="1219169" rtl="0" fontAlgn="auto" latinLnBrk="0" hangingPunct="0">
-                <a:lnSpc>
-                  <a:spcPct val="90000"/>
-                </a:lnSpc>
-                <a:spcBef>
-                  <a:spcPts val="2250"/>
-                </a:spcBef>
-                <a:spcAft>
-                  <a:spcPts val="0"/>
-                </a:spcAft>
-                <a:buClrTx/>
-                <a:buSzTx/>
-                <a:buFontTx/>
-                <a:buNone/>
-                <a:tabLst/>
-                <a:defRPr kumimoji="0" sz="2400" b="0" i="0" u="none" strike="noStrike" cap="none" spc="0" normalizeH="0" baseline="0">
-                  <a:ln>
-                    <a:noFill/>
-                  </a:ln>
-                  <a:solidFill>
-                    <a:srgbClr val="000000"/>
-                  </a:solidFill>
-                  <a:effectLst/>
-                  <a:uFillTx/>
-                  <a:latin typeface="+mn-lt"/>
-                  <a:ea typeface="+mn-ea"/>
-                  <a:cs typeface="+mn-cs"/>
-                  <a:sym typeface="Helvetica Neue"/>
-                </a:defRPr>
-              </a:lvl9pPr>
-            </a:lstStyle>
-            <a:p>
-              <a:pPr marL="0" marR="0" lvl="0" indent="0" algn="ctr" defTabSz="914400" rtl="0" eaLnBrk="1" fontAlgn="auto" latinLnBrk="0" hangingPunct="1">
-                <a:lnSpc>
-                  <a:spcPct val="100000"/>
-                </a:lnSpc>
-                <a:spcBef>
-                  <a:spcPts val="0"/>
-                </a:spcBef>
-                <a:spcAft>
-                  <a:spcPts val="0"/>
-                </a:spcAft>
-                <a:buClrTx/>
-                <a:buSzTx/>
-                <a:buFontTx/>
-                <a:buNone/>
-                <a:tabLst/>
-                <a:defRPr/>
-              </a:pPr>
-              <a:r>
-                <a:rPr kumimoji="0" lang="en-US" sz="700" b="1" i="0" u="none" strike="noStrike" kern="1200" cap="none" spc="0" normalizeH="0" baseline="0" noProof="0">
-                  <a:ln>
-                    <a:noFill/>
-                  </a:ln>
-                  <a:solidFill>
-                    <a:schemeClr val="bg1"/>
-                  </a:solidFill>
-                  <a:effectLst/>
-                  <a:uLnTx/>
-                  <a:uFillTx/>
-                  <a:latin typeface="Intel Clear"/>
-                </a:rPr>
-                <a:t>Volume </a:t>
-              </a:r>
-            </a:p>
-            <a:p>
-              <a:pPr marL="0" marR="0" lvl="0" indent="0" algn="ctr" defTabSz="914400" rtl="0" eaLnBrk="1" fontAlgn="auto" latinLnBrk="0" hangingPunct="1">
-                <a:lnSpc>
-                  <a:spcPct val="100000"/>
-                </a:lnSpc>
-                <a:spcBef>
-                  <a:spcPts val="0"/>
-                </a:spcBef>
-                <a:spcAft>
-                  <a:spcPts val="0"/>
-                </a:spcAft>
-                <a:buClrTx/>
-                <a:buSzTx/>
-                <a:buFontTx/>
-                <a:buNone/>
-                <a:tabLst/>
-                <a:defRPr/>
-              </a:pPr>
-              <a:r>
-                <a:rPr kumimoji="0" lang="en-US" sz="700" b="1" i="0" u="none" strike="noStrike" kern="1200" cap="none" spc="0" normalizeH="0" baseline="0" noProof="0">
-                  <a:ln>
-                    <a:noFill/>
-                  </a:ln>
-                  <a:solidFill>
-                    <a:schemeClr val="bg1"/>
-                  </a:solidFill>
-                  <a:effectLst/>
-                  <a:uLnTx/>
-                  <a:uFillTx/>
-                  <a:latin typeface="Intel Clear"/>
-                </a:rPr>
-                <a:t>Deploy Entry</a:t>
-              </a:r>
-            </a:p>
-          </p:txBody>
-        </p:sp>
-        <p:sp>
-          <p:nvSpPr>
-            <p:cNvPr id="109" name="TextBox 58">
-              <a:extLst>
-                <a:ext uri="{FF2B5EF4-FFF2-40B4-BE49-F238E27FC236}">
-                  <a16:creationId xmlns:a16="http://schemas.microsoft.com/office/drawing/2014/main" id="{DAFA12BB-D281-21A5-9ADE-C9A958435B08}"/>
-                </a:ext>
-              </a:extLst>
-            </p:cNvPr>
-            <p:cNvSpPr txBox="1"/>
-            <p:nvPr/>
-          </p:nvSpPr>
-          <p:spPr>
-            <a:xfrm>
-              <a:off x="9805272" y="924673"/>
-              <a:ext cx="494046" cy="336458"/>
-            </a:xfrm>
-            <a:prstGeom prst="rect">
-              <a:avLst/>
-            </a:prstGeom>
-            <a:noFill/>
-          </p:spPr>
-          <p:txBody>
-            <a:bodyPr wrap="none" rtlCol="0">
-              <a:spAutoFit/>
-            </a:bodyPr>
-            <a:lstStyle>
-              <a:defPPr marL="0" marR="0" indent="0" algn="l" defTabSz="457200" rtl="0" fontAlgn="auto" latinLnBrk="1" hangingPunct="0">
-                <a:lnSpc>
-                  <a:spcPct val="100000"/>
-                </a:lnSpc>
-                <a:spcBef>
-                  <a:spcPts val="0"/>
-                </a:spcBef>
-                <a:spcAft>
-                  <a:spcPts val="0"/>
-                </a:spcAft>
-                <a:buClrTx/>
-                <a:buSzTx/>
-                <a:buFontTx/>
-                <a:buNone/>
-                <a:tabLst/>
-                <a:defRPr kumimoji="0" sz="900" b="0" i="0" u="none" strike="noStrike" cap="none" spc="0" normalizeH="0" baseline="0">
-                  <a:ln>
-                    <a:noFill/>
-                  </a:ln>
-                  <a:solidFill>
-                    <a:srgbClr val="000000"/>
-                  </a:solidFill>
-                  <a:effectLst/>
-                  <a:uFillTx/>
-                </a:defRPr>
-              </a:defPPr>
-              <a:lvl1pPr marL="0" marR="0" indent="0" algn="l" defTabSz="1219169" rtl="0" fontAlgn="auto" latinLnBrk="0" hangingPunct="0">
-                <a:lnSpc>
-                  <a:spcPct val="90000"/>
-                </a:lnSpc>
-                <a:spcBef>
-                  <a:spcPts val="2250"/>
-                </a:spcBef>
-                <a:spcAft>
-                  <a:spcPts val="0"/>
-                </a:spcAft>
-                <a:buClrTx/>
-                <a:buSzTx/>
-                <a:buFontTx/>
-                <a:buNone/>
-                <a:tabLst/>
-                <a:defRPr kumimoji="0" sz="2400" b="0" i="0" u="none" strike="noStrike" cap="none" spc="0" normalizeH="0" baseline="0">
-                  <a:ln>
-                    <a:noFill/>
-                  </a:ln>
-                  <a:solidFill>
-                    <a:srgbClr val="000000"/>
-                  </a:solidFill>
-                  <a:effectLst/>
-                  <a:uFillTx/>
-                  <a:latin typeface="+mn-lt"/>
-                  <a:ea typeface="+mn-ea"/>
-                  <a:cs typeface="+mn-cs"/>
-                  <a:sym typeface="Helvetica Neue"/>
-                </a:defRPr>
-              </a:lvl1pPr>
-              <a:lvl2pPr marL="0" marR="0" indent="0" algn="l" defTabSz="1219169" rtl="0" fontAlgn="auto" latinLnBrk="0" hangingPunct="0">
-                <a:lnSpc>
-                  <a:spcPct val="90000"/>
-                </a:lnSpc>
-                <a:spcBef>
-                  <a:spcPts val="2250"/>
-                </a:spcBef>
-                <a:spcAft>
-                  <a:spcPts val="0"/>
-                </a:spcAft>
-                <a:buClrTx/>
-                <a:buSzTx/>
-                <a:buFontTx/>
-                <a:buNone/>
-                <a:tabLst/>
-                <a:defRPr kumimoji="0" sz="2400" b="0" i="0" u="none" strike="noStrike" cap="none" spc="0" normalizeH="0" baseline="0">
-                  <a:ln>
-                    <a:noFill/>
-                  </a:ln>
-                  <a:solidFill>
-                    <a:srgbClr val="000000"/>
-                  </a:solidFill>
-                  <a:effectLst/>
-                  <a:uFillTx/>
-                  <a:latin typeface="+mn-lt"/>
-                  <a:ea typeface="+mn-ea"/>
-                  <a:cs typeface="+mn-cs"/>
-                  <a:sym typeface="Helvetica Neue"/>
-                </a:defRPr>
-              </a:lvl2pPr>
-              <a:lvl3pPr marL="0" marR="0" indent="0" algn="l" defTabSz="1219169" rtl="0" fontAlgn="auto" latinLnBrk="0" hangingPunct="0">
-                <a:lnSpc>
-                  <a:spcPct val="90000"/>
-                </a:lnSpc>
-                <a:spcBef>
-                  <a:spcPts val="2250"/>
-                </a:spcBef>
-                <a:spcAft>
-                  <a:spcPts val="0"/>
-                </a:spcAft>
-                <a:buClrTx/>
-                <a:buSzTx/>
-                <a:buFontTx/>
-                <a:buNone/>
-                <a:tabLst/>
-                <a:defRPr kumimoji="0" sz="2400" b="0" i="0" u="none" strike="noStrike" cap="none" spc="0" normalizeH="0" baseline="0">
-                  <a:ln>
-                    <a:noFill/>
-                  </a:ln>
-                  <a:solidFill>
-                    <a:srgbClr val="000000"/>
-                  </a:solidFill>
-                  <a:effectLst/>
-                  <a:uFillTx/>
-                  <a:latin typeface="+mn-lt"/>
-                  <a:ea typeface="+mn-ea"/>
-                  <a:cs typeface="+mn-cs"/>
-                  <a:sym typeface="Helvetica Neue"/>
-                </a:defRPr>
-              </a:lvl3pPr>
-              <a:lvl4pPr marL="0" marR="0" indent="0" algn="l" defTabSz="1219169" rtl="0" fontAlgn="auto" latinLnBrk="0" hangingPunct="0">
-                <a:lnSpc>
-                  <a:spcPct val="90000"/>
-                </a:lnSpc>
-                <a:spcBef>
-                  <a:spcPts val="2250"/>
-                </a:spcBef>
-                <a:spcAft>
-                  <a:spcPts val="0"/>
-                </a:spcAft>
-                <a:buClrTx/>
-                <a:buSzTx/>
-                <a:buFontTx/>
-                <a:buNone/>
-                <a:tabLst/>
-                <a:defRPr kumimoji="0" sz="2400" b="0" i="0" u="none" strike="noStrike" cap="none" spc="0" normalizeH="0" baseline="0">
-                  <a:ln>
-                    <a:noFill/>
-                  </a:ln>
-                  <a:solidFill>
-                    <a:srgbClr val="000000"/>
-                  </a:solidFill>
-                  <a:effectLst/>
-                  <a:uFillTx/>
-                  <a:latin typeface="+mn-lt"/>
-                  <a:ea typeface="+mn-ea"/>
-                  <a:cs typeface="+mn-cs"/>
-                  <a:sym typeface="Helvetica Neue"/>
-                </a:defRPr>
-              </a:lvl4pPr>
-              <a:lvl5pPr marL="0" marR="0" indent="0" algn="l" defTabSz="1219169" rtl="0" fontAlgn="auto" latinLnBrk="0" hangingPunct="0">
-                <a:lnSpc>
-                  <a:spcPct val="90000"/>
-                </a:lnSpc>
-                <a:spcBef>
-                  <a:spcPts val="2250"/>
-                </a:spcBef>
-                <a:spcAft>
-                  <a:spcPts val="0"/>
-                </a:spcAft>
-                <a:buClrTx/>
-                <a:buSzTx/>
-                <a:buFontTx/>
-                <a:buNone/>
-                <a:tabLst/>
-                <a:defRPr kumimoji="0" sz="2400" b="0" i="0" u="none" strike="noStrike" cap="none" spc="0" normalizeH="0" baseline="0">
-                  <a:ln>
-                    <a:noFill/>
-                  </a:ln>
-                  <a:solidFill>
-                    <a:srgbClr val="000000"/>
-                  </a:solidFill>
-                  <a:effectLst/>
-                  <a:uFillTx/>
-                  <a:latin typeface="+mn-lt"/>
-                  <a:ea typeface="+mn-ea"/>
-                  <a:cs typeface="+mn-cs"/>
-                  <a:sym typeface="Helvetica Neue"/>
-                </a:defRPr>
-              </a:lvl5pPr>
-              <a:lvl6pPr marL="0" marR="0" indent="0" algn="l" defTabSz="1219169" rtl="0" fontAlgn="auto" latinLnBrk="0" hangingPunct="0">
-                <a:lnSpc>
-                  <a:spcPct val="90000"/>
-                </a:lnSpc>
-                <a:spcBef>
-                  <a:spcPts val="2250"/>
-                </a:spcBef>
-                <a:spcAft>
-                  <a:spcPts val="0"/>
-                </a:spcAft>
-                <a:buClrTx/>
-                <a:buSzTx/>
-                <a:buFontTx/>
-                <a:buNone/>
-                <a:tabLst/>
-                <a:defRPr kumimoji="0" sz="2400" b="0" i="0" u="none" strike="noStrike" cap="none" spc="0" normalizeH="0" baseline="0">
-                  <a:ln>
-                    <a:noFill/>
-                  </a:ln>
-                  <a:solidFill>
-                    <a:srgbClr val="000000"/>
-                  </a:solidFill>
-                  <a:effectLst/>
-                  <a:uFillTx/>
-                  <a:latin typeface="+mn-lt"/>
-                  <a:ea typeface="+mn-ea"/>
-                  <a:cs typeface="+mn-cs"/>
-                  <a:sym typeface="Helvetica Neue"/>
-                </a:defRPr>
-              </a:lvl6pPr>
-              <a:lvl7pPr marL="0" marR="0" indent="0" algn="l" defTabSz="1219169" rtl="0" fontAlgn="auto" latinLnBrk="0" hangingPunct="0">
-                <a:lnSpc>
-                  <a:spcPct val="90000"/>
-                </a:lnSpc>
-                <a:spcBef>
-                  <a:spcPts val="2250"/>
-                </a:spcBef>
-                <a:spcAft>
-                  <a:spcPts val="0"/>
-                </a:spcAft>
-                <a:buClrTx/>
-                <a:buSzTx/>
-                <a:buFontTx/>
-                <a:buNone/>
-                <a:tabLst/>
-                <a:defRPr kumimoji="0" sz="2400" b="0" i="0" u="none" strike="noStrike" cap="none" spc="0" normalizeH="0" baseline="0">
-                  <a:ln>
-                    <a:noFill/>
-                  </a:ln>
-                  <a:solidFill>
-                    <a:srgbClr val="000000"/>
-                  </a:solidFill>
-                  <a:effectLst/>
-                  <a:uFillTx/>
-                  <a:latin typeface="+mn-lt"/>
-                  <a:ea typeface="+mn-ea"/>
-                  <a:cs typeface="+mn-cs"/>
-                  <a:sym typeface="Helvetica Neue"/>
-                </a:defRPr>
-              </a:lvl7pPr>
-              <a:lvl8pPr marL="0" marR="0" indent="0" algn="l" defTabSz="1219169" rtl="0" fontAlgn="auto" latinLnBrk="0" hangingPunct="0">
-                <a:lnSpc>
-                  <a:spcPct val="90000"/>
-                </a:lnSpc>
-                <a:spcBef>
-                  <a:spcPts val="2250"/>
-                </a:spcBef>
-                <a:spcAft>
-                  <a:spcPts val="0"/>
-                </a:spcAft>
-                <a:buClrTx/>
-                <a:buSzTx/>
-                <a:buFontTx/>
-                <a:buNone/>
-                <a:tabLst/>
-                <a:defRPr kumimoji="0" sz="2400" b="0" i="0" u="none" strike="noStrike" cap="none" spc="0" normalizeH="0" baseline="0">
-                  <a:ln>
-                    <a:noFill/>
-                  </a:ln>
-                  <a:solidFill>
-                    <a:srgbClr val="000000"/>
-                  </a:solidFill>
-                  <a:effectLst/>
-                  <a:uFillTx/>
-                  <a:latin typeface="+mn-lt"/>
-                  <a:ea typeface="+mn-ea"/>
-                  <a:cs typeface="+mn-cs"/>
-                  <a:sym typeface="Helvetica Neue"/>
-                </a:defRPr>
-              </a:lvl8pPr>
-              <a:lvl9pPr marL="0" marR="0" indent="0" algn="l" defTabSz="1219169" rtl="0" fontAlgn="auto" latinLnBrk="0" hangingPunct="0">
-                <a:lnSpc>
-                  <a:spcPct val="90000"/>
-                </a:lnSpc>
-                <a:spcBef>
-                  <a:spcPts val="2250"/>
-                </a:spcBef>
-                <a:spcAft>
-                  <a:spcPts val="0"/>
-                </a:spcAft>
-                <a:buClrTx/>
-                <a:buSzTx/>
-                <a:buFontTx/>
-                <a:buNone/>
-                <a:tabLst/>
-                <a:defRPr kumimoji="0" sz="2400" b="0" i="0" u="none" strike="noStrike" cap="none" spc="0" normalizeH="0" baseline="0">
-                  <a:ln>
-                    <a:noFill/>
-                  </a:ln>
-                  <a:solidFill>
-                    <a:srgbClr val="000000"/>
-                  </a:solidFill>
-                  <a:effectLst/>
-                  <a:uFillTx/>
-                  <a:latin typeface="+mn-lt"/>
-                  <a:ea typeface="+mn-ea"/>
-                  <a:cs typeface="+mn-cs"/>
-                  <a:sym typeface="Helvetica Neue"/>
-                </a:defRPr>
-              </a:lvl9pPr>
-            </a:lstStyle>
-            <a:p>
-              <a:pPr marL="0" marR="0" lvl="0" indent="0" algn="ctr" defTabSz="914400" rtl="0" eaLnBrk="1" fontAlgn="auto" latinLnBrk="0" hangingPunct="1">
-                <a:lnSpc>
-                  <a:spcPct val="100000"/>
-                </a:lnSpc>
-                <a:spcBef>
-                  <a:spcPts val="0"/>
-                </a:spcBef>
-                <a:spcAft>
-                  <a:spcPts val="0"/>
-                </a:spcAft>
-                <a:buClrTx/>
-                <a:buSzTx/>
-                <a:buFontTx/>
-                <a:buNone/>
-                <a:tabLst/>
-                <a:defRPr/>
-              </a:pPr>
-              <a:endParaRPr kumimoji="0" lang="en-US" sz="700" b="1" i="0" u="none" strike="noStrike" kern="1200" cap="none" spc="0" normalizeH="0" baseline="0" noProof="0">
-                <a:ln>
-                  <a:noFill/>
-                </a:ln>
-                <a:solidFill>
-                  <a:schemeClr val="bg1"/>
-                </a:solidFill>
-                <a:effectLst/>
-                <a:uLnTx/>
-                <a:uFillTx/>
-                <a:latin typeface="Intel Clear"/>
-              </a:endParaRPr>
-            </a:p>
-            <a:p>
-              <a:pPr marL="0" marR="0" lvl="0" indent="0" algn="ctr" defTabSz="914400" rtl="0" eaLnBrk="1" fontAlgn="auto" latinLnBrk="0" hangingPunct="1">
-                <a:lnSpc>
-                  <a:spcPct val="100000"/>
-                </a:lnSpc>
-                <a:spcBef>
-                  <a:spcPts val="0"/>
-                </a:spcBef>
-                <a:spcAft>
-                  <a:spcPts val="0"/>
-                </a:spcAft>
-                <a:buClrTx/>
-                <a:buSzTx/>
-                <a:buFontTx/>
-                <a:buNone/>
-                <a:tabLst/>
-                <a:defRPr/>
-              </a:pPr>
-              <a:r>
-                <a:rPr kumimoji="0" lang="en-US" sz="700" b="1" i="0" u="none" strike="noStrike" kern="1200" cap="none" spc="0" normalizeH="0" baseline="0" noProof="0">
-                  <a:ln>
-                    <a:noFill/>
-                  </a:ln>
-                  <a:solidFill>
-                    <a:schemeClr val="bg1"/>
-                  </a:solidFill>
-                  <a:effectLst/>
-                  <a:uLnTx/>
-                  <a:uFillTx/>
-                  <a:latin typeface="Intel Clear"/>
-                </a:rPr>
-                <a:t>Sunset </a:t>
-              </a:r>
-            </a:p>
-          </p:txBody>
-        </p:sp>
-        <p:sp>
-          <p:nvSpPr>
-            <p:cNvPr id="110" name="TextBox 59">
-              <a:extLst>
-                <a:ext uri="{FF2B5EF4-FFF2-40B4-BE49-F238E27FC236}">
-                  <a16:creationId xmlns:a16="http://schemas.microsoft.com/office/drawing/2014/main" id="{ECF68FE8-CA12-0301-2555-FA86841FF3A1}"/>
-                </a:ext>
-              </a:extLst>
-            </p:cNvPr>
-            <p:cNvSpPr txBox="1"/>
-            <p:nvPr/>
-          </p:nvSpPr>
-          <p:spPr>
-            <a:xfrm>
-              <a:off x="1923300" y="994183"/>
-              <a:ext cx="296876" cy="218698"/>
-            </a:xfrm>
-            <a:prstGeom prst="rect">
-              <a:avLst/>
-            </a:prstGeom>
-            <a:noFill/>
-          </p:spPr>
-          <p:txBody>
-            <a:bodyPr wrap="none" lIns="91440" tIns="45720" rIns="91440" bIns="45720" rtlCol="0" anchor="t">
-              <a:spAutoFit/>
-            </a:bodyPr>
-            <a:lstStyle>
-              <a:defPPr marL="0" marR="0" indent="0" algn="l" defTabSz="457200" rtl="0" fontAlgn="auto" latinLnBrk="1" hangingPunct="0">
-                <a:lnSpc>
-                  <a:spcPct val="100000"/>
-                </a:lnSpc>
-                <a:spcBef>
-                  <a:spcPts val="0"/>
-                </a:spcBef>
-                <a:spcAft>
-                  <a:spcPts val="0"/>
-                </a:spcAft>
-                <a:buClrTx/>
-                <a:buSzTx/>
-                <a:buFontTx/>
-                <a:buNone/>
-                <a:tabLst/>
-                <a:defRPr kumimoji="0" sz="900" b="0" i="0" u="none" strike="noStrike" cap="none" spc="0" normalizeH="0" baseline="0">
-                  <a:ln>
-                    <a:noFill/>
-                  </a:ln>
-                  <a:solidFill>
-                    <a:srgbClr val="000000"/>
-                  </a:solidFill>
-                  <a:effectLst/>
-                  <a:uFillTx/>
-                </a:defRPr>
-              </a:defPPr>
-              <a:lvl1pPr marL="0" marR="0" indent="0" algn="l" defTabSz="1219169" rtl="0" fontAlgn="auto" latinLnBrk="0" hangingPunct="0">
-                <a:lnSpc>
-                  <a:spcPct val="90000"/>
-                </a:lnSpc>
-                <a:spcBef>
-                  <a:spcPts val="2250"/>
-                </a:spcBef>
-                <a:spcAft>
-                  <a:spcPts val="0"/>
-                </a:spcAft>
-                <a:buClrTx/>
-                <a:buSzTx/>
-                <a:buFontTx/>
-                <a:buNone/>
-                <a:tabLst/>
-                <a:defRPr kumimoji="0" sz="2400" b="0" i="0" u="none" strike="noStrike" cap="none" spc="0" normalizeH="0" baseline="0">
-                  <a:ln>
-                    <a:noFill/>
-                  </a:ln>
-                  <a:solidFill>
-                    <a:srgbClr val="000000"/>
-                  </a:solidFill>
-                  <a:effectLst/>
-                  <a:uFillTx/>
-                  <a:latin typeface="+mn-lt"/>
-                  <a:ea typeface="+mn-ea"/>
-                  <a:cs typeface="+mn-cs"/>
-                  <a:sym typeface="Helvetica Neue"/>
-                </a:defRPr>
-              </a:lvl1pPr>
-              <a:lvl2pPr marL="0" marR="0" indent="0" algn="l" defTabSz="1219169" rtl="0" fontAlgn="auto" latinLnBrk="0" hangingPunct="0">
-                <a:lnSpc>
-                  <a:spcPct val="90000"/>
-                </a:lnSpc>
-                <a:spcBef>
-                  <a:spcPts val="2250"/>
-                </a:spcBef>
-                <a:spcAft>
-                  <a:spcPts val="0"/>
-                </a:spcAft>
-                <a:buClrTx/>
-                <a:buSzTx/>
-                <a:buFontTx/>
-                <a:buNone/>
-                <a:tabLst/>
-                <a:defRPr kumimoji="0" sz="2400" b="0" i="0" u="none" strike="noStrike" cap="none" spc="0" normalizeH="0" baseline="0">
-                  <a:ln>
-                    <a:noFill/>
-                  </a:ln>
-                  <a:solidFill>
-                    <a:srgbClr val="000000"/>
-                  </a:solidFill>
-                  <a:effectLst/>
-                  <a:uFillTx/>
-                  <a:latin typeface="+mn-lt"/>
-                  <a:ea typeface="+mn-ea"/>
-                  <a:cs typeface="+mn-cs"/>
-                  <a:sym typeface="Helvetica Neue"/>
-                </a:defRPr>
-              </a:lvl2pPr>
-              <a:lvl3pPr marL="0" marR="0" indent="0" algn="l" defTabSz="1219169" rtl="0" fontAlgn="auto" latinLnBrk="0" hangingPunct="0">
-                <a:lnSpc>
-                  <a:spcPct val="90000"/>
-                </a:lnSpc>
-                <a:spcBef>
-                  <a:spcPts val="2250"/>
-                </a:spcBef>
-                <a:spcAft>
-                  <a:spcPts val="0"/>
-                </a:spcAft>
-                <a:buClrTx/>
-                <a:buSzTx/>
-                <a:buFontTx/>
-                <a:buNone/>
-                <a:tabLst/>
-                <a:defRPr kumimoji="0" sz="2400" b="0" i="0" u="none" strike="noStrike" cap="none" spc="0" normalizeH="0" baseline="0">
-                  <a:ln>
-                    <a:noFill/>
-                  </a:ln>
-                  <a:solidFill>
-                    <a:srgbClr val="000000"/>
-                  </a:solidFill>
-                  <a:effectLst/>
-                  <a:uFillTx/>
-                  <a:latin typeface="+mn-lt"/>
-                  <a:ea typeface="+mn-ea"/>
-                  <a:cs typeface="+mn-cs"/>
-                  <a:sym typeface="Helvetica Neue"/>
-                </a:defRPr>
-              </a:lvl3pPr>
-              <a:lvl4pPr marL="0" marR="0" indent="0" algn="l" defTabSz="1219169" rtl="0" fontAlgn="auto" latinLnBrk="0" hangingPunct="0">
-                <a:lnSpc>
-                  <a:spcPct val="90000"/>
-                </a:lnSpc>
-                <a:spcBef>
-                  <a:spcPts val="2250"/>
-                </a:spcBef>
-                <a:spcAft>
-                  <a:spcPts val="0"/>
-                </a:spcAft>
-                <a:buClrTx/>
-                <a:buSzTx/>
-                <a:buFontTx/>
-                <a:buNone/>
-                <a:tabLst/>
-                <a:defRPr kumimoji="0" sz="2400" b="0" i="0" u="none" strike="noStrike" cap="none" spc="0" normalizeH="0" baseline="0">
-                  <a:ln>
-                    <a:noFill/>
-                  </a:ln>
-                  <a:solidFill>
-                    <a:srgbClr val="000000"/>
-                  </a:solidFill>
-                  <a:effectLst/>
-                  <a:uFillTx/>
-                  <a:latin typeface="+mn-lt"/>
-                  <a:ea typeface="+mn-ea"/>
-                  <a:cs typeface="+mn-cs"/>
-                  <a:sym typeface="Helvetica Neue"/>
-                </a:defRPr>
-              </a:lvl4pPr>
-              <a:lvl5pPr marL="0" marR="0" indent="0" algn="l" defTabSz="1219169" rtl="0" fontAlgn="auto" latinLnBrk="0" hangingPunct="0">
-                <a:lnSpc>
-                  <a:spcPct val="90000"/>
-                </a:lnSpc>
-                <a:spcBef>
-                  <a:spcPts val="2250"/>
-                </a:spcBef>
-                <a:spcAft>
-                  <a:spcPts val="0"/>
-                </a:spcAft>
-                <a:buClrTx/>
-                <a:buSzTx/>
-                <a:buFontTx/>
-                <a:buNone/>
-                <a:tabLst/>
-                <a:defRPr kumimoji="0" sz="2400" b="0" i="0" u="none" strike="noStrike" cap="none" spc="0" normalizeH="0" baseline="0">
-                  <a:ln>
-                    <a:noFill/>
-                  </a:ln>
-                  <a:solidFill>
-                    <a:srgbClr val="000000"/>
-                  </a:solidFill>
-                  <a:effectLst/>
-                  <a:uFillTx/>
-                  <a:latin typeface="+mn-lt"/>
-                  <a:ea typeface="+mn-ea"/>
-                  <a:cs typeface="+mn-cs"/>
-                  <a:sym typeface="Helvetica Neue"/>
-                </a:defRPr>
-              </a:lvl5pPr>
-              <a:lvl6pPr marL="0" marR="0" indent="0" algn="l" defTabSz="1219169" rtl="0" fontAlgn="auto" latinLnBrk="0" hangingPunct="0">
-                <a:lnSpc>
-                  <a:spcPct val="90000"/>
-                </a:lnSpc>
-                <a:spcBef>
-                  <a:spcPts val="2250"/>
-                </a:spcBef>
-                <a:spcAft>
-                  <a:spcPts val="0"/>
-                </a:spcAft>
-                <a:buClrTx/>
-                <a:buSzTx/>
-                <a:buFontTx/>
-                <a:buNone/>
-                <a:tabLst/>
-                <a:defRPr kumimoji="0" sz="2400" b="0" i="0" u="none" strike="noStrike" cap="none" spc="0" normalizeH="0" baseline="0">
-                  <a:ln>
-                    <a:noFill/>
-                  </a:ln>
-                  <a:solidFill>
-                    <a:srgbClr val="000000"/>
-                  </a:solidFill>
-                  <a:effectLst/>
-                  <a:uFillTx/>
-                  <a:latin typeface="+mn-lt"/>
-                  <a:ea typeface="+mn-ea"/>
-                  <a:cs typeface="+mn-cs"/>
-                  <a:sym typeface="Helvetica Neue"/>
-                </a:defRPr>
-              </a:lvl6pPr>
-              <a:lvl7pPr marL="0" marR="0" indent="0" algn="l" defTabSz="1219169" rtl="0" fontAlgn="auto" latinLnBrk="0" hangingPunct="0">
-                <a:lnSpc>
-                  <a:spcPct val="90000"/>
-                </a:lnSpc>
-                <a:spcBef>
-                  <a:spcPts val="2250"/>
-                </a:spcBef>
-                <a:spcAft>
-                  <a:spcPts val="0"/>
-                </a:spcAft>
-                <a:buClrTx/>
-                <a:buSzTx/>
-                <a:buFontTx/>
-                <a:buNone/>
-                <a:tabLst/>
-                <a:defRPr kumimoji="0" sz="2400" b="0" i="0" u="none" strike="noStrike" cap="none" spc="0" normalizeH="0" baseline="0">
-                  <a:ln>
-                    <a:noFill/>
-                  </a:ln>
-                  <a:solidFill>
-                    <a:srgbClr val="000000"/>
-                  </a:solidFill>
-                  <a:effectLst/>
-                  <a:uFillTx/>
-                  <a:latin typeface="+mn-lt"/>
-                  <a:ea typeface="+mn-ea"/>
-                  <a:cs typeface="+mn-cs"/>
-                  <a:sym typeface="Helvetica Neue"/>
-                </a:defRPr>
-              </a:lvl7pPr>
-              <a:lvl8pPr marL="0" marR="0" indent="0" algn="l" defTabSz="1219169" rtl="0" fontAlgn="auto" latinLnBrk="0" hangingPunct="0">
-                <a:lnSpc>
-                  <a:spcPct val="90000"/>
-                </a:lnSpc>
-                <a:spcBef>
-                  <a:spcPts val="2250"/>
-                </a:spcBef>
-                <a:spcAft>
-                  <a:spcPts val="0"/>
-                </a:spcAft>
-                <a:buClrTx/>
-                <a:buSzTx/>
-                <a:buFontTx/>
-                <a:buNone/>
-                <a:tabLst/>
-                <a:defRPr kumimoji="0" sz="2400" b="0" i="0" u="none" strike="noStrike" cap="none" spc="0" normalizeH="0" baseline="0">
-                  <a:ln>
-                    <a:noFill/>
-                  </a:ln>
-                  <a:solidFill>
-                    <a:srgbClr val="000000"/>
-                  </a:solidFill>
-                  <a:effectLst/>
-                  <a:uFillTx/>
-                  <a:latin typeface="+mn-lt"/>
-                  <a:ea typeface="+mn-ea"/>
-                  <a:cs typeface="+mn-cs"/>
-                  <a:sym typeface="Helvetica Neue"/>
-                </a:defRPr>
-              </a:lvl8pPr>
-              <a:lvl9pPr marL="0" marR="0" indent="0" algn="l" defTabSz="1219169" rtl="0" fontAlgn="auto" latinLnBrk="0" hangingPunct="0">
-                <a:lnSpc>
-                  <a:spcPct val="90000"/>
-                </a:lnSpc>
-                <a:spcBef>
-                  <a:spcPts val="2250"/>
-                </a:spcBef>
-                <a:spcAft>
-                  <a:spcPts val="0"/>
-                </a:spcAft>
-                <a:buClrTx/>
-                <a:buSzTx/>
-                <a:buFontTx/>
-                <a:buNone/>
-                <a:tabLst/>
-                <a:defRPr kumimoji="0" sz="2400" b="0" i="0" u="none" strike="noStrike" cap="none" spc="0" normalizeH="0" baseline="0">
-                  <a:ln>
-                    <a:noFill/>
-                  </a:ln>
-                  <a:solidFill>
-                    <a:srgbClr val="000000"/>
-                  </a:solidFill>
-                  <a:effectLst/>
-                  <a:uFillTx/>
-                  <a:latin typeface="+mn-lt"/>
-                  <a:ea typeface="+mn-ea"/>
-                  <a:cs typeface="+mn-cs"/>
-                  <a:sym typeface="Helvetica Neue"/>
-                </a:defRPr>
-              </a:lvl9pPr>
-            </a:lstStyle>
-            <a:p>
-              <a:pPr marL="0" marR="0" lvl="0" indent="0" algn="ctr" defTabSz="914400" rtl="0" eaLnBrk="1" fontAlgn="auto" latinLnBrk="0" hangingPunct="1">
-                <a:lnSpc>
-                  <a:spcPct val="100000"/>
-                </a:lnSpc>
-                <a:spcBef>
-                  <a:spcPts val="0"/>
-                </a:spcBef>
-                <a:spcAft>
-                  <a:spcPts val="0"/>
-                </a:spcAft>
-                <a:buClrTx/>
-                <a:buSzTx/>
-                <a:buFontTx/>
-                <a:buNone/>
-                <a:tabLst/>
-                <a:defRPr/>
-              </a:pPr>
-              <a:r>
-                <a:rPr kumimoji="0" lang="en-US" sz="700" b="1" i="0" u="none" strike="noStrike" kern="1200" cap="none" spc="0" normalizeH="0" baseline="0" noProof="0">
-                  <a:ln>
-                    <a:noFill/>
-                  </a:ln>
-                  <a:solidFill>
-                    <a:schemeClr val="bg1"/>
-                  </a:solidFill>
-                  <a:effectLst/>
-                  <a:uLnTx/>
-                  <a:uFillTx/>
-                  <a:latin typeface="Intel Clear"/>
-                </a:rPr>
-                <a:t>PC</a:t>
-              </a:r>
-              <a:endParaRPr kumimoji="0" lang="en-US" sz="700" b="0" i="0" u="none" strike="noStrike" kern="1200" cap="none" spc="0" normalizeH="0" baseline="0" noProof="0">
-                <a:ln>
-                  <a:noFill/>
-                </a:ln>
-                <a:solidFill>
-                  <a:schemeClr val="bg1"/>
-                </a:solidFill>
-                <a:effectLst/>
-                <a:uLnTx/>
-                <a:uFillTx/>
-                <a:latin typeface="Intel Clear"/>
-              </a:endParaRPr>
-            </a:p>
-          </p:txBody>
-        </p:sp>
-        <p:sp>
-          <p:nvSpPr>
-            <p:cNvPr id="111" name="TextBox 60">
-              <a:extLst>
-                <a:ext uri="{FF2B5EF4-FFF2-40B4-BE49-F238E27FC236}">
-                  <a16:creationId xmlns:a16="http://schemas.microsoft.com/office/drawing/2014/main" id="{CEC7AA86-BA9E-F52B-E8A9-57AFFB8661E6}"/>
-                </a:ext>
-              </a:extLst>
-            </p:cNvPr>
-            <p:cNvSpPr txBox="1"/>
-            <p:nvPr/>
-          </p:nvSpPr>
-          <p:spPr>
-            <a:xfrm>
-              <a:off x="8871632" y="868329"/>
-              <a:ext cx="588623" cy="454217"/>
-            </a:xfrm>
-            <a:prstGeom prst="rect">
-              <a:avLst/>
-            </a:prstGeom>
-            <a:noFill/>
-          </p:spPr>
-          <p:txBody>
-            <a:bodyPr wrap="none" rtlCol="0">
-              <a:spAutoFit/>
-            </a:bodyPr>
-            <a:lstStyle>
-              <a:defPPr marL="0" marR="0" indent="0" algn="l" defTabSz="457200" rtl="0" fontAlgn="auto" latinLnBrk="1" hangingPunct="0">
-                <a:lnSpc>
-                  <a:spcPct val="100000"/>
-                </a:lnSpc>
-                <a:spcBef>
-                  <a:spcPts val="0"/>
-                </a:spcBef>
-                <a:spcAft>
-                  <a:spcPts val="0"/>
-                </a:spcAft>
-                <a:buClrTx/>
-                <a:buSzTx/>
-                <a:buFontTx/>
-                <a:buNone/>
-                <a:tabLst/>
-                <a:defRPr kumimoji="0" sz="900" b="0" i="0" u="none" strike="noStrike" cap="none" spc="0" normalizeH="0" baseline="0">
-                  <a:ln>
-                    <a:noFill/>
-                  </a:ln>
-                  <a:solidFill>
-                    <a:srgbClr val="000000"/>
-                  </a:solidFill>
-                  <a:effectLst/>
-                  <a:uFillTx/>
-                </a:defRPr>
-              </a:defPPr>
-              <a:lvl1pPr marL="0" marR="0" indent="0" algn="l" defTabSz="1219169" rtl="0" fontAlgn="auto" latinLnBrk="0" hangingPunct="0">
-                <a:lnSpc>
-                  <a:spcPct val="90000"/>
-                </a:lnSpc>
-                <a:spcBef>
-                  <a:spcPts val="2250"/>
-                </a:spcBef>
-                <a:spcAft>
-                  <a:spcPts val="0"/>
-                </a:spcAft>
-                <a:buClrTx/>
-                <a:buSzTx/>
-                <a:buFontTx/>
-                <a:buNone/>
-                <a:tabLst/>
-                <a:defRPr kumimoji="0" sz="2400" b="0" i="0" u="none" strike="noStrike" cap="none" spc="0" normalizeH="0" baseline="0">
-                  <a:ln>
-                    <a:noFill/>
-                  </a:ln>
-                  <a:solidFill>
-                    <a:srgbClr val="000000"/>
-                  </a:solidFill>
-                  <a:effectLst/>
-                  <a:uFillTx/>
-                  <a:latin typeface="+mn-lt"/>
-                  <a:ea typeface="+mn-ea"/>
-                  <a:cs typeface="+mn-cs"/>
-                  <a:sym typeface="Helvetica Neue"/>
-                </a:defRPr>
-              </a:lvl1pPr>
-              <a:lvl2pPr marL="0" marR="0" indent="0" algn="l" defTabSz="1219169" rtl="0" fontAlgn="auto" latinLnBrk="0" hangingPunct="0">
-                <a:lnSpc>
-                  <a:spcPct val="90000"/>
-                </a:lnSpc>
-                <a:spcBef>
-                  <a:spcPts val="2250"/>
-                </a:spcBef>
-                <a:spcAft>
-                  <a:spcPts val="0"/>
-                </a:spcAft>
-                <a:buClrTx/>
-                <a:buSzTx/>
-                <a:buFontTx/>
-                <a:buNone/>
-                <a:tabLst/>
-                <a:defRPr kumimoji="0" sz="2400" b="0" i="0" u="none" strike="noStrike" cap="none" spc="0" normalizeH="0" baseline="0">
-                  <a:ln>
-                    <a:noFill/>
-                  </a:ln>
-                  <a:solidFill>
-                    <a:srgbClr val="000000"/>
-                  </a:solidFill>
-                  <a:effectLst/>
-                  <a:uFillTx/>
-                  <a:latin typeface="+mn-lt"/>
-                  <a:ea typeface="+mn-ea"/>
-                  <a:cs typeface="+mn-cs"/>
-                  <a:sym typeface="Helvetica Neue"/>
-                </a:defRPr>
-              </a:lvl2pPr>
-              <a:lvl3pPr marL="0" marR="0" indent="0" algn="l" defTabSz="1219169" rtl="0" fontAlgn="auto" latinLnBrk="0" hangingPunct="0">
-                <a:lnSpc>
-                  <a:spcPct val="90000"/>
-                </a:lnSpc>
-                <a:spcBef>
-                  <a:spcPts val="2250"/>
-                </a:spcBef>
-                <a:spcAft>
-                  <a:spcPts val="0"/>
-                </a:spcAft>
-                <a:buClrTx/>
-                <a:buSzTx/>
-                <a:buFontTx/>
-                <a:buNone/>
-                <a:tabLst/>
-                <a:defRPr kumimoji="0" sz="2400" b="0" i="0" u="none" strike="noStrike" cap="none" spc="0" normalizeH="0" baseline="0">
-                  <a:ln>
-                    <a:noFill/>
-                  </a:ln>
-                  <a:solidFill>
-                    <a:srgbClr val="000000"/>
-                  </a:solidFill>
-                  <a:effectLst/>
-                  <a:uFillTx/>
-                  <a:latin typeface="+mn-lt"/>
-                  <a:ea typeface="+mn-ea"/>
-                  <a:cs typeface="+mn-cs"/>
-                  <a:sym typeface="Helvetica Neue"/>
-                </a:defRPr>
-              </a:lvl3pPr>
-              <a:lvl4pPr marL="0" marR="0" indent="0" algn="l" defTabSz="1219169" rtl="0" fontAlgn="auto" latinLnBrk="0" hangingPunct="0">
-                <a:lnSpc>
-                  <a:spcPct val="90000"/>
-                </a:lnSpc>
-                <a:spcBef>
-                  <a:spcPts val="2250"/>
-                </a:spcBef>
-                <a:spcAft>
-                  <a:spcPts val="0"/>
-                </a:spcAft>
-                <a:buClrTx/>
-                <a:buSzTx/>
-                <a:buFontTx/>
-                <a:buNone/>
-                <a:tabLst/>
-                <a:defRPr kumimoji="0" sz="2400" b="0" i="0" u="none" strike="noStrike" cap="none" spc="0" normalizeH="0" baseline="0">
-                  <a:ln>
-                    <a:noFill/>
-                  </a:ln>
-                  <a:solidFill>
-                    <a:srgbClr val="000000"/>
-                  </a:solidFill>
-                  <a:effectLst/>
-                  <a:uFillTx/>
-                  <a:latin typeface="+mn-lt"/>
-                  <a:ea typeface="+mn-ea"/>
-                  <a:cs typeface="+mn-cs"/>
-                  <a:sym typeface="Helvetica Neue"/>
-                </a:defRPr>
-              </a:lvl4pPr>
-              <a:lvl5pPr marL="0" marR="0" indent="0" algn="l" defTabSz="1219169" rtl="0" fontAlgn="auto" latinLnBrk="0" hangingPunct="0">
-                <a:lnSpc>
-                  <a:spcPct val="90000"/>
-                </a:lnSpc>
-                <a:spcBef>
-                  <a:spcPts val="2250"/>
-                </a:spcBef>
-                <a:spcAft>
-                  <a:spcPts val="0"/>
-                </a:spcAft>
-                <a:buClrTx/>
-                <a:buSzTx/>
-                <a:buFontTx/>
-                <a:buNone/>
-                <a:tabLst/>
-                <a:defRPr kumimoji="0" sz="2400" b="0" i="0" u="none" strike="noStrike" cap="none" spc="0" normalizeH="0" baseline="0">
-                  <a:ln>
-                    <a:noFill/>
-                  </a:ln>
-                  <a:solidFill>
-                    <a:srgbClr val="000000"/>
-                  </a:solidFill>
-                  <a:effectLst/>
-                  <a:uFillTx/>
-                  <a:latin typeface="+mn-lt"/>
-                  <a:ea typeface="+mn-ea"/>
-                  <a:cs typeface="+mn-cs"/>
-                  <a:sym typeface="Helvetica Neue"/>
-                </a:defRPr>
-              </a:lvl5pPr>
-              <a:lvl6pPr marL="0" marR="0" indent="0" algn="l" defTabSz="1219169" rtl="0" fontAlgn="auto" latinLnBrk="0" hangingPunct="0">
-                <a:lnSpc>
-                  <a:spcPct val="90000"/>
-                </a:lnSpc>
-                <a:spcBef>
-                  <a:spcPts val="2250"/>
-                </a:spcBef>
-                <a:spcAft>
-                  <a:spcPts val="0"/>
-                </a:spcAft>
-                <a:buClrTx/>
-                <a:buSzTx/>
-                <a:buFontTx/>
-                <a:buNone/>
-                <a:tabLst/>
-                <a:defRPr kumimoji="0" sz="2400" b="0" i="0" u="none" strike="noStrike" cap="none" spc="0" normalizeH="0" baseline="0">
-                  <a:ln>
-                    <a:noFill/>
-                  </a:ln>
-                  <a:solidFill>
-                    <a:srgbClr val="000000"/>
-                  </a:solidFill>
-                  <a:effectLst/>
-                  <a:uFillTx/>
-                  <a:latin typeface="+mn-lt"/>
-                  <a:ea typeface="+mn-ea"/>
-                  <a:cs typeface="+mn-cs"/>
-                  <a:sym typeface="Helvetica Neue"/>
-                </a:defRPr>
-              </a:lvl6pPr>
-              <a:lvl7pPr marL="0" marR="0" indent="0" algn="l" defTabSz="1219169" rtl="0" fontAlgn="auto" latinLnBrk="0" hangingPunct="0">
-                <a:lnSpc>
-                  <a:spcPct val="90000"/>
-                </a:lnSpc>
-                <a:spcBef>
-                  <a:spcPts val="2250"/>
-                </a:spcBef>
-                <a:spcAft>
-                  <a:spcPts val="0"/>
-                </a:spcAft>
-                <a:buClrTx/>
-                <a:buSzTx/>
-                <a:buFontTx/>
-                <a:buNone/>
-                <a:tabLst/>
-                <a:defRPr kumimoji="0" sz="2400" b="0" i="0" u="none" strike="noStrike" cap="none" spc="0" normalizeH="0" baseline="0">
-                  <a:ln>
-                    <a:noFill/>
-                  </a:ln>
-                  <a:solidFill>
-                    <a:srgbClr val="000000"/>
-                  </a:solidFill>
-                  <a:effectLst/>
-                  <a:uFillTx/>
-                  <a:latin typeface="+mn-lt"/>
-                  <a:ea typeface="+mn-ea"/>
-                  <a:cs typeface="+mn-cs"/>
-                  <a:sym typeface="Helvetica Neue"/>
-                </a:defRPr>
-              </a:lvl7pPr>
-              <a:lvl8pPr marL="0" marR="0" indent="0" algn="l" defTabSz="1219169" rtl="0" fontAlgn="auto" latinLnBrk="0" hangingPunct="0">
-                <a:lnSpc>
-                  <a:spcPct val="90000"/>
-                </a:lnSpc>
-                <a:spcBef>
-                  <a:spcPts val="2250"/>
-                </a:spcBef>
-                <a:spcAft>
-                  <a:spcPts val="0"/>
-                </a:spcAft>
-                <a:buClrTx/>
-                <a:buSzTx/>
-                <a:buFontTx/>
-                <a:buNone/>
-                <a:tabLst/>
-                <a:defRPr kumimoji="0" sz="2400" b="0" i="0" u="none" strike="noStrike" cap="none" spc="0" normalizeH="0" baseline="0">
-                  <a:ln>
-                    <a:noFill/>
-                  </a:ln>
-                  <a:solidFill>
-                    <a:srgbClr val="000000"/>
-                  </a:solidFill>
-                  <a:effectLst/>
-                  <a:uFillTx/>
-                  <a:latin typeface="+mn-lt"/>
-                  <a:ea typeface="+mn-ea"/>
-                  <a:cs typeface="+mn-cs"/>
-                  <a:sym typeface="Helvetica Neue"/>
-                </a:defRPr>
-              </a:lvl8pPr>
-              <a:lvl9pPr marL="0" marR="0" indent="0" algn="l" defTabSz="1219169" rtl="0" fontAlgn="auto" latinLnBrk="0" hangingPunct="0">
-                <a:lnSpc>
-                  <a:spcPct val="90000"/>
-                </a:lnSpc>
-                <a:spcBef>
-                  <a:spcPts val="2250"/>
-                </a:spcBef>
-                <a:spcAft>
-                  <a:spcPts val="0"/>
-                </a:spcAft>
-                <a:buClrTx/>
-                <a:buSzTx/>
-                <a:buFontTx/>
-                <a:buNone/>
-                <a:tabLst/>
-                <a:defRPr kumimoji="0" sz="2400" b="0" i="0" u="none" strike="noStrike" cap="none" spc="0" normalizeH="0" baseline="0">
-                  <a:ln>
-                    <a:noFill/>
-                  </a:ln>
-                  <a:solidFill>
-                    <a:srgbClr val="000000"/>
-                  </a:solidFill>
-                  <a:effectLst/>
-                  <a:uFillTx/>
-                  <a:latin typeface="+mn-lt"/>
-                  <a:ea typeface="+mn-ea"/>
-                  <a:cs typeface="+mn-cs"/>
-                  <a:sym typeface="Helvetica Neue"/>
-                </a:defRPr>
-              </a:lvl9pPr>
-            </a:lstStyle>
-            <a:p>
-              <a:pPr marL="0" marR="0" lvl="0" indent="0" algn="ctr" defTabSz="914400" rtl="0" eaLnBrk="1" fontAlgn="auto" latinLnBrk="0" hangingPunct="1">
-                <a:lnSpc>
-                  <a:spcPct val="100000"/>
-                </a:lnSpc>
-                <a:spcBef>
-                  <a:spcPts val="0"/>
-                </a:spcBef>
-                <a:spcAft>
-                  <a:spcPts val="0"/>
-                </a:spcAft>
-                <a:buClrTx/>
-                <a:buSzTx/>
-                <a:buFontTx/>
-                <a:buNone/>
-                <a:tabLst/>
-                <a:defRPr/>
-              </a:pPr>
-              <a:r>
-                <a:rPr kumimoji="0" lang="en-US" sz="700" b="1" i="0" u="none" strike="noStrike" kern="1200" cap="none" spc="0" normalizeH="0" baseline="0" noProof="0">
-                  <a:ln>
-                    <a:noFill/>
-                  </a:ln>
-                  <a:solidFill>
-                    <a:schemeClr val="bg1"/>
-                  </a:solidFill>
-                  <a:effectLst/>
-                  <a:uLnTx/>
-                  <a:uFillTx/>
-                  <a:latin typeface="Intel Clear"/>
-                </a:rPr>
-                <a:t> </a:t>
-              </a:r>
-            </a:p>
-            <a:p>
-              <a:pPr marL="0" marR="0" lvl="0" indent="0" algn="ctr" defTabSz="914400" rtl="0" eaLnBrk="1" fontAlgn="auto" latinLnBrk="0" hangingPunct="1">
-                <a:lnSpc>
-                  <a:spcPct val="100000"/>
-                </a:lnSpc>
-                <a:spcBef>
-                  <a:spcPts val="0"/>
-                </a:spcBef>
-                <a:spcAft>
-                  <a:spcPts val="0"/>
-                </a:spcAft>
-                <a:buClrTx/>
-                <a:buSzTx/>
-                <a:buFontTx/>
-                <a:buNone/>
-                <a:tabLst/>
-                <a:defRPr/>
-              </a:pPr>
-              <a:r>
-                <a:rPr kumimoji="0" lang="en-US" sz="700" b="1" i="0" u="none" strike="noStrike" kern="1200" cap="none" spc="0" normalizeH="0" baseline="0" noProof="0">
-                  <a:ln>
-                    <a:noFill/>
-                  </a:ln>
-                  <a:solidFill>
-                    <a:schemeClr val="bg1"/>
-                  </a:solidFill>
-                  <a:effectLst/>
-                  <a:uLnTx/>
-                  <a:uFillTx/>
-                  <a:latin typeface="Intel Clear"/>
-                </a:rPr>
-                <a:t>Alpha</a:t>
-              </a:r>
-            </a:p>
-            <a:p>
-              <a:pPr marL="0" marR="0" lvl="0" indent="0" algn="ctr" defTabSz="914400" rtl="0" eaLnBrk="1" fontAlgn="auto" latinLnBrk="0" hangingPunct="1">
-                <a:lnSpc>
-                  <a:spcPct val="100000"/>
-                </a:lnSpc>
-                <a:spcBef>
-                  <a:spcPts val="0"/>
-                </a:spcBef>
-                <a:spcAft>
-                  <a:spcPts val="0"/>
-                </a:spcAft>
-                <a:buClrTx/>
-                <a:buSzTx/>
-                <a:buFontTx/>
-                <a:buNone/>
-                <a:tabLst/>
-                <a:defRPr/>
-              </a:pPr>
-              <a:r>
-                <a:rPr kumimoji="0" lang="en-US" sz="700" b="1" i="0" u="none" strike="noStrike" kern="1200" cap="none" spc="0" normalizeH="0" baseline="0" noProof="0">
-                  <a:ln>
-                    <a:noFill/>
-                  </a:ln>
-                  <a:solidFill>
-                    <a:schemeClr val="bg1"/>
-                  </a:solidFill>
-                  <a:effectLst/>
-                  <a:uLnTx/>
-                  <a:uFillTx/>
-                  <a:latin typeface="Intel Clear"/>
-                </a:rPr>
-                <a:t>Be-Ready</a:t>
-              </a:r>
-            </a:p>
-          </p:txBody>
-        </p:sp>
-        <p:pic>
-          <p:nvPicPr>
-            <p:cNvPr id="112" name="Picture 111">
-              <a:extLst>
-                <a:ext uri="{FF2B5EF4-FFF2-40B4-BE49-F238E27FC236}">
-                  <a16:creationId xmlns:a16="http://schemas.microsoft.com/office/drawing/2014/main" id="{32D456DF-9811-C8E2-3F09-DBB07CEA4111}"/>
-                </a:ext>
-              </a:extLst>
-            </p:cNvPr>
-            <p:cNvPicPr>
-              <a:picLocks noChangeAspect="1"/>
-            </p:cNvPicPr>
-            <p:nvPr/>
-          </p:nvPicPr>
-          <p:blipFill>
-            <a:blip r:embed="rId3" cstate="print">
-              <a:extLst>
-                <a:ext uri="{28A0092B-C50C-407E-A947-70E740481C1C}">
-                  <a14:useLocalDpi xmlns:a14="http://schemas.microsoft.com/office/drawing/2010/main" val="0"/>
-                </a:ext>
-              </a:extLst>
-            </a:blip>
-            <a:srcRect/>
-            <a:stretch/>
-          </p:blipFill>
-          <p:spPr>
-            <a:xfrm>
-              <a:off x="6004340" y="898997"/>
-              <a:ext cx="118785" cy="118785"/>
-            </a:xfrm>
-            <a:prstGeom prst="rect">
-              <a:avLst/>
-            </a:prstGeom>
-            <a:effectLst>
-              <a:glow rad="63500">
-                <a:srgbClr val="5B9BD5">
-                  <a:satMod val="175000"/>
-                  <a:alpha val="18000"/>
-                </a:srgbClr>
-              </a:glow>
-            </a:effectLst>
-          </p:spPr>
-        </p:pic>
-        <p:pic>
-          <p:nvPicPr>
-            <p:cNvPr id="131" name="Picture 130">
-              <a:extLst>
-                <a:ext uri="{FF2B5EF4-FFF2-40B4-BE49-F238E27FC236}">
-                  <a16:creationId xmlns:a16="http://schemas.microsoft.com/office/drawing/2014/main" id="{B043DB4C-D324-743F-84B4-FC300AF93D7B}"/>
-                </a:ext>
-              </a:extLst>
-            </p:cNvPr>
-            <p:cNvPicPr>
-              <a:picLocks noChangeAspect="1"/>
-            </p:cNvPicPr>
-            <p:nvPr/>
-          </p:nvPicPr>
-          <p:blipFill>
-            <a:blip r:embed="rId3" cstate="print">
-              <a:extLst>
-                <a:ext uri="{28A0092B-C50C-407E-A947-70E740481C1C}">
-                  <a14:useLocalDpi xmlns:a14="http://schemas.microsoft.com/office/drawing/2010/main" val="0"/>
-                </a:ext>
-              </a:extLst>
-            </a:blip>
-            <a:srcRect/>
-            <a:stretch/>
-          </p:blipFill>
-          <p:spPr>
-            <a:xfrm>
-              <a:off x="4678534" y="902148"/>
-              <a:ext cx="118785" cy="118786"/>
-            </a:xfrm>
-            <a:prstGeom prst="rect">
-              <a:avLst/>
-            </a:prstGeom>
-            <a:effectLst>
-              <a:glow rad="63500">
-                <a:srgbClr val="5B9BD5">
-                  <a:satMod val="175000"/>
-                  <a:alpha val="18000"/>
-                </a:srgbClr>
-              </a:glow>
-            </a:effectLst>
-          </p:spPr>
-        </p:pic>
-        <p:pic>
-          <p:nvPicPr>
-            <p:cNvPr id="129" name="Picture 128">
-              <a:extLst>
-                <a:ext uri="{FF2B5EF4-FFF2-40B4-BE49-F238E27FC236}">
-                  <a16:creationId xmlns:a16="http://schemas.microsoft.com/office/drawing/2014/main" id="{781C77BC-2E11-CAB8-23DB-051808812815}"/>
-                </a:ext>
-              </a:extLst>
-            </p:cNvPr>
-            <p:cNvPicPr>
-              <a:picLocks noChangeAspect="1"/>
-            </p:cNvPicPr>
-            <p:nvPr/>
-          </p:nvPicPr>
-          <p:blipFill>
-            <a:blip r:embed="rId3" cstate="print">
-              <a:extLst>
-                <a:ext uri="{28A0092B-C50C-407E-A947-70E740481C1C}">
-                  <a14:useLocalDpi xmlns:a14="http://schemas.microsoft.com/office/drawing/2010/main" val="0"/>
-                </a:ext>
-              </a:extLst>
-            </a:blip>
-            <a:srcRect/>
-            <a:stretch/>
-          </p:blipFill>
-          <p:spPr>
-            <a:xfrm>
-              <a:off x="3789807" y="902213"/>
-              <a:ext cx="118785" cy="118786"/>
-            </a:xfrm>
-            <a:prstGeom prst="rect">
-              <a:avLst/>
-            </a:prstGeom>
-            <a:effectLst>
-              <a:glow rad="63500">
-                <a:srgbClr val="5B9BD5">
-                  <a:satMod val="175000"/>
-                  <a:alpha val="18000"/>
-                </a:srgbClr>
-              </a:glow>
-            </a:effectLst>
-          </p:spPr>
-        </p:pic>
-        <p:pic>
-          <p:nvPicPr>
-            <p:cNvPr id="115" name="Picture 114">
-              <a:extLst>
-                <a:ext uri="{FF2B5EF4-FFF2-40B4-BE49-F238E27FC236}">
-                  <a16:creationId xmlns:a16="http://schemas.microsoft.com/office/drawing/2014/main" id="{D5038D44-113D-0334-8DD6-1EE23CED669F}"/>
-                </a:ext>
-              </a:extLst>
-            </p:cNvPr>
-            <p:cNvPicPr>
-              <a:picLocks noChangeAspect="1"/>
-            </p:cNvPicPr>
-            <p:nvPr/>
-          </p:nvPicPr>
-          <p:blipFill>
-            <a:blip r:embed="rId3" cstate="print">
-              <a:extLst>
-                <a:ext uri="{28A0092B-C50C-407E-A947-70E740481C1C}">
-                  <a14:useLocalDpi xmlns:a14="http://schemas.microsoft.com/office/drawing/2010/main" val="0"/>
-                </a:ext>
-              </a:extLst>
-            </a:blip>
-            <a:srcRect/>
-            <a:stretch/>
-          </p:blipFill>
-          <p:spPr>
-            <a:xfrm>
-              <a:off x="5314523" y="913097"/>
-              <a:ext cx="118785" cy="118785"/>
-            </a:xfrm>
-            <a:prstGeom prst="rect">
-              <a:avLst/>
-            </a:prstGeom>
-            <a:effectLst>
-              <a:glow rad="63500">
-                <a:srgbClr val="5B9BD5">
-                  <a:satMod val="175000"/>
-                  <a:alpha val="18000"/>
-                </a:srgbClr>
-              </a:glow>
-            </a:effectLst>
-          </p:spPr>
-        </p:pic>
-        <p:pic>
-          <p:nvPicPr>
-            <p:cNvPr id="127" name="Picture 126">
-              <a:extLst>
-                <a:ext uri="{FF2B5EF4-FFF2-40B4-BE49-F238E27FC236}">
-                  <a16:creationId xmlns:a16="http://schemas.microsoft.com/office/drawing/2014/main" id="{D3DB5819-E790-7B4C-222F-0CAA30942E80}"/>
-                </a:ext>
-              </a:extLst>
-            </p:cNvPr>
-            <p:cNvPicPr>
-              <a:picLocks noChangeAspect="1"/>
-            </p:cNvPicPr>
-            <p:nvPr/>
-          </p:nvPicPr>
-          <p:blipFill>
-            <a:blip r:embed="rId3" cstate="print">
-              <a:extLst>
-                <a:ext uri="{28A0092B-C50C-407E-A947-70E740481C1C}">
-                  <a14:useLocalDpi xmlns:a14="http://schemas.microsoft.com/office/drawing/2010/main" val="0"/>
-                </a:ext>
-              </a:extLst>
-            </a:blip>
-            <a:srcRect/>
-            <a:stretch/>
-          </p:blipFill>
-          <p:spPr>
-            <a:xfrm>
-              <a:off x="9107699" y="888786"/>
-              <a:ext cx="118785" cy="118784"/>
-            </a:xfrm>
-            <a:prstGeom prst="rect">
-              <a:avLst/>
-            </a:prstGeom>
-            <a:effectLst>
-              <a:glow rad="63500">
-                <a:srgbClr val="5B9BD5">
-                  <a:satMod val="175000"/>
-                  <a:alpha val="18000"/>
-                </a:srgbClr>
-              </a:glow>
-            </a:effectLst>
-          </p:spPr>
-        </p:pic>
-        <p:pic>
-          <p:nvPicPr>
-            <p:cNvPr id="117" name="Picture 116">
-              <a:extLst>
-                <a:ext uri="{FF2B5EF4-FFF2-40B4-BE49-F238E27FC236}">
-                  <a16:creationId xmlns:a16="http://schemas.microsoft.com/office/drawing/2014/main" id="{E143AEEE-899D-112A-2518-5FBA823C006E}"/>
-                </a:ext>
-              </a:extLst>
-            </p:cNvPr>
-            <p:cNvPicPr>
-              <a:picLocks noChangeAspect="1"/>
-            </p:cNvPicPr>
-            <p:nvPr/>
-          </p:nvPicPr>
-          <p:blipFill>
-            <a:blip r:embed="rId3" cstate="print">
-              <a:extLst>
-                <a:ext uri="{28A0092B-C50C-407E-A947-70E740481C1C}">
-                  <a14:useLocalDpi xmlns:a14="http://schemas.microsoft.com/office/drawing/2010/main" val="0"/>
-                </a:ext>
-              </a:extLst>
-            </a:blip>
-            <a:srcRect/>
-            <a:stretch/>
-          </p:blipFill>
-          <p:spPr>
-            <a:xfrm>
-              <a:off x="7815767" y="892703"/>
-              <a:ext cx="118785" cy="118785"/>
-            </a:xfrm>
-            <a:prstGeom prst="rect">
-              <a:avLst/>
-            </a:prstGeom>
-            <a:effectLst>
-              <a:glow rad="63500">
-                <a:srgbClr val="5B9BD5">
-                  <a:satMod val="175000"/>
-                  <a:alpha val="18000"/>
-                </a:srgbClr>
-              </a:glow>
-            </a:effectLst>
-          </p:spPr>
-        </p:pic>
-        <p:pic>
-          <p:nvPicPr>
-            <p:cNvPr id="118" name="Picture 117">
-              <a:extLst>
-                <a:ext uri="{FF2B5EF4-FFF2-40B4-BE49-F238E27FC236}">
-                  <a16:creationId xmlns:a16="http://schemas.microsoft.com/office/drawing/2014/main" id="{B7CC251C-A009-82B3-E7BC-C8DCD5343D75}"/>
-                </a:ext>
-              </a:extLst>
-            </p:cNvPr>
-            <p:cNvPicPr>
-              <a:picLocks noChangeAspect="1"/>
-            </p:cNvPicPr>
-            <p:nvPr/>
-          </p:nvPicPr>
-          <p:blipFill>
-            <a:blip r:embed="rId3" cstate="print">
-              <a:extLst>
-                <a:ext uri="{28A0092B-C50C-407E-A947-70E740481C1C}">
-                  <a14:useLocalDpi xmlns:a14="http://schemas.microsoft.com/office/drawing/2010/main" val="0"/>
-                </a:ext>
-              </a:extLst>
-            </a:blip>
-            <a:srcRect/>
-            <a:stretch/>
-          </p:blipFill>
-          <p:spPr>
-            <a:xfrm>
-              <a:off x="6784611" y="892704"/>
-              <a:ext cx="118785" cy="118785"/>
-            </a:xfrm>
-            <a:prstGeom prst="rect">
-              <a:avLst/>
-            </a:prstGeom>
-            <a:effectLst>
-              <a:glow rad="63500">
-                <a:srgbClr val="5B9BD5">
-                  <a:satMod val="175000"/>
-                  <a:alpha val="18000"/>
-                </a:srgbClr>
-              </a:glow>
-            </a:effectLst>
-          </p:spPr>
-        </p:pic>
-        <p:pic>
-          <p:nvPicPr>
-            <p:cNvPr id="125" name="Picture 124">
-              <a:extLst>
-                <a:ext uri="{FF2B5EF4-FFF2-40B4-BE49-F238E27FC236}">
-                  <a16:creationId xmlns:a16="http://schemas.microsoft.com/office/drawing/2014/main" id="{10D47BC3-4CB0-A953-48D6-10C0C8CEB96B}"/>
-                </a:ext>
-              </a:extLst>
-            </p:cNvPr>
-            <p:cNvPicPr>
-              <a:picLocks noChangeAspect="1"/>
-            </p:cNvPicPr>
-            <p:nvPr/>
-          </p:nvPicPr>
-          <p:blipFill>
-            <a:blip r:embed="rId3" cstate="print">
-              <a:extLst>
-                <a:ext uri="{28A0092B-C50C-407E-A947-70E740481C1C}">
-                  <a14:useLocalDpi xmlns:a14="http://schemas.microsoft.com/office/drawing/2010/main" val="0"/>
-                </a:ext>
-              </a:extLst>
-            </a:blip>
-            <a:srcRect/>
-            <a:stretch/>
-          </p:blipFill>
-          <p:spPr>
-            <a:xfrm>
-              <a:off x="9994051" y="886849"/>
-              <a:ext cx="118785" cy="118785"/>
-            </a:xfrm>
-            <a:prstGeom prst="rect">
-              <a:avLst/>
-            </a:prstGeom>
-            <a:effectLst>
-              <a:glow rad="63500">
-                <a:srgbClr val="5B9BD5">
-                  <a:satMod val="175000"/>
-                  <a:alpha val="18000"/>
-                </a:srgbClr>
-              </a:glow>
-            </a:effectLst>
-          </p:spPr>
-        </p:pic>
-        <p:pic>
-          <p:nvPicPr>
-            <p:cNvPr id="123" name="Picture 122">
-              <a:extLst>
-                <a:ext uri="{FF2B5EF4-FFF2-40B4-BE49-F238E27FC236}">
-                  <a16:creationId xmlns:a16="http://schemas.microsoft.com/office/drawing/2014/main" id="{A57CBCD3-10A3-225F-8468-4924D3228AE7}"/>
-                </a:ext>
-              </a:extLst>
-            </p:cNvPr>
-            <p:cNvPicPr>
-              <a:picLocks noChangeAspect="1"/>
-            </p:cNvPicPr>
-            <p:nvPr/>
-          </p:nvPicPr>
-          <p:blipFill>
-            <a:blip r:embed="rId3" cstate="print">
-              <a:extLst>
-                <a:ext uri="{28A0092B-C50C-407E-A947-70E740481C1C}">
-                  <a14:useLocalDpi xmlns:a14="http://schemas.microsoft.com/office/drawing/2010/main" val="0"/>
-                </a:ext>
-              </a:extLst>
-            </a:blip>
-            <a:srcRect/>
-            <a:stretch/>
-          </p:blipFill>
-          <p:spPr>
-            <a:xfrm>
-              <a:off x="10736477" y="893502"/>
-              <a:ext cx="118785" cy="118784"/>
-            </a:xfrm>
-            <a:prstGeom prst="rect">
-              <a:avLst/>
-            </a:prstGeom>
-            <a:effectLst>
-              <a:glow rad="63500">
-                <a:srgbClr val="5B9BD5">
-                  <a:satMod val="175000"/>
-                  <a:alpha val="18000"/>
-                </a:srgbClr>
-              </a:glow>
-            </a:effectLst>
-          </p:spPr>
-        </p:pic>
-        <p:sp>
-          <p:nvSpPr>
-            <p:cNvPr id="121" name="TextBox 90">
-              <a:extLst>
-                <a:ext uri="{FF2B5EF4-FFF2-40B4-BE49-F238E27FC236}">
-                  <a16:creationId xmlns:a16="http://schemas.microsoft.com/office/drawing/2014/main" id="{5E4CC3BA-B3E1-60F1-2F2A-F82460224A33}"/>
-                </a:ext>
-              </a:extLst>
-            </p:cNvPr>
-            <p:cNvSpPr txBox="1"/>
-            <p:nvPr/>
-          </p:nvSpPr>
-          <p:spPr>
-            <a:xfrm>
-              <a:off x="3486341" y="977054"/>
-              <a:ext cx="668773" cy="336458"/>
-            </a:xfrm>
-            <a:prstGeom prst="rect">
-              <a:avLst/>
-            </a:prstGeom>
-            <a:noFill/>
-          </p:spPr>
-          <p:txBody>
-            <a:bodyPr wrap="none" rtlCol="0">
-              <a:spAutoFit/>
-            </a:bodyPr>
-            <a:lstStyle>
-              <a:defPPr marL="0" marR="0" indent="0" algn="l" defTabSz="457200" rtl="0" fontAlgn="auto" latinLnBrk="1" hangingPunct="0">
-                <a:lnSpc>
-                  <a:spcPct val="100000"/>
-                </a:lnSpc>
-                <a:spcBef>
-                  <a:spcPts val="0"/>
-                </a:spcBef>
-                <a:spcAft>
-                  <a:spcPts val="0"/>
-                </a:spcAft>
-                <a:buClrTx/>
-                <a:buSzTx/>
-                <a:buFontTx/>
-                <a:buNone/>
-                <a:tabLst/>
-                <a:defRPr kumimoji="0" sz="900" b="0" i="0" u="none" strike="noStrike" cap="none" spc="0" normalizeH="0" baseline="0">
-                  <a:ln>
-                    <a:noFill/>
-                  </a:ln>
-                  <a:solidFill>
-                    <a:srgbClr val="000000"/>
-                  </a:solidFill>
-                  <a:effectLst/>
-                  <a:uFillTx/>
-                </a:defRPr>
-              </a:defPPr>
-              <a:lvl1pPr marL="0" marR="0" indent="0" algn="l" defTabSz="1219169" rtl="0" fontAlgn="auto" latinLnBrk="0" hangingPunct="0">
-                <a:lnSpc>
-                  <a:spcPct val="90000"/>
-                </a:lnSpc>
-                <a:spcBef>
-                  <a:spcPts val="2250"/>
-                </a:spcBef>
-                <a:spcAft>
-                  <a:spcPts val="0"/>
-                </a:spcAft>
-                <a:buClrTx/>
-                <a:buSzTx/>
-                <a:buFontTx/>
-                <a:buNone/>
-                <a:tabLst/>
-                <a:defRPr kumimoji="0" sz="2400" b="0" i="0" u="none" strike="noStrike" cap="none" spc="0" normalizeH="0" baseline="0">
-                  <a:ln>
-                    <a:noFill/>
-                  </a:ln>
-                  <a:solidFill>
-                    <a:srgbClr val="000000"/>
-                  </a:solidFill>
-                  <a:effectLst/>
-                  <a:uFillTx/>
-                  <a:latin typeface="+mn-lt"/>
-                  <a:ea typeface="+mn-ea"/>
-                  <a:cs typeface="+mn-cs"/>
-                  <a:sym typeface="Helvetica Neue"/>
-                </a:defRPr>
-              </a:lvl1pPr>
-              <a:lvl2pPr marL="0" marR="0" indent="0" algn="l" defTabSz="1219169" rtl="0" fontAlgn="auto" latinLnBrk="0" hangingPunct="0">
-                <a:lnSpc>
-                  <a:spcPct val="90000"/>
-                </a:lnSpc>
-                <a:spcBef>
-                  <a:spcPts val="2250"/>
-                </a:spcBef>
-                <a:spcAft>
-                  <a:spcPts val="0"/>
-                </a:spcAft>
-                <a:buClrTx/>
-                <a:buSzTx/>
-                <a:buFontTx/>
-                <a:buNone/>
-                <a:tabLst/>
-                <a:defRPr kumimoji="0" sz="2400" b="0" i="0" u="none" strike="noStrike" cap="none" spc="0" normalizeH="0" baseline="0">
-                  <a:ln>
-                    <a:noFill/>
-                  </a:ln>
-                  <a:solidFill>
-                    <a:srgbClr val="000000"/>
-                  </a:solidFill>
-                  <a:effectLst/>
-                  <a:uFillTx/>
-                  <a:latin typeface="+mn-lt"/>
-                  <a:ea typeface="+mn-ea"/>
-                  <a:cs typeface="+mn-cs"/>
-                  <a:sym typeface="Helvetica Neue"/>
-                </a:defRPr>
-              </a:lvl2pPr>
-              <a:lvl3pPr marL="0" marR="0" indent="0" algn="l" defTabSz="1219169" rtl="0" fontAlgn="auto" latinLnBrk="0" hangingPunct="0">
-                <a:lnSpc>
-                  <a:spcPct val="90000"/>
-                </a:lnSpc>
-                <a:spcBef>
-                  <a:spcPts val="2250"/>
-                </a:spcBef>
-                <a:spcAft>
-                  <a:spcPts val="0"/>
-                </a:spcAft>
-                <a:buClrTx/>
-                <a:buSzTx/>
-                <a:buFontTx/>
-                <a:buNone/>
-                <a:tabLst/>
-                <a:defRPr kumimoji="0" sz="2400" b="0" i="0" u="none" strike="noStrike" cap="none" spc="0" normalizeH="0" baseline="0">
-                  <a:ln>
-                    <a:noFill/>
-                  </a:ln>
-                  <a:solidFill>
-                    <a:srgbClr val="000000"/>
-                  </a:solidFill>
-                  <a:effectLst/>
-                  <a:uFillTx/>
-                  <a:latin typeface="+mn-lt"/>
-                  <a:ea typeface="+mn-ea"/>
-                  <a:cs typeface="+mn-cs"/>
-                  <a:sym typeface="Helvetica Neue"/>
-                </a:defRPr>
-              </a:lvl3pPr>
-              <a:lvl4pPr marL="0" marR="0" indent="0" algn="l" defTabSz="1219169" rtl="0" fontAlgn="auto" latinLnBrk="0" hangingPunct="0">
-                <a:lnSpc>
-                  <a:spcPct val="90000"/>
-                </a:lnSpc>
-                <a:spcBef>
-                  <a:spcPts val="2250"/>
-                </a:spcBef>
-                <a:spcAft>
-                  <a:spcPts val="0"/>
-                </a:spcAft>
-                <a:buClrTx/>
-                <a:buSzTx/>
-                <a:buFontTx/>
-                <a:buNone/>
-                <a:tabLst/>
-                <a:defRPr kumimoji="0" sz="2400" b="0" i="0" u="none" strike="noStrike" cap="none" spc="0" normalizeH="0" baseline="0">
-                  <a:ln>
-                    <a:noFill/>
-                  </a:ln>
-                  <a:solidFill>
-                    <a:srgbClr val="000000"/>
-                  </a:solidFill>
-                  <a:effectLst/>
-                  <a:uFillTx/>
-                  <a:latin typeface="+mn-lt"/>
-                  <a:ea typeface="+mn-ea"/>
-                  <a:cs typeface="+mn-cs"/>
-                  <a:sym typeface="Helvetica Neue"/>
-                </a:defRPr>
-              </a:lvl4pPr>
-              <a:lvl5pPr marL="0" marR="0" indent="0" algn="l" defTabSz="1219169" rtl="0" fontAlgn="auto" latinLnBrk="0" hangingPunct="0">
-                <a:lnSpc>
-                  <a:spcPct val="90000"/>
-                </a:lnSpc>
-                <a:spcBef>
-                  <a:spcPts val="2250"/>
-                </a:spcBef>
-                <a:spcAft>
-                  <a:spcPts val="0"/>
-                </a:spcAft>
-                <a:buClrTx/>
-                <a:buSzTx/>
-                <a:buFontTx/>
-                <a:buNone/>
-                <a:tabLst/>
-                <a:defRPr kumimoji="0" sz="2400" b="0" i="0" u="none" strike="noStrike" cap="none" spc="0" normalizeH="0" baseline="0">
-                  <a:ln>
-                    <a:noFill/>
-                  </a:ln>
-                  <a:solidFill>
-                    <a:srgbClr val="000000"/>
-                  </a:solidFill>
-                  <a:effectLst/>
-                  <a:uFillTx/>
-                  <a:latin typeface="+mn-lt"/>
-                  <a:ea typeface="+mn-ea"/>
-                  <a:cs typeface="+mn-cs"/>
-                  <a:sym typeface="Helvetica Neue"/>
-                </a:defRPr>
-              </a:lvl5pPr>
-              <a:lvl6pPr marL="0" marR="0" indent="0" algn="l" defTabSz="1219169" rtl="0" fontAlgn="auto" latinLnBrk="0" hangingPunct="0">
-                <a:lnSpc>
-                  <a:spcPct val="90000"/>
-                </a:lnSpc>
-                <a:spcBef>
-                  <a:spcPts val="2250"/>
-                </a:spcBef>
-                <a:spcAft>
-                  <a:spcPts val="0"/>
-                </a:spcAft>
-                <a:buClrTx/>
-                <a:buSzTx/>
-                <a:buFontTx/>
-                <a:buNone/>
-                <a:tabLst/>
-                <a:defRPr kumimoji="0" sz="2400" b="0" i="0" u="none" strike="noStrike" cap="none" spc="0" normalizeH="0" baseline="0">
-                  <a:ln>
-                    <a:noFill/>
-                  </a:ln>
-                  <a:solidFill>
-                    <a:srgbClr val="000000"/>
-                  </a:solidFill>
-                  <a:effectLst/>
-                  <a:uFillTx/>
-                  <a:latin typeface="+mn-lt"/>
-                  <a:ea typeface="+mn-ea"/>
-                  <a:cs typeface="+mn-cs"/>
-                  <a:sym typeface="Helvetica Neue"/>
-                </a:defRPr>
-              </a:lvl6pPr>
-              <a:lvl7pPr marL="0" marR="0" indent="0" algn="l" defTabSz="1219169" rtl="0" fontAlgn="auto" latinLnBrk="0" hangingPunct="0">
-                <a:lnSpc>
-                  <a:spcPct val="90000"/>
-                </a:lnSpc>
-                <a:spcBef>
-                  <a:spcPts val="2250"/>
-                </a:spcBef>
-                <a:spcAft>
-                  <a:spcPts val="0"/>
-                </a:spcAft>
-                <a:buClrTx/>
-                <a:buSzTx/>
-                <a:buFontTx/>
-                <a:buNone/>
-                <a:tabLst/>
-                <a:defRPr kumimoji="0" sz="2400" b="0" i="0" u="none" strike="noStrike" cap="none" spc="0" normalizeH="0" baseline="0">
-                  <a:ln>
-                    <a:noFill/>
-                  </a:ln>
-                  <a:solidFill>
-                    <a:srgbClr val="000000"/>
-                  </a:solidFill>
-                  <a:effectLst/>
-                  <a:uFillTx/>
-                  <a:latin typeface="+mn-lt"/>
-                  <a:ea typeface="+mn-ea"/>
-                  <a:cs typeface="+mn-cs"/>
-                  <a:sym typeface="Helvetica Neue"/>
-                </a:defRPr>
-              </a:lvl7pPr>
-              <a:lvl8pPr marL="0" marR="0" indent="0" algn="l" defTabSz="1219169" rtl="0" fontAlgn="auto" latinLnBrk="0" hangingPunct="0">
-                <a:lnSpc>
-                  <a:spcPct val="90000"/>
-                </a:lnSpc>
-                <a:spcBef>
-                  <a:spcPts val="2250"/>
-                </a:spcBef>
-                <a:spcAft>
-                  <a:spcPts val="0"/>
-                </a:spcAft>
-                <a:buClrTx/>
-                <a:buSzTx/>
-                <a:buFontTx/>
-                <a:buNone/>
-                <a:tabLst/>
-                <a:defRPr kumimoji="0" sz="2400" b="0" i="0" u="none" strike="noStrike" cap="none" spc="0" normalizeH="0" baseline="0">
-                  <a:ln>
-                    <a:noFill/>
-                  </a:ln>
-                  <a:solidFill>
-                    <a:srgbClr val="000000"/>
-                  </a:solidFill>
-                  <a:effectLst/>
-                  <a:uFillTx/>
-                  <a:latin typeface="+mn-lt"/>
-                  <a:ea typeface="+mn-ea"/>
-                  <a:cs typeface="+mn-cs"/>
-                  <a:sym typeface="Helvetica Neue"/>
-                </a:defRPr>
-              </a:lvl8pPr>
-              <a:lvl9pPr marL="0" marR="0" indent="0" algn="l" defTabSz="1219169" rtl="0" fontAlgn="auto" latinLnBrk="0" hangingPunct="0">
-                <a:lnSpc>
-                  <a:spcPct val="90000"/>
-                </a:lnSpc>
-                <a:spcBef>
-                  <a:spcPts val="2250"/>
-                </a:spcBef>
-                <a:spcAft>
-                  <a:spcPts val="0"/>
-                </a:spcAft>
-                <a:buClrTx/>
-                <a:buSzTx/>
-                <a:buFontTx/>
-                <a:buNone/>
-                <a:tabLst/>
-                <a:defRPr kumimoji="0" sz="2400" b="0" i="0" u="none" strike="noStrike" cap="none" spc="0" normalizeH="0" baseline="0">
-                  <a:ln>
-                    <a:noFill/>
-                  </a:ln>
-                  <a:solidFill>
-                    <a:srgbClr val="000000"/>
-                  </a:solidFill>
-                  <a:effectLst/>
-                  <a:uFillTx/>
-                  <a:latin typeface="+mn-lt"/>
-                  <a:ea typeface="+mn-ea"/>
-                  <a:cs typeface="+mn-cs"/>
-                  <a:sym typeface="Helvetica Neue"/>
-                </a:defRPr>
-              </a:lvl9pPr>
-            </a:lstStyle>
-            <a:p>
-              <a:pPr marL="0" marR="0" lvl="0" indent="0" algn="ctr" defTabSz="914400" rtl="0" eaLnBrk="1" fontAlgn="auto" latinLnBrk="0" hangingPunct="1">
-                <a:lnSpc>
-                  <a:spcPct val="100000"/>
-                </a:lnSpc>
-                <a:spcBef>
-                  <a:spcPts val="0"/>
-                </a:spcBef>
-                <a:spcAft>
-                  <a:spcPts val="0"/>
-                </a:spcAft>
-                <a:buClrTx/>
-                <a:buSzTx/>
-                <a:buFontTx/>
-                <a:buNone/>
-                <a:tabLst/>
-                <a:defRPr/>
-              </a:pPr>
-              <a:r>
-                <a:rPr kumimoji="0" lang="en-US" sz="700" b="1" i="0" u="none" strike="noStrike" kern="1200" cap="none" spc="0" normalizeH="0" baseline="0" noProof="0">
-                  <a:ln>
-                    <a:noFill/>
-                  </a:ln>
-                  <a:solidFill>
-                    <a:schemeClr val="bg1"/>
-                  </a:solidFill>
-                  <a:effectLst/>
-                  <a:uLnTx/>
-                  <a:uFillTx/>
-                  <a:latin typeface="Intel Clear"/>
-                </a:rPr>
-                <a:t>Mid-Design</a:t>
-              </a:r>
-            </a:p>
-            <a:p>
-              <a:pPr marL="0" marR="0" lvl="0" indent="0" algn="ctr" defTabSz="914400" rtl="0" eaLnBrk="1" fontAlgn="auto" latinLnBrk="0" hangingPunct="1">
-                <a:lnSpc>
-                  <a:spcPct val="100000"/>
-                </a:lnSpc>
-                <a:spcBef>
-                  <a:spcPts val="0"/>
-                </a:spcBef>
-                <a:spcAft>
-                  <a:spcPts val="0"/>
-                </a:spcAft>
-                <a:buClrTx/>
-                <a:buSzTx/>
-                <a:buFontTx/>
-                <a:buNone/>
-                <a:tabLst/>
-                <a:defRPr/>
-              </a:pPr>
-              <a:r>
-                <a:rPr kumimoji="0" lang="en-US" sz="700" b="1" i="0" u="none" strike="noStrike" kern="1200" cap="none" spc="0" normalizeH="0" baseline="0" noProof="0">
-                  <a:ln>
-                    <a:noFill/>
-                  </a:ln>
-                  <a:solidFill>
-                    <a:schemeClr val="bg1"/>
-                  </a:solidFill>
-                  <a:effectLst/>
-                  <a:uLnTx/>
-                  <a:uFillTx/>
-                  <a:latin typeface="Intel Clear"/>
-                </a:rPr>
-                <a:t>(0.5)</a:t>
-              </a:r>
-            </a:p>
-          </p:txBody>
-        </p:sp>
-      </p:grpSp>
-      <p:sp>
-        <p:nvSpPr>
-          <p:cNvPr id="139" name="TextBox 138">
-            <a:extLst>
-              <a:ext uri="{FF2B5EF4-FFF2-40B4-BE49-F238E27FC236}">
-                <a16:creationId xmlns:a16="http://schemas.microsoft.com/office/drawing/2014/main" id="{7FC459E3-F497-4319-5B75-F6FF2AA9DE87}"/>
-              </a:ext>
-            </a:extLst>
-          </p:cNvPr>
-          <p:cNvSpPr txBox="1"/>
-          <p:nvPr/>
-        </p:nvSpPr>
-        <p:spPr>
-          <a:xfrm>
-            <a:off x="5944887" y="408874"/>
-            <a:ext cx="676788" cy="203582"/>
+            <a:off x="347472" y="164592"/>
+            <a:ext cx="7909560" cy="530352"/>
           </a:xfrm>
           <a:prstGeom prst="rect">
             <a:avLst/>
@@ -31675,38 +25457,41 @@
           <a:noFill/>
         </p:spPr>
         <p:txBody>
-          <a:bodyPr wrap="none" rtlCol="0">
-            <a:spAutoFit/>
+          <a:bodyPr wrap="square" lIns="18288" rIns="18288" tIns="18288" bIns="18288">
+            <a:noAutofit/>
           </a:bodyPr>
           <a:lstStyle/>
           <a:p>
+            <a:pPr>
+              <a:lnSpc>
+                <a:spcPct val="110000"/>
+              </a:lnSpc>
+              <a:spcAft>
+                <a:spcPts val="800"/>
+              </a:spcAft>
+            </a:pPr>
             <a:r>
-              <a:rPr lang="en-US" sz="800" b="1">
+              <a:rPr sz="2500" b="0">
                 <a:solidFill>
-                  <a:schemeClr val="bg1"/>
+                  <a:srgbClr val="18617D"/>
                 </a:solidFill>
+                <a:latin typeface="Calibri"/>
               </a:rPr>
-              <a:t>WW28 ‘27</a:t>
+              <a:t>DMR-16ch | Platform Dashboard - WW00'00</a:t>
             </a:r>
           </a:p>
         </p:txBody>
       </p:sp>
       <p:sp>
         <p:nvSpPr>
-          <p:cNvPr id="140" name="TextBox 139">
-            <a:extLst>
-              <a:ext uri="{FF2B5EF4-FFF2-40B4-BE49-F238E27FC236}">
-                <a16:creationId xmlns:a16="http://schemas.microsoft.com/office/drawing/2014/main" id="{85C4D0F1-9419-B094-BF3F-ACFC953D34C0}"/>
-              </a:ext>
-            </a:extLst>
-          </p:cNvPr>
+          <p:cNvPr id="22" name="review_context"/>
           <p:cNvSpPr txBox="1"/>
           <p:nvPr/>
         </p:nvSpPr>
         <p:spPr>
           <a:xfrm>
-            <a:off x="5181361" y="395692"/>
-            <a:ext cx="651140" cy="203582"/>
+            <a:off x="365760" y="676656"/>
+            <a:ext cx="7680960" cy="256032"/>
           </a:xfrm>
           <a:prstGeom prst="rect">
             <a:avLst/>
@@ -31714,38 +25499,84 @@
           <a:noFill/>
         </p:spPr>
         <p:txBody>
-          <a:bodyPr wrap="none" rtlCol="0">
-            <a:spAutoFit/>
+          <a:bodyPr wrap="square" lIns="18288" rIns="18288" tIns="18288" bIns="18288">
+            <a:noAutofit/>
           </a:bodyPr>
           <a:lstStyle/>
           <a:p>
+            <a:pPr>
+              <a:lnSpc>
+                <a:spcPct val="110000"/>
+              </a:lnSpc>
+              <a:spcAft>
+                <a:spcPts val="800"/>
+              </a:spcAft>
+            </a:pPr>
             <a:r>
-              <a:rPr lang="en-US" sz="800" b="1">
+              <a:rPr sz="1200" b="0">
                 <a:solidFill>
-                  <a:schemeClr val="bg1"/>
+                  <a:srgbClr val="536269"/>
                 </a:solidFill>
+                <a:latin typeface="Calibri"/>
               </a:rPr>
-              <a:t>WW11‘25</a:t>
+              <a:t>MRC / Executive Summary</a:t>
             </a:r>
           </a:p>
         </p:txBody>
       </p:sp>
       <p:sp>
         <p:nvSpPr>
-          <p:cNvPr id="141" name="TextBox 140">
-            <a:extLst>
-              <a:ext uri="{FF2B5EF4-FFF2-40B4-BE49-F238E27FC236}">
-                <a16:creationId xmlns:a16="http://schemas.microsoft.com/office/drawing/2014/main" id="{54FF58D0-71B3-2B7E-9484-ECA9113DD826}"/>
-              </a:ext>
-            </a:extLst>
-          </p:cNvPr>
+          <p:cNvPr id="23" name="header_divider"/>
+          <p:cNvSpPr/>
+          <p:nvPr/>
+        </p:nvSpPr>
+        <p:spPr>
+          <a:xfrm>
+            <a:off x="365760" y="1069848"/>
+            <a:ext cx="11457432" cy="13716"/>
+          </a:xfrm>
+          <a:prstGeom prst="rect">
+            <a:avLst/>
+          </a:prstGeom>
+          <a:solidFill>
+            <a:srgbClr val="18617D"/>
+          </a:solidFill>
+          <a:ln>
+            <a:noFill/>
+          </a:ln>
+        </p:spPr>
+        <p:style>
+          <a:lnRef idx="1">
+            <a:schemeClr val="accent1"/>
+          </a:lnRef>
+          <a:fillRef idx="3">
+            <a:schemeClr val="accent1"/>
+          </a:fillRef>
+          <a:effectRef idx="2">
+            <a:schemeClr val="accent1"/>
+          </a:effectRef>
+          <a:fontRef idx="minor">
+            <a:schemeClr val="lt1"/>
+          </a:fontRef>
+        </p:style>
+        <p:txBody>
+          <a:bodyPr rtlCol="0" anchor="ctr"/>
+          <a:lstStyle/>
+          <a:p>
+            <a:pPr algn="ctr"/>
+          </a:p>
+        </p:txBody>
+      </p:sp>
+      <p:sp>
+        <p:nvSpPr>
+          <p:cNvPr id="24" name="highlights_heading"/>
           <p:cNvSpPr txBox="1"/>
           <p:nvPr/>
         </p:nvSpPr>
         <p:spPr>
           <a:xfrm>
-            <a:off x="3842646" y="409719"/>
-            <a:ext cx="676788" cy="203582"/>
+            <a:off x="365760" y="1252728"/>
+            <a:ext cx="7635240" cy="292608"/>
           </a:xfrm>
           <a:prstGeom prst="rect">
             <a:avLst/>
@@ -31753,38 +25584,41 @@
           <a:noFill/>
         </p:spPr>
         <p:txBody>
-          <a:bodyPr wrap="none" rtlCol="0">
-            <a:spAutoFit/>
+          <a:bodyPr wrap="square" lIns="18288" rIns="18288" tIns="18288" bIns="18288">
+            <a:noAutofit/>
           </a:bodyPr>
           <a:lstStyle/>
           <a:p>
+            <a:pPr>
+              <a:lnSpc>
+                <a:spcPct val="110000"/>
+              </a:lnSpc>
+              <a:spcAft>
+                <a:spcPts val="800"/>
+              </a:spcAft>
+            </a:pPr>
             <a:r>
-              <a:rPr lang="en-US" sz="800" b="1">
+              <a:rPr sz="1700" b="1">
                 <a:solidFill>
-                  <a:schemeClr val="bg1"/>
+                  <a:srgbClr val="18617D"/>
                 </a:solidFill>
+                <a:latin typeface="Calibri"/>
               </a:rPr>
-              <a:t>WW48 ‘26</a:t>
+              <a:t>Highlights</a:t>
             </a:r>
           </a:p>
         </p:txBody>
       </p:sp>
       <p:sp>
         <p:nvSpPr>
-          <p:cNvPr id="142" name="TextBox 141">
-            <a:extLst>
-              <a:ext uri="{FF2B5EF4-FFF2-40B4-BE49-F238E27FC236}">
-                <a16:creationId xmlns:a16="http://schemas.microsoft.com/office/drawing/2014/main" id="{441CBE5D-A571-AB5A-F1A7-F2BFF8E84DEE}"/>
-              </a:ext>
-            </a:extLst>
-          </p:cNvPr>
+          <p:cNvPr id="25" name="highlights"/>
           <p:cNvSpPr txBox="1"/>
           <p:nvPr/>
         </p:nvSpPr>
         <p:spPr>
           <a:xfrm>
-            <a:off x="6948482" y="409719"/>
-            <a:ext cx="676788" cy="203582"/>
+            <a:off x="365760" y="1691640"/>
+            <a:ext cx="7635240" cy="1024128"/>
           </a:xfrm>
           <a:prstGeom prst="rect">
             <a:avLst/>
@@ -31792,38 +25626,60 @@
           <a:noFill/>
         </p:spPr>
         <p:txBody>
-          <a:bodyPr wrap="none" rtlCol="0">
-            <a:spAutoFit/>
+          <a:bodyPr wrap="square" lIns="18288" rIns="18288" tIns="18288" bIns="18288">
+            <a:noAutofit/>
           </a:bodyPr>
           <a:lstStyle/>
           <a:p>
+            <a:pPr>
+              <a:lnSpc>
+                <a:spcPct val="110000"/>
+              </a:lnSpc>
+              <a:spcAft>
+                <a:spcPts val="800"/>
+              </a:spcAft>
+            </a:pPr>
             <a:r>
-              <a:rPr lang="en-US" sz="800" b="1">
+              <a:rPr sz="1400" b="0">
                 <a:solidFill>
-                  <a:schemeClr val="bg1"/>
+                  <a:srgbClr val="243238"/>
                 </a:solidFill>
+                <a:latin typeface="Calibri"/>
               </a:rPr>
-              <a:t>WW49 ‘27</a:t>
+              <a:t>[Key achievement or completed deliverable]  Details</a:t>
+            </a:r>
+          </a:p>
+          <a:p>
+            <a:pPr>
+              <a:lnSpc>
+                <a:spcPct val="110000"/>
+              </a:lnSpc>
+              <a:spcAft>
+                <a:spcPts val="800"/>
+              </a:spcAft>
+            </a:pPr>
+            <a:r>
+              <a:rPr sz="1400" b="0">
+                <a:solidFill>
+                  <a:srgbClr val="243238"/>
+                </a:solidFill>
+                <a:latin typeface="Calibri"/>
+              </a:rPr>
+              <a:t>[Material change or milestone progress this week]  Details</a:t>
             </a:r>
           </a:p>
         </p:txBody>
       </p:sp>
       <p:sp>
         <p:nvSpPr>
-          <p:cNvPr id="143" name="TextBox 142">
-            <a:extLst>
-              <a:ext uri="{FF2B5EF4-FFF2-40B4-BE49-F238E27FC236}">
-                <a16:creationId xmlns:a16="http://schemas.microsoft.com/office/drawing/2014/main" id="{2B459337-9085-7C2A-4DF6-6E6869F1FA35}"/>
-              </a:ext>
-            </a:extLst>
-          </p:cNvPr>
+          <p:cNvPr id="26" name="group_updates_heading"/>
           <p:cNvSpPr txBox="1"/>
           <p:nvPr/>
         </p:nvSpPr>
         <p:spPr>
           <a:xfrm>
-            <a:off x="4497121" y="402720"/>
-            <a:ext cx="651140" cy="203582"/>
+            <a:off x="365760" y="2834640"/>
+            <a:ext cx="7635240" cy="320040"/>
           </a:xfrm>
           <a:prstGeom prst="rect">
             <a:avLst/>
@@ -31831,18 +25687,645 @@
           <a:noFill/>
         </p:spPr>
         <p:txBody>
-          <a:bodyPr wrap="none" rtlCol="0">
-            <a:spAutoFit/>
+          <a:bodyPr wrap="square" lIns="18288" rIns="18288" tIns="18288" bIns="18288">
+            <a:noAutofit/>
           </a:bodyPr>
           <a:lstStyle/>
           <a:p>
+            <a:pPr>
+              <a:lnSpc>
+                <a:spcPct val="110000"/>
+              </a:lnSpc>
+              <a:spcAft>
+                <a:spcPts val="800"/>
+              </a:spcAft>
+            </a:pPr>
             <a:r>
-              <a:rPr lang="en-US" sz="800" b="1">
+              <a:rPr sz="1700" b="1">
                 <a:solidFill>
-                  <a:schemeClr val="bg1"/>
+                  <a:srgbClr val="18617D"/>
                 </a:solidFill>
+                <a:latin typeface="Calibri"/>
               </a:rPr>
-              <a:t>WW14‘27</a:t>
+              <a:t>Priority Updates by Engineering Group</a:t>
+            </a:r>
+          </a:p>
+        </p:txBody>
+      </p:sp>
+      <p:sp>
+        <p:nvSpPr>
+          <p:cNvPr id="27" name="group_updates"/>
+          <p:cNvSpPr txBox="1"/>
+          <p:nvPr/>
+        </p:nvSpPr>
+        <p:spPr>
+          <a:xfrm>
+            <a:off x="365760" y="3291840"/>
+            <a:ext cx="7635240" cy="2816352"/>
+          </a:xfrm>
+          <a:prstGeom prst="rect">
+            <a:avLst/>
+          </a:prstGeom>
+          <a:noFill/>
+        </p:spPr>
+        <p:txBody>
+          <a:bodyPr wrap="square" lIns="18288" rIns="18288" tIns="18288" bIns="18288">
+            <a:noAutofit/>
+          </a:bodyPr>
+          <a:lstStyle/>
+          <a:p>
+            <a:pPr>
+              <a:lnSpc>
+                <a:spcPct val="110000"/>
+              </a:lnSpc>
+              <a:spcAft>
+                <a:spcPts val="800"/>
+              </a:spcAft>
+            </a:pPr>
+            <a:r>
+              <a:rPr sz="1400" b="1">
+                <a:solidFill>
+                  <a:srgbClr val="243238"/>
+                </a:solidFill>
+                <a:latin typeface="Calibri"/>
+              </a:rPr>
+              <a:t>[Engineering group / domain]</a:t>
+            </a:r>
+          </a:p>
+          <a:p>
+            <a:pPr>
+              <a:lnSpc>
+                <a:spcPct val="110000"/>
+              </a:lnSpc>
+              <a:spcAft>
+                <a:spcPts val="800"/>
+              </a:spcAft>
+            </a:pPr>
+            <a:r>
+              <a:rPr sz="1400" b="0">
+                <a:solidFill>
+                  <a:srgbClr val="243238"/>
+                </a:solidFill>
+                <a:latin typeface="Calibri"/>
+              </a:rPr>
+              <a:t>[Issue or change; impact; documented mitigation or support needed]  Details</a:t>
+            </a:r>
+          </a:p>
+          <a:p>
+            <a:pPr>
+              <a:lnSpc>
+                <a:spcPct val="110000"/>
+              </a:lnSpc>
+              <a:spcAft>
+                <a:spcPts val="800"/>
+              </a:spcAft>
+            </a:pPr>
+            <a:r>
+              <a:rPr sz="1400" b="1">
+                <a:solidFill>
+                  <a:srgbClr val="243238"/>
+                </a:solidFill>
+                <a:latin typeface="Calibri"/>
+              </a:rPr>
+              <a:t>[Engineering group / domain]</a:t>
+            </a:r>
+          </a:p>
+          <a:p>
+            <a:pPr>
+              <a:lnSpc>
+                <a:spcPct val="110000"/>
+              </a:lnSpc>
+              <a:spcAft>
+                <a:spcPts val="800"/>
+              </a:spcAft>
+            </a:pPr>
+            <a:r>
+              <a:rPr sz="1400" b="0">
+                <a:solidFill>
+                  <a:srgbClr val="243238"/>
+                </a:solidFill>
+                <a:latin typeface="Calibri"/>
+              </a:rPr>
+              <a:t>[Issue or change; impact; documented mitigation or support needed]  Details</a:t>
+            </a:r>
+          </a:p>
+        </p:txBody>
+      </p:sp>
+      <p:sp>
+        <p:nvSpPr>
+          <p:cNvPr id="28" name="milestones_heading"/>
+          <p:cNvSpPr txBox="1"/>
+          <p:nvPr/>
+        </p:nvSpPr>
+        <p:spPr>
+          <a:xfrm>
+            <a:off x="8266175" y="1252728"/>
+            <a:ext cx="3557016" cy="292608"/>
+          </a:xfrm>
+          <a:prstGeom prst="rect">
+            <a:avLst/>
+          </a:prstGeom>
+          <a:noFill/>
+        </p:spPr>
+        <p:txBody>
+          <a:bodyPr wrap="square" lIns="18288" rIns="18288" tIns="18288" bIns="18288">
+            <a:noAutofit/>
+          </a:bodyPr>
+          <a:lstStyle/>
+          <a:p>
+            <a:pPr>
+              <a:lnSpc>
+                <a:spcPct val="110000"/>
+              </a:lnSpc>
+              <a:spcAft>
+                <a:spcPts val="800"/>
+              </a:spcAft>
+            </a:pPr>
+            <a:r>
+              <a:rPr sz="1700" b="1">
+                <a:solidFill>
+                  <a:srgbClr val="18617D"/>
+                </a:solidFill>
+                <a:latin typeface="Calibri"/>
+              </a:rPr>
+              <a:t>Key Milestones</a:t>
+            </a:r>
+          </a:p>
+        </p:txBody>
+      </p:sp>
+      <p:graphicFrame>
+        <p:nvGraphicFramePr>
+          <p:cNvPr id="29" name="milestone_table"/>
+          <p:cNvGraphicFramePr>
+            <a:graphicFrameLocks noGrp="1"/>
+          </p:cNvGraphicFramePr>
+          <p:nvPr/>
+        </p:nvGraphicFramePr>
+        <p:xfrm>
+          <a:off x="8266175" y="1691640"/>
+          <a:ext cx="3557016" cy="3429000"/>
+        </p:xfrm>
+        <a:graphic>
+          <a:graphicData uri="http://schemas.openxmlformats.org/drawingml/2006/table">
+            <a:tbl>
+              <a:tblPr firstRow="1" bandRow="1">
+                <a:tableStyleId>{5C22544A-7EE6-4342-B048-85BDC9FD1C3A}</a:tableStyleId>
+              </a:tblPr>
+              <a:tblGrid>
+                <a:gridCol w="1399032"/>
+                <a:gridCol w="932688"/>
+                <a:gridCol w="1225296"/>
+              </a:tblGrid>
+              <a:tr h="594360">
+                <a:tc>
+                  <a:txBody>
+                    <a:bodyPr/>
+                    <a:lstStyle/>
+                    <a:p>
+                      <a:r>
+                        <a:rPr sz="1200" b="1">
+                          <a:solidFill>
+                            <a:srgbClr val="FFFFFF"/>
+                          </a:solidFill>
+                          <a:latin typeface="Calibri"/>
+                        </a:rPr>
+                        <a:t>Milestone</a:t>
+                      </a:r>
+                    </a:p>
+                  </a:txBody>
+                  <a:tcPr marL="73152" marR="73152" marT="54864" marB="54864" anchor="ctr">
+                    <a:solidFill>
+                      <a:srgbClr val="18617D"/>
+                    </a:solidFill>
+                  </a:tcPr>
+                </a:tc>
+                <a:tc>
+                  <a:txBody>
+                    <a:bodyPr/>
+                    <a:lstStyle/>
+                    <a:p>
+                      <a:r>
+                        <a:rPr sz="1200" b="1">
+                          <a:solidFill>
+                            <a:srgbClr val="FFFFFF"/>
+                          </a:solidFill>
+                          <a:latin typeface="Calibri"/>
+                        </a:rPr>
+                        <a:t>Drive To</a:t>
+                      </a:r>
+                    </a:p>
+                  </a:txBody>
+                  <a:tcPr marL="73152" marR="73152" marT="54864" marB="54864" anchor="ctr">
+                    <a:solidFill>
+                      <a:srgbClr val="18617D"/>
+                    </a:solidFill>
+                  </a:tcPr>
+                </a:tc>
+                <a:tc>
+                  <a:txBody>
+                    <a:bodyPr/>
+                    <a:lstStyle/>
+                    <a:p>
+                      <a:r>
+                        <a:rPr sz="1200" b="1">
+                          <a:solidFill>
+                            <a:srgbClr val="FFFFFF"/>
+                          </a:solidFill>
+                          <a:latin typeface="Calibri"/>
+                        </a:rPr>
+                        <a:t>Trend / Actual</a:t>
+                      </a:r>
+                    </a:p>
+                  </a:txBody>
+                  <a:tcPr marL="73152" marR="73152" marT="54864" marB="54864" anchor="ctr">
+                    <a:solidFill>
+                      <a:srgbClr val="18617D"/>
+                    </a:solidFill>
+                  </a:tcPr>
+                </a:tc>
+              </a:tr>
+              <a:tr h="566928">
+                <a:tc>
+                  <a:txBody>
+                    <a:bodyPr/>
+                    <a:lstStyle/>
+                    <a:p>
+                      <a:r>
+                        <a:rPr sz="1100" b="0">
+                          <a:solidFill>
+                            <a:srgbClr val="536269"/>
+                          </a:solidFill>
+                          <a:latin typeface="Calibri"/>
+                        </a:rPr>
+                        <a:t>[Milestone]</a:t>
+                      </a:r>
+                    </a:p>
+                  </a:txBody>
+                  <a:tcPr marL="73152" marR="73152" marT="54864" marB="54864" anchor="ctr">
+                    <a:solidFill>
+                      <a:srgbClr val="E9EEF0"/>
+                    </a:solidFill>
+                  </a:tcPr>
+                </a:tc>
+                <a:tc>
+                  <a:txBody>
+                    <a:bodyPr/>
+                    <a:lstStyle/>
+                    <a:p>
+                      <a:r>
+                        <a:rPr sz="1100" b="0">
+                          <a:solidFill>
+                            <a:srgbClr val="536269"/>
+                          </a:solidFill>
+                          <a:latin typeface="Calibri"/>
+                        </a:rPr>
+                        <a:t>[Target]</a:t>
+                      </a:r>
+                    </a:p>
+                  </a:txBody>
+                  <a:tcPr marL="73152" marR="73152" marT="54864" marB="54864" anchor="ctr">
+                    <a:solidFill>
+                      <a:srgbClr val="E9EEF0"/>
+                    </a:solidFill>
+                  </a:tcPr>
+                </a:tc>
+                <a:tc>
+                  <a:txBody>
+                    <a:bodyPr/>
+                    <a:lstStyle/>
+                    <a:p>
+                      <a:r>
+                        <a:rPr sz="1100" b="0">
+                          <a:solidFill>
+                            <a:srgbClr val="536269"/>
+                          </a:solidFill>
+                          <a:latin typeface="Calibri"/>
+                        </a:rPr>
+                        <a:t>[Forecast / actual]</a:t>
+                      </a:r>
+                    </a:p>
+                  </a:txBody>
+                  <a:tcPr marL="73152" marR="73152" marT="54864" marB="54864" anchor="ctr">
+                    <a:solidFill>
+                      <a:srgbClr val="E9EEF0"/>
+                    </a:solidFill>
+                  </a:tcPr>
+                </a:tc>
+              </a:tr>
+              <a:tr h="566928">
+                <a:tc>
+                  <a:txBody>
+                    <a:bodyPr/>
+                    <a:lstStyle/>
+                    <a:p>
+                      <a:r>
+                        <a:rPr sz="1100" b="0">
+                          <a:solidFill>
+                            <a:srgbClr val="536269"/>
+                          </a:solidFill>
+                          <a:latin typeface="Calibri"/>
+                        </a:rPr>
+                        <a:t>[Milestone]</a:t>
+                      </a:r>
+                    </a:p>
+                  </a:txBody>
+                  <a:tcPr marL="73152" marR="73152" marT="54864" marB="54864" anchor="ctr">
+                    <a:solidFill>
+                      <a:srgbClr val="F6F8F9"/>
+                    </a:solidFill>
+                  </a:tcPr>
+                </a:tc>
+                <a:tc>
+                  <a:txBody>
+                    <a:bodyPr/>
+                    <a:lstStyle/>
+                    <a:p>
+                      <a:r>
+                        <a:rPr sz="1100" b="0">
+                          <a:solidFill>
+                            <a:srgbClr val="536269"/>
+                          </a:solidFill>
+                          <a:latin typeface="Calibri"/>
+                        </a:rPr>
+                        <a:t>[Target]</a:t>
+                      </a:r>
+                    </a:p>
+                  </a:txBody>
+                  <a:tcPr marL="73152" marR="73152" marT="54864" marB="54864" anchor="ctr">
+                    <a:solidFill>
+                      <a:srgbClr val="F6F8F9"/>
+                    </a:solidFill>
+                  </a:tcPr>
+                </a:tc>
+                <a:tc>
+                  <a:txBody>
+                    <a:bodyPr/>
+                    <a:lstStyle/>
+                    <a:p>
+                      <a:r>
+                        <a:rPr sz="1100" b="0">
+                          <a:solidFill>
+                            <a:srgbClr val="536269"/>
+                          </a:solidFill>
+                          <a:latin typeface="Calibri"/>
+                        </a:rPr>
+                        <a:t>[Forecast / actual]</a:t>
+                      </a:r>
+                    </a:p>
+                  </a:txBody>
+                  <a:tcPr marL="73152" marR="73152" marT="54864" marB="54864" anchor="ctr">
+                    <a:solidFill>
+                      <a:srgbClr val="F6F8F9"/>
+                    </a:solidFill>
+                  </a:tcPr>
+                </a:tc>
+              </a:tr>
+              <a:tr h="566928">
+                <a:tc>
+                  <a:txBody>
+                    <a:bodyPr/>
+                    <a:lstStyle/>
+                    <a:p>
+                      <a:r>
+                        <a:rPr sz="1100" b="0">
+                          <a:solidFill>
+                            <a:srgbClr val="536269"/>
+                          </a:solidFill>
+                          <a:latin typeface="Calibri"/>
+                        </a:rPr>
+                        <a:t>[Milestone]</a:t>
+                      </a:r>
+                    </a:p>
+                  </a:txBody>
+                  <a:tcPr marL="73152" marR="73152" marT="54864" marB="54864" anchor="ctr">
+                    <a:solidFill>
+                      <a:srgbClr val="E9EEF0"/>
+                    </a:solidFill>
+                  </a:tcPr>
+                </a:tc>
+                <a:tc>
+                  <a:txBody>
+                    <a:bodyPr/>
+                    <a:lstStyle/>
+                    <a:p>
+                      <a:r>
+                        <a:rPr sz="1100" b="0">
+                          <a:solidFill>
+                            <a:srgbClr val="536269"/>
+                          </a:solidFill>
+                          <a:latin typeface="Calibri"/>
+                        </a:rPr>
+                        <a:t>[Target]</a:t>
+                      </a:r>
+                    </a:p>
+                  </a:txBody>
+                  <a:tcPr marL="73152" marR="73152" marT="54864" marB="54864" anchor="ctr">
+                    <a:solidFill>
+                      <a:srgbClr val="E9EEF0"/>
+                    </a:solidFill>
+                  </a:tcPr>
+                </a:tc>
+                <a:tc>
+                  <a:txBody>
+                    <a:bodyPr/>
+                    <a:lstStyle/>
+                    <a:p>
+                      <a:r>
+                        <a:rPr sz="1100" b="0">
+                          <a:solidFill>
+                            <a:srgbClr val="536269"/>
+                          </a:solidFill>
+                          <a:latin typeface="Calibri"/>
+                        </a:rPr>
+                        <a:t>[Forecast / actual]</a:t>
+                      </a:r>
+                    </a:p>
+                  </a:txBody>
+                  <a:tcPr marL="73152" marR="73152" marT="54864" marB="54864" anchor="ctr">
+                    <a:solidFill>
+                      <a:srgbClr val="E9EEF0"/>
+                    </a:solidFill>
+                  </a:tcPr>
+                </a:tc>
+              </a:tr>
+              <a:tr h="566928">
+                <a:tc>
+                  <a:txBody>
+                    <a:bodyPr/>
+                    <a:lstStyle/>
+                    <a:p>
+                      <a:r>
+                        <a:rPr sz="1100" b="0">
+                          <a:solidFill>
+                            <a:srgbClr val="536269"/>
+                          </a:solidFill>
+                          <a:latin typeface="Calibri"/>
+                        </a:rPr>
+                        <a:t>[Milestone]</a:t>
+                      </a:r>
+                    </a:p>
+                  </a:txBody>
+                  <a:tcPr marL="73152" marR="73152" marT="54864" marB="54864" anchor="ctr">
+                    <a:solidFill>
+                      <a:srgbClr val="F6F8F9"/>
+                    </a:solidFill>
+                  </a:tcPr>
+                </a:tc>
+                <a:tc>
+                  <a:txBody>
+                    <a:bodyPr/>
+                    <a:lstStyle/>
+                    <a:p>
+                      <a:r>
+                        <a:rPr sz="1100" b="0">
+                          <a:solidFill>
+                            <a:srgbClr val="536269"/>
+                          </a:solidFill>
+                          <a:latin typeface="Calibri"/>
+                        </a:rPr>
+                        <a:t>[Target]</a:t>
+                      </a:r>
+                    </a:p>
+                  </a:txBody>
+                  <a:tcPr marL="73152" marR="73152" marT="54864" marB="54864" anchor="ctr">
+                    <a:solidFill>
+                      <a:srgbClr val="F6F8F9"/>
+                    </a:solidFill>
+                  </a:tcPr>
+                </a:tc>
+                <a:tc>
+                  <a:txBody>
+                    <a:bodyPr/>
+                    <a:lstStyle/>
+                    <a:p>
+                      <a:r>
+                        <a:rPr sz="1100" b="0">
+                          <a:solidFill>
+                            <a:srgbClr val="536269"/>
+                          </a:solidFill>
+                          <a:latin typeface="Calibri"/>
+                        </a:rPr>
+                        <a:t>[Forecast / actual]</a:t>
+                      </a:r>
+                    </a:p>
+                  </a:txBody>
+                  <a:tcPr marL="73152" marR="73152" marT="54864" marB="54864" anchor="ctr">
+                    <a:solidFill>
+                      <a:srgbClr val="F6F8F9"/>
+                    </a:solidFill>
+                  </a:tcPr>
+                </a:tc>
+              </a:tr>
+              <a:tr h="566928">
+                <a:tc>
+                  <a:txBody>
+                    <a:bodyPr/>
+                    <a:lstStyle/>
+                    <a:p>
+                      <a:r>
+                        <a:rPr sz="1100" b="0">
+                          <a:solidFill>
+                            <a:srgbClr val="536269"/>
+                          </a:solidFill>
+                          <a:latin typeface="Calibri"/>
+                        </a:rPr>
+                        <a:t>[Milestone]</a:t>
+                      </a:r>
+                    </a:p>
+                  </a:txBody>
+                  <a:tcPr marL="73152" marR="73152" marT="54864" marB="54864" anchor="ctr">
+                    <a:solidFill>
+                      <a:srgbClr val="E9EEF0"/>
+                    </a:solidFill>
+                  </a:tcPr>
+                </a:tc>
+                <a:tc>
+                  <a:txBody>
+                    <a:bodyPr/>
+                    <a:lstStyle/>
+                    <a:p>
+                      <a:r>
+                        <a:rPr sz="1100" b="0">
+                          <a:solidFill>
+                            <a:srgbClr val="536269"/>
+                          </a:solidFill>
+                          <a:latin typeface="Calibri"/>
+                        </a:rPr>
+                        <a:t>[Target]</a:t>
+                      </a:r>
+                    </a:p>
+                  </a:txBody>
+                  <a:tcPr marL="73152" marR="73152" marT="54864" marB="54864" anchor="ctr">
+                    <a:solidFill>
+                      <a:srgbClr val="E9EEF0"/>
+                    </a:solidFill>
+                  </a:tcPr>
+                </a:tc>
+                <a:tc>
+                  <a:txBody>
+                    <a:bodyPr/>
+                    <a:lstStyle/>
+                    <a:p>
+                      <a:r>
+                        <a:rPr sz="1100" b="0">
+                          <a:solidFill>
+                            <a:srgbClr val="536269"/>
+                          </a:solidFill>
+                          <a:latin typeface="Calibri"/>
+                        </a:rPr>
+                        <a:t>[Forecast / actual]</a:t>
+                      </a:r>
+                    </a:p>
+                  </a:txBody>
+                  <a:tcPr marL="73152" marR="73152" marT="54864" marB="54864" anchor="ctr">
+                    <a:solidFill>
+                      <a:srgbClr val="E9EEF0"/>
+                    </a:solidFill>
+                  </a:tcPr>
+                </a:tc>
+              </a:tr>
+            </a:tbl>
+          </a:graphicData>
+        </a:graphic>
+      </p:graphicFrame>
+      <p:sp>
+        <p:nvSpPr>
+          <p:cNvPr id="30" name="source_workbook_link"/>
+          <p:cNvSpPr txBox="1"/>
+          <p:nvPr/>
+        </p:nvSpPr>
+        <p:spPr>
+          <a:xfrm>
+            <a:off x="8266175" y="6080760"/>
+            <a:ext cx="3557016" cy="320040"/>
+          </a:xfrm>
+          <a:prstGeom prst="rect">
+            <a:avLst/>
+          </a:prstGeom>
+          <a:noFill/>
+        </p:spPr>
+        <p:txBody>
+          <a:bodyPr wrap="square" lIns="18288" rIns="18288" tIns="18288" bIns="18288">
+            <a:noAutofit/>
+          </a:bodyPr>
+          <a:lstStyle/>
+          <a:p>
+            <a:pPr>
+              <a:lnSpc>
+                <a:spcPct val="110000"/>
+              </a:lnSpc>
+              <a:spcAft>
+                <a:spcPts val="800"/>
+              </a:spcAft>
+            </a:pPr>
+            <a:r>
+              <a:rPr sz="1200" b="0">
+                <a:solidFill>
+                  <a:srgbClr val="24758E"/>
+                </a:solidFill>
+                <a:latin typeface="Calibri"/>
+              </a:rPr>
+              <a:t>Source Excel (link pending)</a:t>
             </a:r>
           </a:p>
         </p:txBody>
@@ -31891,7 +26374,7 @@
       </p:grpSpPr>
       <p:sp>
         <p:nvSpPr>
-          <p:cNvPr id="4" name="TextBox 3">
+          <p:cNvPr id="4" name="details_body">
             <a:extLst>
               <a:ext uri="{FF2B5EF4-FFF2-40B4-BE49-F238E27FC236}">
                 <a16:creationId xmlns:a16="http://schemas.microsoft.com/office/drawing/2014/main" id="{AA60A97D-29FC-D4CB-4AA1-1DDB5203BBF7}"/>
@@ -31918,281 +26401,41 @@
         </p:spPr>
         <p:txBody>
           <a:bodyPr wrap="square" lIns="91440" tIns="45720" rIns="91440" bIns="45720" rtlCol="0" anchor="t">
-            <a:spAutoFit/>
+            <a:noAutofit/>
           </a:bodyPr>
           <a:lstStyle/>
           <a:p>
-            <a:pPr fontAlgn="t">
-              <a:spcBef>
-                <a:spcPts val="600"/>
-              </a:spcBef>
-            </a:pPr>
             <a:r>
-              <a:rPr lang="en-US" sz="1000" b="1" dirty="0"/>
-              <a:t>Data Center Component Engineering</a:t>
+              <a:rPr sz="1400">
+                <a:solidFill>
+                  <a:srgbClr val="243238"/>
+                </a:solidFill>
+                <a:latin typeface="Calibri"/>
+              </a:rPr>
+              <a:t>[Engineering group / domain]</a:t>
             </a:r>
-            <a:endParaRPr lang="en-US" sz="7200" dirty="0"/>
-          </a:p>
-          <a:p>
-            <a:pPr marL="230188" lvl="1" fontAlgn="t">
-              <a:spcBef>
-                <a:spcPts val="600"/>
-              </a:spcBef>
-            </a:pPr>
+          </a:p>
+          <a:p>
             <a:r>
-              <a:rPr lang="en-US" sz="1000" b="1" dirty="0"/>
-              <a:t>Overall DCCE execution is controlled, with most domains green; the main technical watch areas remain Power Integrity and Signal Integrity NUDD closure.</a:t>
+              <a:rPr sz="1400">
+                <a:solidFill>
+                  <a:srgbClr val="243238"/>
+                </a:solidFill>
+                <a:latin typeface="Calibri"/>
+              </a:rPr>
+              <a:t>[Current-week supporting facts and documented actions]</a:t>
             </a:r>
+          </a:p>
+          <a:p>
             <a:r>
-              <a:rPr lang="en-US" sz="1000" dirty="0"/>
-              <a:t> CPU Package Development and VRs are green with no major blockers called out; VR validation shows progress through completed Renesas second-source activity, 900W SKU approval with no BRD/VR config change required, and ongoing Intel blue sheet work for </a:t>
+              <a:rPr sz="1400">
+                <a:solidFill>
+                  <a:srgbClr val="243238"/>
+                </a:solidFill>
+                <a:latin typeface="Calibri"/>
+              </a:rPr>
+              <a:t>[Source worksheet and cell reference / Details link]</a:t>
             </a:r>
-            <a:r>
-              <a:rPr lang="en-US" sz="1000" dirty="0" err="1"/>
-              <a:t>Joulwatt</a:t>
-            </a:r>
-            <a:r>
-              <a:rPr lang="en-US" sz="1000" dirty="0"/>
-              <a:t> telemetry/security review.</a:t>
-            </a:r>
-          </a:p>
-          <a:p>
-            <a:pPr marL="230188" lvl="1" fontAlgn="t">
-              <a:spcBef>
-                <a:spcPts val="600"/>
-              </a:spcBef>
-            </a:pPr>
-            <a:r>
-              <a:rPr lang="en-US" sz="1000" b="1" dirty="0"/>
-              <a:t>The key WW30 challenge is residual validation confidence rather than execution breakdown:</a:t>
-            </a:r>
-            <a:r>
-              <a:rPr lang="en-US" sz="1000" dirty="0"/>
-              <a:t> Signal Integrity remains yellow on NUDDs due to UCIe needing more electrical validation, while Power Integrity remains yellow on NUDDs because UCC1 VCCANA / IMH2 </a:t>
-            </a:r>
-            <a:r>
-              <a:rPr lang="en-US" sz="1000" dirty="0" err="1"/>
-              <a:t>Vmin</a:t>
-            </a:r>
-            <a:r>
-              <a:rPr lang="en-US" sz="1000" dirty="0"/>
-              <a:t> excursion risk and VR telemetry fault-injection verification still require closure; VCCIN characterization is ongoing with closure targeted for WW31 and no ES2/LIRA WW31 risk currently anticipated</a:t>
-            </a:r>
-          </a:p>
-          <a:p>
-            <a:pPr fontAlgn="t">
-              <a:spcBef>
-                <a:spcPts val="600"/>
-              </a:spcBef>
-            </a:pPr>
-            <a:r>
-              <a:rPr lang="en-US" sz="1000" b="1" dirty="0"/>
-              <a:t>Manufacturing Engineering</a:t>
-            </a:r>
-            <a:endParaRPr lang="en-US" sz="7200" dirty="0"/>
-          </a:p>
-          <a:p>
-            <a:pPr marL="230188" fontAlgn="t">
-              <a:spcBef>
-                <a:spcPts val="600"/>
-              </a:spcBef>
-            </a:pPr>
-            <a:r>
-              <a:rPr lang="en-US" sz="1000" b="1" dirty="0"/>
-              <a:t>Manufacturing Engineering carries the highest WW30 execution exposure, with orange status in System Deployment and multiple yellow schedule/material signals across RP operations, MDP, Memory, and IHV supply.</a:t>
-            </a:r>
-            <a:r>
-              <a:rPr lang="en-US" sz="1000" dirty="0"/>
-              <a:t> System Deployment is orange because Alpha demand is only 65% complete, with 420 units pending from a 1,200-unit Q2’26 commitment, and PDB resistor shortages are expected to stop deliveries starting WW31 with no supplier commitment yet. </a:t>
-            </a:r>
-          </a:p>
-          <a:p>
-            <a:pPr marL="230188" fontAlgn="t">
-              <a:spcBef>
-                <a:spcPts val="600"/>
-              </a:spcBef>
-            </a:pPr>
-            <a:r>
-              <a:rPr lang="en-US" sz="1000" b="1" dirty="0"/>
-              <a:t>Progress is visible, but recovery is dependency-heavy:</a:t>
-            </a:r>
-            <a:r>
-              <a:rPr lang="en-US" sz="1000" dirty="0"/>
-              <a:t> RP Manufacturing reports PPV builds/shipments on track and ~65% EPS Alpha demand shipped, MDP1 has mitigated WW29 delivery risk through 16 MDP shipments using 2025-version Lotes sockets, and MDP2 remains on track but under tight-timeline monitoring; however, resistor supply, MDP cable/FRU recovery, supplier responsiveness, memory supplier pushes, and OOC/IHV quote/ETA instability remain the main leadership watch items.</a:t>
-            </a:r>
-            <a:endParaRPr lang="en-US" sz="7200" dirty="0"/>
-          </a:p>
-          <a:p>
-            <a:pPr fontAlgn="t">
-              <a:spcBef>
-                <a:spcPts val="600"/>
-              </a:spcBef>
-            </a:pPr>
-            <a:r>
-              <a:rPr lang="en-US" sz="1000" b="1" dirty="0"/>
-              <a:t>Hardware Engineering</a:t>
-            </a:r>
-            <a:endParaRPr lang="en-US" sz="7200" dirty="0"/>
-          </a:p>
-          <a:p>
-            <a:pPr marL="230188" fontAlgn="t">
-              <a:spcBef>
-                <a:spcPts val="600"/>
-              </a:spcBef>
-            </a:pPr>
-            <a:r>
-              <a:rPr lang="en-US" sz="1000" b="1" dirty="0"/>
-              <a:t>Hardware Engineering is stable in WW30, with RP HPM/PPV and System Boards green across the current dashboard.</a:t>
-            </a:r>
-            <a:r>
-              <a:rPr lang="en-US" sz="1000" dirty="0"/>
-              <a:t> The organization is operating mainly in sustaining, regression closure, CCB evaluation, customer support, and future configuration enablement rather than active program recovery; no major schedule, NUDD, quality, or technical execution blockers are indicated in the WW30 status.</a:t>
-            </a:r>
-            <a:endParaRPr lang="en-US" sz="7200" dirty="0"/>
-          </a:p>
-          <a:p>
-            <a:pPr marL="230188" fontAlgn="t">
-              <a:spcBef>
-                <a:spcPts val="600"/>
-              </a:spcBef>
-            </a:pPr>
-            <a:r>
-              <a:rPr lang="en-US" sz="1000" b="1" dirty="0"/>
-              <a:t>The main Hardware Engineering work is tactical closure and readiness for forward programs:</a:t>
-            </a:r>
-            <a:r>
-              <a:rPr lang="en-US" sz="1000" dirty="0"/>
-              <a:t> RP HPM/PPV is working with </a:t>
-            </a:r>
-            <a:r>
-              <a:rPr lang="en-US" sz="1000" dirty="0" err="1"/>
-              <a:t>Aivres</a:t>
-            </a:r>
-            <a:r>
-              <a:rPr lang="en-US" sz="1000" dirty="0"/>
-              <a:t> to close remaining regressions despite </a:t>
-            </a:r>
-            <a:r>
-              <a:rPr lang="en-US" sz="1000" dirty="0" err="1"/>
-              <a:t>Aivres</a:t>
-            </a:r>
-            <a:r>
-              <a:rPr lang="en-US" sz="1000" dirty="0"/>
-              <a:t> resource delays, evaluating COR-16CH 8S support and AST2700 DCSCM intercepts, while System Boards has resolved the I2C/I3C CEM riser issue and is preparing publication instructions as </a:t>
-            </a:r>
-            <a:r>
-              <a:rPr lang="en-US" sz="1000" dirty="0" err="1"/>
-              <a:t>Aivres</a:t>
-            </a:r>
-            <a:r>
-              <a:rPr lang="en-US" sz="1000" dirty="0"/>
-              <a:t> continues regression documentation.</a:t>
-            </a:r>
-            <a:endParaRPr lang="en-US" sz="7200" dirty="0"/>
-          </a:p>
-          <a:p>
-            <a:pPr fontAlgn="t">
-              <a:spcBef>
-                <a:spcPts val="600"/>
-              </a:spcBef>
-            </a:pPr>
-            <a:r>
-              <a:rPr lang="en-US" sz="1000" b="1" dirty="0"/>
-              <a:t>Thermal and Mechanical Engineering</a:t>
-            </a:r>
-            <a:endParaRPr lang="en-US" sz="7200" dirty="0"/>
-          </a:p>
-          <a:p>
-            <a:pPr marL="230188" fontAlgn="t">
-              <a:spcBef>
-                <a:spcPts val="600"/>
-              </a:spcBef>
-            </a:pPr>
-            <a:r>
-              <a:rPr lang="en-US" sz="1000" b="1" dirty="0"/>
-              <a:t>TME remains a major WW30 risk area, driven by Socket Stack schedule/resource/quality/NUDD yellow status and Thermals schedule/NUDD/technical execution yellow status.</a:t>
-            </a:r>
-            <a:r>
-              <a:rPr lang="en-US" sz="1000" dirty="0"/>
-              <a:t> Socket Stack has zero-week schedule margin to QS-16wk, Lotes socket is lagging due to changes needed to resolve TCT marginality, and long-term reliability findings persist across socket suppliers.</a:t>
-            </a:r>
-            <a:endParaRPr lang="en-US" sz="7200" dirty="0"/>
-          </a:p>
-          <a:p>
-            <a:pPr marL="230188" fontAlgn="t">
-              <a:spcBef>
-                <a:spcPts val="600"/>
-              </a:spcBef>
-            </a:pPr>
-            <a:r>
-              <a:rPr lang="en-US" sz="1000" b="1" dirty="0"/>
-              <a:t>TME also shows meaningful mitigation progress, but not enough to remove risk:</a:t>
-            </a:r>
-            <a:r>
-              <a:rPr lang="en-US" sz="1000" dirty="0"/>
-              <a:t> TE and FIT sockets were recommended to Google for DVT builds and Google is now ungated, LM component testing is 99% complete with final design review targeted by end of August, and cost-reduction work achieved nearly 50% reduction on PEEK ESD101 carriers; however, costs remain ~2.2x target, Lotes post-TCT failures are driving socket body changes, TE post-TCT findings remain under disposition, and Thermals still depends on PTP post-silicon data review and agreement on model assumptions during the WW30 LIRA cycle.</a:t>
-            </a:r>
-            <a:endParaRPr lang="en-US" sz="7200" dirty="0"/>
-          </a:p>
-          <a:p>
-            <a:pPr fontAlgn="t">
-              <a:spcBef>
-                <a:spcPts val="600"/>
-              </a:spcBef>
-            </a:pPr>
-            <a:r>
-              <a:rPr lang="en-US" sz="1000" b="1" dirty="0"/>
-              <a:t>Cloud Systems</a:t>
-            </a:r>
-            <a:endParaRPr lang="en-US" sz="7200" dirty="0"/>
-          </a:p>
-          <a:p>
-            <a:pPr marL="230188" fontAlgn="t">
-              <a:spcBef>
-                <a:spcPts val="600"/>
-              </a:spcBef>
-            </a:pPr>
-            <a:r>
-              <a:rPr lang="en-US" sz="1000" b="1" dirty="0"/>
-              <a:t>Cloud Systems improved to mostly green in WW30, with the remaining issue concentrated in technical execution rather than schedule or resourcing.</a:t>
-            </a:r>
-            <a:r>
-              <a:rPr lang="en-US" sz="1000" dirty="0"/>
-              <a:t> EVT is reported as WIP and on track; after silicon pushout, DVT/Fab2 is trending Dec/January’27 and Fab3 May/June’27, while </a:t>
-            </a:r>
-            <a:r>
-              <a:rPr lang="en-US" sz="1000" dirty="0" err="1"/>
-              <a:t>eSPI</a:t>
-            </a:r>
-            <a:r>
-              <a:rPr lang="en-US" sz="1000" dirty="0"/>
-              <a:t> is now functional after the Intel BKC Advisory WW10 implementation and new HPM CPLD code.</a:t>
-            </a:r>
-            <a:endParaRPr lang="en-US" sz="7200" dirty="0"/>
-          </a:p>
-          <a:p>
-            <a:pPr marL="230188" fontAlgn="t">
-              <a:spcBef>
-                <a:spcPts val="600"/>
-              </a:spcBef>
-            </a:pPr>
-            <a:r>
-              <a:rPr lang="en-US" sz="1000" b="1" dirty="0"/>
-              <a:t>The primary Cloud watchout is validation execution continuity:</a:t>
-            </a:r>
-            <a:r>
-              <a:rPr lang="en-US" sz="1000" dirty="0"/>
-              <a:t> EVT execution is 16% complete with execution paused because ODM is moving validation activities to Malaysia, with resumption expected by August 10; NUDDs remain tied to architectural differentiators including dual-node BMC, </a:t>
-            </a:r>
-            <a:r>
-              <a:rPr lang="en-US" sz="1000" dirty="0" err="1"/>
-              <a:t>flashless</a:t>
-            </a:r>
-            <a:r>
-              <a:rPr lang="en-US" sz="1000" dirty="0"/>
-              <a:t> boot, third-party FPGA solution, aggregator board FPGA removal, and 48V/12V input accommodation.</a:t>
-            </a:r>
-            <a:endParaRPr lang="en-US" sz="7200" dirty="0"/>
           </a:p>
         </p:txBody>
       </p:sp>
